--- a/slides/term_project_presentation_SYNGAS--group 6 Ying.pptx
+++ b/slides/term_project_presentation_SYNGAS--group 6 Ying.pptx
@@ -21,6 +21,8 @@
     <p:sldId id="266" r:id="rId14"/>
     <p:sldId id="267" r:id="rId15"/>
     <p:sldId id="268" r:id="rId16"/>
+    <p:sldId id="269" r:id="rId21"/>
+    <p:sldId id="270" r:id="rId22"/>
   </p:sldIdLst>
   <p:sldSz cx="9144000" cy="6858000" type="screen4x3"/>
   <p:notesSz cx="6858000" cy="9144000"/>
@@ -4866,32 +4868,19 @@
           </a:bodyPr>
           <a:lstStyle/>
           <a:p>
-            <a:pPr algn="ctr">
-              <a:defRPr sz="1800">
-                <a:solidFill>
-                  <a:srgbClr val="646464"/>
-                </a:solidFill>
-              </a:defRPr>
-            </a:pPr>
-            <a:r>
-              <a:rPr/>
+            <a:r>
               <a:t>Solo Project - Student: Ying Tan</a:t>
             </a:r>
-            <a:endParaRPr/>
-          </a:p>
-          <a:p>
-            <a:pPr algn="ctr">
-              <a:defRPr sz="1800">
-                <a:solidFill>
-                  <a:srgbClr val="646464"/>
-                </a:solidFill>
-              </a:defRPr>
-            </a:pPr>
-            <a:r>
-              <a:rPr/>
+          </a:p>
+          <a:p>
+            <a:r>
               <a:t>Machine Learning (CIS 732 ) - Spring 2026</a:t>
             </a:r>
-            <a:endParaRPr/>
+          </a:p>
+          <a:p>
+            <a:r>
+              <a:t>Updated: May 10, 2026 (Ablation + Runtime Added)</a:t>
+            </a:r>
           </a:p>
         </p:txBody>
       </p:sp>
@@ -6471,6 +6460,228 @@
       <p:transition advClick="1"/>
     </mc:Fallback>
   </mc:AlternateContent>
+</p:sld>
+</file>
+
+<file path=ppt/slides/slide14.xml><?xml version="1.0" encoding="utf-8"?>
+<p:sld xmlns:a="http://schemas.openxmlformats.org/drawingml/2006/main" xmlns:p="http://schemas.openxmlformats.org/presentationml/2006/main" xmlns:r="http://schemas.openxmlformats.org/officeDocument/2006/relationships">
+  <p:cSld>
+    <p:spTree>
+      <p:nvGrpSpPr>
+        <p:cNvPr id="1" name=""/>
+        <p:cNvGrpSpPr/>
+        <p:nvPr/>
+      </p:nvGrpSpPr>
+      <p:grpSpPr/>
+      <p:sp>
+        <p:nvSpPr>
+          <p:cNvPr id="2" name="Title 1"/>
+          <p:cNvSpPr>
+            <a:spLocks noGrp="1"/>
+          </p:cNvSpPr>
+          <p:nvPr>
+            <p:ph type="title"/>
+          </p:nvPr>
+        </p:nvSpPr>
+        <p:spPr/>
+        <p:txBody>
+          <a:bodyPr/>
+          <a:lstStyle/>
+          <a:p>
+            <a:r>
+              <a:t>NEW: Scaling Ablation (4 Combinations)</a:t>
+            </a:r>
+          </a:p>
+        </p:txBody>
+      </p:sp>
+      <p:sp>
+        <p:nvSpPr>
+          <p:cNvPr id="3" name="Content Placeholder 2"/>
+          <p:cNvSpPr>
+            <a:spLocks noGrp="1"/>
+          </p:cNvSpPr>
+          <p:nvPr>
+            <p:ph idx="1"/>
+          </p:nvPr>
+        </p:nvSpPr>
+        <p:spPr/>
+        <p:txBody>
+          <a:bodyPr/>
+          <a:lstStyle/>
+          <a:p>
+            <a:pPr>
+              <a:defRPr sz="1600"/>
+            </a:pPr>
+            <a:r>
+              <a:t>Fixed split (seed=42), exact 4-combo test required by feedback:</a:t>
+            </a:r>
+          </a:p>
+          <a:p>
+            <a:pPr>
+              <a:defRPr sz="1400"/>
+            </a:pPr>
+            <a:r>
+              <a:t>1) MLP scaled + RF unscaled:   RF RMSE=4.3706, MLP RMSE=5.5337</a:t>
+            </a:r>
+          </a:p>
+          <a:p>
+            <a:pPr>
+              <a:defRPr sz="1400"/>
+            </a:pPr>
+            <a:r>
+              <a:t>2) MLP scaled + RF scaled:     RF RMSE=4.7972, MLP RMSE=5.5337</a:t>
+            </a:r>
+          </a:p>
+          <a:p>
+            <a:pPr>
+              <a:defRPr sz="1400"/>
+            </a:pPr>
+            <a:r>
+              <a:t>3) MLP unscaled + RF unscaled: RF RMSE=4.3706, MLP RMSE=5.3398</a:t>
+            </a:r>
+          </a:p>
+          <a:p>
+            <a:pPr>
+              <a:defRPr sz="1400"/>
+            </a:pPr>
+            <a:r>
+              <a:t>4) MLP unscaled + RF scaled:   RF RMSE=4.7972, MLP RMSE=5.3398</a:t>
+            </a:r>
+          </a:p>
+          <a:p>
+            <a:pPr>
+              <a:defRPr sz="1400"/>
+            </a:pPr>
+            <a:r>
+              <a:t>Finding: RF is best when unscaled in this dataset; scaling RF degrades RMSE.</a:t>
+            </a:r>
+          </a:p>
+          <a:p>
+            <a:pPr>
+              <a:defRPr sz="1400"/>
+            </a:pPr>
+            <a:r>
+              <a:t>Finding: MLP is sensitive but not catastrophically unstable in either setting.</a:t>
+            </a:r>
+          </a:p>
+          <a:p>
+            <a:pPr>
+              <a:defRPr sz="1400"/>
+            </a:pPr>
+            <a:r>
+              <a:t>Evidence files: scripts/scaling_ablation_results.csv, figures/fig12_scaling_ablation_rmse.png</a:t>
+            </a:r>
+          </a:p>
+        </p:txBody>
+      </p:sp>
+    </p:spTree>
+  </p:cSld>
+  <p:clrMapOvr>
+    <a:masterClrMapping/>
+  </p:clrMapOvr>
+</p:sld>
+</file>
+
+<file path=ppt/slides/slide15.xml><?xml version="1.0" encoding="utf-8"?>
+<p:sld xmlns:a="http://schemas.openxmlformats.org/drawingml/2006/main" xmlns:p="http://schemas.openxmlformats.org/presentationml/2006/main" xmlns:r="http://schemas.openxmlformats.org/officeDocument/2006/relationships">
+  <p:cSld>
+    <p:spTree>
+      <p:nvGrpSpPr>
+        <p:cNvPr id="1" name=""/>
+        <p:cNvGrpSpPr/>
+        <p:nvPr/>
+      </p:nvGrpSpPr>
+      <p:grpSpPr/>
+      <p:sp>
+        <p:nvSpPr>
+          <p:cNvPr id="2" name="Title 1"/>
+          <p:cNvSpPr>
+            <a:spLocks noGrp="1"/>
+          </p:cNvSpPr>
+          <p:nvPr>
+            <p:ph type="title"/>
+          </p:nvPr>
+        </p:nvSpPr>
+        <p:spPr/>
+        <p:txBody>
+          <a:bodyPr/>
+          <a:lstStyle/>
+          <a:p>
+            <a:r>
+              <a:t>NEW: Wall-Clock Runtime (Train + Inference)</a:t>
+            </a:r>
+          </a:p>
+        </p:txBody>
+      </p:sp>
+      <p:sp>
+        <p:nvSpPr>
+          <p:cNvPr id="3" name="Content Placeholder 2"/>
+          <p:cNvSpPr>
+            <a:spLocks noGrp="1"/>
+          </p:cNvSpPr>
+          <p:nvPr>
+            <p:ph idx="1"/>
+          </p:nvPr>
+        </p:nvSpPr>
+        <p:spPr/>
+        <p:txBody>
+          <a:bodyPr/>
+          <a:lstStyle/>
+          <a:p>
+            <a:pPr>
+              <a:defRPr sz="1600"/>
+            </a:pPr>
+            <a:r>
+              <a:t>Runtime measured for each ablation combo on same hardware:</a:t>
+            </a:r>
+          </a:p>
+          <a:p>
+            <a:pPr>
+              <a:defRPr sz="1400"/>
+            </a:pPr>
+            <a:r>
+              <a:t>RF training time:  0.085s to 0.091s</a:t>
+            </a:r>
+          </a:p>
+          <a:p>
+            <a:pPr>
+              <a:defRPr sz="1400"/>
+            </a:pPr>
+            <a:r>
+              <a:t>MLP training time: 0.278s to 0.284s</a:t>
+            </a:r>
+          </a:p>
+          <a:p>
+            <a:pPr>
+              <a:defRPr sz="1400"/>
+            </a:pPr>
+            <a:r>
+              <a:t>Inference latency: both models are sub-millisecond per sample.</a:t>
+            </a:r>
+          </a:p>
+          <a:p>
+            <a:pPr>
+              <a:defRPr sz="1400"/>
+            </a:pPr>
+            <a:r>
+              <a:t>For deployment decision in this project: generalization robustness matters more than speed.</a:t>
+            </a:r>
+          </a:p>
+          <a:p>
+            <a:pPr>
+              <a:defRPr sz="1400"/>
+            </a:pPr>
+            <a:r>
+              <a:t>Evidence figure: figures/fig13_runtime_ablation.png</a:t>
+            </a:r>
+          </a:p>
+        </p:txBody>
+      </p:sp>
+    </p:spTree>
+  </p:cSld>
+  <p:clrMapOvr>
+    <a:masterClrMapping/>
+  </p:clrMapOvr>
 </p:sld>
 </file>
 

--- a/slides/term_project_presentation_SYNGAS--group 6 Ying.pptx
+++ b/slides/term_project_presentation_SYNGAS--group 6 Ying.pptx
@@ -3105,52 +3105,270 @@
       <p:grpSpPr/>
       <p:sp>
         <p:nvSpPr>
-          <p:cNvPr id="2" name="Title 1"/>
-          <p:cNvSpPr>
-            <a:spLocks noGrp="1"/>
-          </p:cNvSpPr>
-          <p:nvPr>
-            <p:ph type="ctrTitle"/>
-          </p:nvPr>
-        </p:nvSpPr>
-        <p:spPr/>
-        <p:txBody>
-          <a:bodyPr/>
-          <a:lstStyle/>
-          <a:p>
-            <a:r>
-              <a:t>Ethanol Concentration Prediction in Syngas Fermentation</a:t>
-            </a:r>
-          </a:p>
-        </p:txBody>
-      </p:sp>
-      <p:sp>
-        <p:nvSpPr>
-          <p:cNvPr id="3" name="Subtitle 2"/>
-          <p:cNvSpPr>
-            <a:spLocks noGrp="1"/>
-          </p:cNvSpPr>
-          <p:nvPr>
-            <p:ph type="subTitle" idx="1"/>
-          </p:nvPr>
-        </p:nvSpPr>
-        <p:spPr/>
-        <p:txBody>
-          <a:bodyPr/>
-          <a:lstStyle/>
-          <a:p>
+          <p:cNvPr id="2" name="Rectangle 1"/>
+          <p:cNvSpPr/>
+          <p:nvPr/>
+        </p:nvSpPr>
+        <p:spPr>
+          <a:xfrm>
+            <a:off x="0" y="0"/>
+            <a:ext cx="12188952" cy="6858000"/>
+          </a:xfrm>
+          <a:prstGeom prst="rect">
+            <a:avLst/>
+          </a:prstGeom>
+          <a:solidFill>
+            <a:srgbClr val="FCFBFF"/>
+          </a:solidFill>
+          <a:ln>
+            <a:noFill/>
+          </a:ln>
+        </p:spPr>
+        <p:style>
+          <a:lnRef idx="1">
+            <a:schemeClr val="accent1"/>
+          </a:lnRef>
+          <a:fillRef idx="3">
+            <a:schemeClr val="accent1"/>
+          </a:fillRef>
+          <a:effectRef idx="2">
+            <a:schemeClr val="accent1"/>
+          </a:effectRef>
+          <a:fontRef idx="minor">
+            <a:schemeClr val="lt1"/>
+          </a:fontRef>
+        </p:style>
+        <p:txBody>
+          <a:bodyPr rtlCol="0" anchor="ctr"/>
+          <a:lstStyle/>
+          <a:p>
+            <a:pPr algn="ctr"/>
+          </a:p>
+        </p:txBody>
+      </p:sp>
+      <p:sp>
+        <p:nvSpPr>
+          <p:cNvPr id="3" name="Rectangle 2"/>
+          <p:cNvSpPr/>
+          <p:nvPr/>
+        </p:nvSpPr>
+        <p:spPr>
+          <a:xfrm>
+            <a:off x="0" y="0"/>
+            <a:ext cx="12188952" cy="411480"/>
+          </a:xfrm>
+          <a:prstGeom prst="rect">
+            <a:avLst/>
+          </a:prstGeom>
+          <a:solidFill>
+            <a:srgbClr val="512888"/>
+          </a:solidFill>
+          <a:ln>
+            <a:noFill/>
+          </a:ln>
+        </p:spPr>
+        <p:style>
+          <a:lnRef idx="1">
+            <a:schemeClr val="accent1"/>
+          </a:lnRef>
+          <a:fillRef idx="3">
+            <a:schemeClr val="accent1"/>
+          </a:fillRef>
+          <a:effectRef idx="2">
+            <a:schemeClr val="accent1"/>
+          </a:effectRef>
+          <a:fontRef idx="minor">
+            <a:schemeClr val="lt1"/>
+          </a:fontRef>
+        </p:style>
+        <p:txBody>
+          <a:bodyPr rtlCol="0" anchor="ctr"/>
+          <a:lstStyle/>
+          <a:p>
+            <a:pPr algn="ctr"/>
+          </a:p>
+        </p:txBody>
+      </p:sp>
+      <p:sp>
+        <p:nvSpPr>
+          <p:cNvPr id="4" name="Rectangle 3"/>
+          <p:cNvSpPr/>
+          <p:nvPr/>
+        </p:nvSpPr>
+        <p:spPr>
+          <a:xfrm>
+            <a:off x="0" y="6583680"/>
+            <a:ext cx="12188952" cy="274320"/>
+          </a:xfrm>
+          <a:prstGeom prst="rect">
+            <a:avLst/>
+          </a:prstGeom>
+          <a:solidFill>
+            <a:srgbClr val="ECE6F5"/>
+          </a:solidFill>
+          <a:ln>
+            <a:noFill/>
+          </a:ln>
+        </p:spPr>
+        <p:style>
+          <a:lnRef idx="1">
+            <a:schemeClr val="accent1"/>
+          </a:lnRef>
+          <a:fillRef idx="3">
+            <a:schemeClr val="accent1"/>
+          </a:fillRef>
+          <a:effectRef idx="2">
+            <a:schemeClr val="accent1"/>
+          </a:effectRef>
+          <a:fontRef idx="minor">
+            <a:schemeClr val="lt1"/>
+          </a:fontRef>
+        </p:style>
+        <p:txBody>
+          <a:bodyPr rtlCol="0" anchor="ctr"/>
+          <a:lstStyle/>
+          <a:p>
+            <a:pPr algn="ctr"/>
+          </a:p>
+        </p:txBody>
+      </p:sp>
+      <p:sp>
+        <p:nvSpPr>
+          <p:cNvPr id="5" name="TextBox 4"/>
+          <p:cNvSpPr txBox="1"/>
+          <p:nvPr/>
+        </p:nvSpPr>
+        <p:spPr>
+          <a:xfrm>
+            <a:off x="320040" y="6601968"/>
+            <a:ext cx="11521440" cy="201168"/>
+          </a:xfrm>
+          <a:prstGeom prst="rect">
+            <a:avLst/>
+          </a:prstGeom>
+          <a:noFill/>
+        </p:spPr>
+        <p:txBody>
+          <a:bodyPr wrap="none">
+            <a:spAutoFit/>
+          </a:bodyPr>
+          <a:lstStyle/>
+          <a:p>
+            <a:pPr>
+              <a:defRPr sz="1000">
+                <a:solidFill>
+                  <a:srgbClr val="544C66"/>
+                </a:solidFill>
+              </a:defRPr>
+            </a:pPr>
+            <a:r>
+              <a:t>Kansas State University | CIS 732/830 | Title</a:t>
+            </a:r>
+          </a:p>
+        </p:txBody>
+      </p:sp>
+      <p:sp>
+        <p:nvSpPr>
+          <p:cNvPr id="6" name="Rectangle 5"/>
+          <p:cNvSpPr/>
+          <p:nvPr/>
+        </p:nvSpPr>
+        <p:spPr>
+          <a:xfrm>
+            <a:off x="548640" y="1143000"/>
+            <a:ext cx="11064240" cy="4480560"/>
+          </a:xfrm>
+          <a:prstGeom prst="rect">
+            <a:avLst/>
+          </a:prstGeom>
+          <a:solidFill>
+            <a:srgbClr val="512888"/>
+          </a:solidFill>
+          <a:ln>
+            <a:noFill/>
+          </a:ln>
+        </p:spPr>
+        <p:style>
+          <a:lnRef idx="1">
+            <a:schemeClr val="accent1"/>
+          </a:lnRef>
+          <a:fillRef idx="3">
+            <a:schemeClr val="accent1"/>
+          </a:fillRef>
+          <a:effectRef idx="2">
+            <a:schemeClr val="accent1"/>
+          </a:effectRef>
+          <a:fontRef idx="minor">
+            <a:schemeClr val="lt1"/>
+          </a:fontRef>
+        </p:style>
+        <p:txBody>
+          <a:bodyPr rtlCol="0" anchor="ctr"/>
+          <a:lstStyle/>
+          <a:p>
+            <a:pPr algn="ctr"/>
+          </a:p>
+        </p:txBody>
+      </p:sp>
+      <p:sp>
+        <p:nvSpPr>
+          <p:cNvPr id="7" name="TextBox 6"/>
+          <p:cNvSpPr txBox="1"/>
+          <p:nvPr/>
+        </p:nvSpPr>
+        <p:spPr>
+          <a:xfrm>
+            <a:off x="914400" y="1554480"/>
+            <a:ext cx="10332720" cy="1920240"/>
+          </a:xfrm>
+          <a:prstGeom prst="rect">
+            <a:avLst/>
+          </a:prstGeom>
+          <a:noFill/>
+        </p:spPr>
+        <p:txBody>
+          <a:bodyPr wrap="none">
+            <a:spAutoFit/>
+          </a:bodyPr>
+          <a:lstStyle/>
+          <a:p>
+            <a:pPr algn="ctr">
+              <a:defRPr sz="4000" b="1">
+                <a:solidFill>
+                  <a:srgbClr val="FFFFFF"/>
+                </a:solidFill>
+              </a:defRPr>
+            </a:pPr>
+            <a:r>
+              <a:t>Ethanol Concentration Prediction</a:t>
+            </a:r>
+            <a:br/>
+            <a:r>
+              <a:t>in Syngas Fermentation</a:t>
+            </a:r>
+          </a:p>
+          <a:p>
+            <a:pPr algn="ctr">
+              <a:defRPr sz="2200">
+                <a:solidFill>
+                  <a:srgbClr val="E8E2F0"/>
+                </a:solidFill>
+              </a:defRPr>
+            </a:pPr>
             <a:r>
               <a:t>CIS 732/830 Final Project</a:t>
             </a:r>
           </a:p>
           <a:p>
-            <a:r>
-              <a:t>Ying Tan</a:t>
-            </a:r>
-          </a:p>
-          <a:p>
-            <a:r>
-              <a:t>Merged deck (no duplicate sections)</a:t>
+            <a:pPr algn="ctr">
+              <a:defRPr sz="1800">
+                <a:solidFill>
+                  <a:srgbClr val="E8E2F0"/>
+                </a:solidFill>
+              </a:defRPr>
+            </a:pPr>
+            <a:r>
+              <a:t>Ying Tan | K-State Theme Edition</a:t>
             </a:r>
           </a:p>
         </p:txBody>
@@ -3175,14 +3393,143 @@
       <p:grpSpPr/>
       <p:sp>
         <p:nvSpPr>
-          <p:cNvPr id="2" name="TextBox 1"/>
+          <p:cNvPr id="2" name="Rectangle 1"/>
+          <p:cNvSpPr/>
+          <p:nvPr/>
+        </p:nvSpPr>
+        <p:spPr>
+          <a:xfrm>
+            <a:off x="0" y="0"/>
+            <a:ext cx="12188952" cy="6858000"/>
+          </a:xfrm>
+          <a:prstGeom prst="rect">
+            <a:avLst/>
+          </a:prstGeom>
+          <a:solidFill>
+            <a:srgbClr val="FCFBFF"/>
+          </a:solidFill>
+          <a:ln>
+            <a:noFill/>
+          </a:ln>
+        </p:spPr>
+        <p:style>
+          <a:lnRef idx="1">
+            <a:schemeClr val="accent1"/>
+          </a:lnRef>
+          <a:fillRef idx="3">
+            <a:schemeClr val="accent1"/>
+          </a:fillRef>
+          <a:effectRef idx="2">
+            <a:schemeClr val="accent1"/>
+          </a:effectRef>
+          <a:fontRef idx="minor">
+            <a:schemeClr val="lt1"/>
+          </a:fontRef>
+        </p:style>
+        <p:txBody>
+          <a:bodyPr rtlCol="0" anchor="ctr"/>
+          <a:lstStyle/>
+          <a:p>
+            <a:pPr algn="ctr"/>
+          </a:p>
+        </p:txBody>
+      </p:sp>
+      <p:sp>
+        <p:nvSpPr>
+          <p:cNvPr id="3" name="Rectangle 2"/>
+          <p:cNvSpPr/>
+          <p:nvPr/>
+        </p:nvSpPr>
+        <p:spPr>
+          <a:xfrm>
+            <a:off x="0" y="0"/>
+            <a:ext cx="12188952" cy="411480"/>
+          </a:xfrm>
+          <a:prstGeom prst="rect">
+            <a:avLst/>
+          </a:prstGeom>
+          <a:solidFill>
+            <a:srgbClr val="512888"/>
+          </a:solidFill>
+          <a:ln>
+            <a:noFill/>
+          </a:ln>
+        </p:spPr>
+        <p:style>
+          <a:lnRef idx="1">
+            <a:schemeClr val="accent1"/>
+          </a:lnRef>
+          <a:fillRef idx="3">
+            <a:schemeClr val="accent1"/>
+          </a:fillRef>
+          <a:effectRef idx="2">
+            <a:schemeClr val="accent1"/>
+          </a:effectRef>
+          <a:fontRef idx="minor">
+            <a:schemeClr val="lt1"/>
+          </a:fontRef>
+        </p:style>
+        <p:txBody>
+          <a:bodyPr rtlCol="0" anchor="ctr"/>
+          <a:lstStyle/>
+          <a:p>
+            <a:pPr algn="ctr"/>
+          </a:p>
+        </p:txBody>
+      </p:sp>
+      <p:sp>
+        <p:nvSpPr>
+          <p:cNvPr id="4" name="Rectangle 3"/>
+          <p:cNvSpPr/>
+          <p:nvPr/>
+        </p:nvSpPr>
+        <p:spPr>
+          <a:xfrm>
+            <a:off x="0" y="6583680"/>
+            <a:ext cx="12188952" cy="274320"/>
+          </a:xfrm>
+          <a:prstGeom prst="rect">
+            <a:avLst/>
+          </a:prstGeom>
+          <a:solidFill>
+            <a:srgbClr val="ECE6F5"/>
+          </a:solidFill>
+          <a:ln>
+            <a:noFill/>
+          </a:ln>
+        </p:spPr>
+        <p:style>
+          <a:lnRef idx="1">
+            <a:schemeClr val="accent1"/>
+          </a:lnRef>
+          <a:fillRef idx="3">
+            <a:schemeClr val="accent1"/>
+          </a:fillRef>
+          <a:effectRef idx="2">
+            <a:schemeClr val="accent1"/>
+          </a:effectRef>
+          <a:fontRef idx="minor">
+            <a:schemeClr val="lt1"/>
+          </a:fontRef>
+        </p:style>
+        <p:txBody>
+          <a:bodyPr rtlCol="0" anchor="ctr"/>
+          <a:lstStyle/>
+          <a:p>
+            <a:pPr algn="ctr"/>
+          </a:p>
+        </p:txBody>
+      </p:sp>
+      <p:sp>
+        <p:nvSpPr>
+          <p:cNvPr id="5" name="TextBox 4"/>
           <p:cNvSpPr txBox="1"/>
           <p:nvPr/>
         </p:nvSpPr>
         <p:spPr>
           <a:xfrm>
-            <a:off x="274320" y="91440"/>
-            <a:ext cx="11704320" cy="502920"/>
+            <a:off x="320040" y="6601968"/>
+            <a:ext cx="11521440" cy="201168"/>
           </a:xfrm>
           <a:prstGeom prst="rect">
             <a:avLst/>
@@ -3196,17 +3543,101 @@
           <a:lstStyle/>
           <a:p>
             <a:pPr>
-              <a:defRPr sz="2700" b="1"/>
+              <a:defRPr sz="1000">
+                <a:solidFill>
+                  <a:srgbClr val="544C66"/>
+                </a:solidFill>
+              </a:defRPr>
             </a:pPr>
             <a:r>
+              <a:t>Kansas State University | CIS 732/830 | Figure</a:t>
+            </a:r>
+          </a:p>
+        </p:txBody>
+      </p:sp>
+      <p:sp>
+        <p:nvSpPr>
+          <p:cNvPr id="6" name="TextBox 5"/>
+          <p:cNvSpPr txBox="1"/>
+          <p:nvPr/>
+        </p:nvSpPr>
+        <p:spPr>
+          <a:xfrm>
+            <a:off x="502920" y="475488"/>
+            <a:ext cx="11155680" cy="502920"/>
+          </a:xfrm>
+          <a:prstGeom prst="rect">
+            <a:avLst/>
+          </a:prstGeom>
+          <a:noFill/>
+        </p:spPr>
+        <p:txBody>
+          <a:bodyPr wrap="none">
+            <a:spAutoFit/>
+          </a:bodyPr>
+          <a:lstStyle/>
+          <a:p>
+            <a:pPr>
+              <a:defRPr sz="2800" b="1">
+                <a:solidFill>
+                  <a:srgbClr val="512888"/>
+                </a:solidFill>
+              </a:defRPr>
+            </a:pPr>
+            <a:r>
               <a:t>Figure 8: RF Feature Importance</a:t>
             </a:r>
+          </a:p>
+        </p:txBody>
+      </p:sp>
+      <p:sp>
+        <p:nvSpPr>
+          <p:cNvPr id="7" name="Rounded Rectangle 6"/>
+          <p:cNvSpPr/>
+          <p:nvPr/>
+        </p:nvSpPr>
+        <p:spPr>
+          <a:xfrm>
+            <a:off x="411480" y="1051560"/>
+            <a:ext cx="8092440" cy="4892040"/>
+          </a:xfrm>
+          <a:prstGeom prst="roundRect">
+            <a:avLst/>
+          </a:prstGeom>
+          <a:solidFill>
+            <a:srgbClr val="FFFFFF"/>
+          </a:solidFill>
+          <a:ln>
+            <a:solidFill>
+              <a:srgbClr val="E8E2F0"/>
+            </a:solidFill>
+          </a:ln>
+        </p:spPr>
+        <p:style>
+          <a:lnRef idx="1">
+            <a:schemeClr val="accent1"/>
+          </a:lnRef>
+          <a:fillRef idx="3">
+            <a:schemeClr val="accent1"/>
+          </a:fillRef>
+          <a:effectRef idx="2">
+            <a:schemeClr val="accent1"/>
+          </a:effectRef>
+          <a:fontRef idx="minor">
+            <a:schemeClr val="lt1"/>
+          </a:fontRef>
+        </p:style>
+        <p:txBody>
+          <a:bodyPr rtlCol="0" anchor="ctr"/>
+          <a:lstStyle/>
+          <a:p>
+            <a:pPr algn="ctr"/>
           </a:p>
         </p:txBody>
       </p:sp>
       <p:pic>
         <p:nvPicPr>
-          <p:cNvPr id="3" name="Picture 2" descr="fig8_RF_feature_importance.png"/>
+          <p:cNvPr id="8" name="Picture 7" descr="fig8_RF_feature_importance.png"/>
           <p:cNvPicPr>
             <a:picLocks noChangeAspect="1"/>
           </p:cNvPicPr>
@@ -3220,8 +3651,8 @@
         </p:blipFill>
         <p:spPr>
           <a:xfrm>
-            <a:off x="274320" y="777240"/>
-            <a:ext cx="7863840" cy="5212080"/>
+            <a:off x="621792" y="1261872"/>
+            <a:ext cx="7680960" cy="4480560"/>
           </a:xfrm>
           <a:prstGeom prst="rect">
             <a:avLst/>
@@ -3230,14 +3661,118 @@
       </p:pic>
       <p:sp>
         <p:nvSpPr>
-          <p:cNvPr id="4" name="TextBox 3"/>
+          <p:cNvPr id="9" name="Rounded Rectangle 8"/>
+          <p:cNvSpPr/>
+          <p:nvPr/>
+        </p:nvSpPr>
+        <p:spPr>
+          <a:xfrm>
+            <a:off x="8641080" y="1051560"/>
+            <a:ext cx="3063240" cy="4892040"/>
+          </a:xfrm>
+          <a:prstGeom prst="roundRect">
+            <a:avLst/>
+          </a:prstGeom>
+          <a:solidFill>
+            <a:srgbClr val="F7F4FC"/>
+          </a:solidFill>
+          <a:ln>
+            <a:solidFill>
+              <a:srgbClr val="E8E2F0"/>
+            </a:solidFill>
+          </a:ln>
+        </p:spPr>
+        <p:style>
+          <a:lnRef idx="1">
+            <a:schemeClr val="accent1"/>
+          </a:lnRef>
+          <a:fillRef idx="3">
+            <a:schemeClr val="accent1"/>
+          </a:fillRef>
+          <a:effectRef idx="2">
+            <a:schemeClr val="accent1"/>
+          </a:effectRef>
+          <a:fontRef idx="minor">
+            <a:schemeClr val="lt1"/>
+          </a:fontRef>
+        </p:style>
+        <p:txBody>
+          <a:bodyPr rtlCol="0" anchor="ctr"/>
+          <a:lstStyle/>
+          <a:p>
+            <a:pPr algn="ctr"/>
+          </a:p>
+        </p:txBody>
+      </p:sp>
+      <p:sp>
+        <p:nvSpPr>
+          <p:cNvPr id="10" name="TextBox 9"/>
           <p:cNvSpPr txBox="1"/>
           <p:nvPr/>
         </p:nvSpPr>
         <p:spPr>
           <a:xfrm>
-            <a:off x="8229600" y="777240"/>
-            <a:ext cx="3474720" cy="5303520"/>
+            <a:off x="8887968" y="1234440"/>
+            <a:ext cx="2651760" cy="4526280"/>
+          </a:xfrm>
+          <a:prstGeom prst="rect">
+            <a:avLst/>
+          </a:prstGeom>
+          <a:noFill/>
+        </p:spPr>
+        <p:txBody>
+          <a:bodyPr wrap="square">
+            <a:spAutoFit/>
+          </a:bodyPr>
+          <a:lstStyle/>
+          <a:p>
+            <a:pPr>
+              <a:defRPr sz="1500">
+                <a:solidFill>
+                  <a:srgbClr val="251F2D"/>
+                </a:solidFill>
+              </a:defRPr>
+            </a:pPr>
+            <a:r>
+              <a:t>- Ranks feature contributions in RF.</a:t>
+            </a:r>
+          </a:p>
+          <a:p>
+            <a:pPr>
+              <a:defRPr sz="1400">
+                <a:solidFill>
+                  <a:srgbClr val="251F2D"/>
+                </a:solidFill>
+              </a:defRPr>
+            </a:pPr>
+            <a:r>
+              <a:t>- Improves interpretability for operations.</a:t>
+            </a:r>
+          </a:p>
+          <a:p>
+            <a:pPr>
+              <a:defRPr sz="1400">
+                <a:solidFill>
+                  <a:srgbClr val="251F2D"/>
+                </a:solidFill>
+              </a:defRPr>
+            </a:pPr>
+            <a:r>
+              <a:t>- Guides future feature engineering.</a:t>
+            </a:r>
+          </a:p>
+        </p:txBody>
+      </p:sp>
+      <p:sp>
+        <p:nvSpPr>
+          <p:cNvPr id="11" name="TextBox 10"/>
+          <p:cNvSpPr txBox="1"/>
+          <p:nvPr/>
+        </p:nvSpPr>
+        <p:spPr>
+          <a:xfrm>
+            <a:off x="658368" y="5623560"/>
+            <a:ext cx="7406640" cy="256032"/>
           </a:xfrm>
           <a:prstGeom prst="rect">
             <a:avLst/>
@@ -3251,26 +3786,14 @@
           <a:lstStyle/>
           <a:p>
             <a:pPr>
-              <a:defRPr sz="1500"/>
+              <a:defRPr sz="1000">
+                <a:solidFill>
+                  <a:srgbClr val="625D6C"/>
+                </a:solidFill>
+              </a:defRPr>
             </a:pPr>
             <a:r>
-              <a:t>Ranks feature contributions in RF.</a:t>
-            </a:r>
-          </a:p>
-          <a:p>
-            <a:pPr>
-              <a:defRPr sz="1500"/>
-            </a:pPr>
-            <a:r>
-              <a:t>Improves interpretability for operations.</a:t>
-            </a:r>
-          </a:p>
-          <a:p>
-            <a:pPr>
-              <a:defRPr sz="1500"/>
-            </a:pPr>
-            <a:r>
-              <a:t>Guides future feature engineering.</a:t>
+              <a:t>All values and figures are generated from scripts/syngas_analysis.py</a:t>
             </a:r>
           </a:p>
         </p:txBody>
@@ -3295,14 +3818,143 @@
       <p:grpSpPr/>
       <p:sp>
         <p:nvSpPr>
-          <p:cNvPr id="2" name="TextBox 1"/>
+          <p:cNvPr id="2" name="Rectangle 1"/>
+          <p:cNvSpPr/>
+          <p:nvPr/>
+        </p:nvSpPr>
+        <p:spPr>
+          <a:xfrm>
+            <a:off x="0" y="0"/>
+            <a:ext cx="12188952" cy="6858000"/>
+          </a:xfrm>
+          <a:prstGeom prst="rect">
+            <a:avLst/>
+          </a:prstGeom>
+          <a:solidFill>
+            <a:srgbClr val="FCFBFF"/>
+          </a:solidFill>
+          <a:ln>
+            <a:noFill/>
+          </a:ln>
+        </p:spPr>
+        <p:style>
+          <a:lnRef idx="1">
+            <a:schemeClr val="accent1"/>
+          </a:lnRef>
+          <a:fillRef idx="3">
+            <a:schemeClr val="accent1"/>
+          </a:fillRef>
+          <a:effectRef idx="2">
+            <a:schemeClr val="accent1"/>
+          </a:effectRef>
+          <a:fontRef idx="minor">
+            <a:schemeClr val="lt1"/>
+          </a:fontRef>
+        </p:style>
+        <p:txBody>
+          <a:bodyPr rtlCol="0" anchor="ctr"/>
+          <a:lstStyle/>
+          <a:p>
+            <a:pPr algn="ctr"/>
+          </a:p>
+        </p:txBody>
+      </p:sp>
+      <p:sp>
+        <p:nvSpPr>
+          <p:cNvPr id="3" name="Rectangle 2"/>
+          <p:cNvSpPr/>
+          <p:nvPr/>
+        </p:nvSpPr>
+        <p:spPr>
+          <a:xfrm>
+            <a:off x="0" y="0"/>
+            <a:ext cx="12188952" cy="411480"/>
+          </a:xfrm>
+          <a:prstGeom prst="rect">
+            <a:avLst/>
+          </a:prstGeom>
+          <a:solidFill>
+            <a:srgbClr val="512888"/>
+          </a:solidFill>
+          <a:ln>
+            <a:noFill/>
+          </a:ln>
+        </p:spPr>
+        <p:style>
+          <a:lnRef idx="1">
+            <a:schemeClr val="accent1"/>
+          </a:lnRef>
+          <a:fillRef idx="3">
+            <a:schemeClr val="accent1"/>
+          </a:fillRef>
+          <a:effectRef idx="2">
+            <a:schemeClr val="accent1"/>
+          </a:effectRef>
+          <a:fontRef idx="minor">
+            <a:schemeClr val="lt1"/>
+          </a:fontRef>
+        </p:style>
+        <p:txBody>
+          <a:bodyPr rtlCol="0" anchor="ctr"/>
+          <a:lstStyle/>
+          <a:p>
+            <a:pPr algn="ctr"/>
+          </a:p>
+        </p:txBody>
+      </p:sp>
+      <p:sp>
+        <p:nvSpPr>
+          <p:cNvPr id="4" name="Rectangle 3"/>
+          <p:cNvSpPr/>
+          <p:nvPr/>
+        </p:nvSpPr>
+        <p:spPr>
+          <a:xfrm>
+            <a:off x="0" y="6583680"/>
+            <a:ext cx="12188952" cy="274320"/>
+          </a:xfrm>
+          <a:prstGeom prst="rect">
+            <a:avLst/>
+          </a:prstGeom>
+          <a:solidFill>
+            <a:srgbClr val="ECE6F5"/>
+          </a:solidFill>
+          <a:ln>
+            <a:noFill/>
+          </a:ln>
+        </p:spPr>
+        <p:style>
+          <a:lnRef idx="1">
+            <a:schemeClr val="accent1"/>
+          </a:lnRef>
+          <a:fillRef idx="3">
+            <a:schemeClr val="accent1"/>
+          </a:fillRef>
+          <a:effectRef idx="2">
+            <a:schemeClr val="accent1"/>
+          </a:effectRef>
+          <a:fontRef idx="minor">
+            <a:schemeClr val="lt1"/>
+          </a:fontRef>
+        </p:style>
+        <p:txBody>
+          <a:bodyPr rtlCol="0" anchor="ctr"/>
+          <a:lstStyle/>
+          <a:p>
+            <a:pPr algn="ctr"/>
+          </a:p>
+        </p:txBody>
+      </p:sp>
+      <p:sp>
+        <p:nvSpPr>
+          <p:cNvPr id="5" name="TextBox 4"/>
           <p:cNvSpPr txBox="1"/>
           <p:nvPr/>
         </p:nvSpPr>
         <p:spPr>
           <a:xfrm>
-            <a:off x="274320" y="91440"/>
-            <a:ext cx="11704320" cy="502920"/>
+            <a:off x="320040" y="6601968"/>
+            <a:ext cx="11521440" cy="201168"/>
           </a:xfrm>
           <a:prstGeom prst="rect">
             <a:avLst/>
@@ -3316,17 +3968,101 @@
           <a:lstStyle/>
           <a:p>
             <a:pPr>
-              <a:defRPr sz="2700" b="1"/>
+              <a:defRPr sz="1000">
+                <a:solidFill>
+                  <a:srgbClr val="544C66"/>
+                </a:solidFill>
+              </a:defRPr>
             </a:pPr>
             <a:r>
+              <a:t>Kansas State University | CIS 732/830 | Figure</a:t>
+            </a:r>
+          </a:p>
+        </p:txBody>
+      </p:sp>
+      <p:sp>
+        <p:nvSpPr>
+          <p:cNvPr id="6" name="TextBox 5"/>
+          <p:cNvSpPr txBox="1"/>
+          <p:nvPr/>
+        </p:nvSpPr>
+        <p:spPr>
+          <a:xfrm>
+            <a:off x="502920" y="475488"/>
+            <a:ext cx="11155680" cy="502920"/>
+          </a:xfrm>
+          <a:prstGeom prst="rect">
+            <a:avLst/>
+          </a:prstGeom>
+          <a:noFill/>
+        </p:spPr>
+        <p:txBody>
+          <a:bodyPr wrap="none">
+            <a:spAutoFit/>
+          </a:bodyPr>
+          <a:lstStyle/>
+          <a:p>
+            <a:pPr>
+              <a:defRPr sz="2800" b="1">
+                <a:solidFill>
+                  <a:srgbClr val="512888"/>
+                </a:solidFill>
+              </a:defRPr>
+            </a:pPr>
+            <a:r>
               <a:t>Figure 9: Error Comparison</a:t>
             </a:r>
+          </a:p>
+        </p:txBody>
+      </p:sp>
+      <p:sp>
+        <p:nvSpPr>
+          <p:cNvPr id="7" name="Rounded Rectangle 6"/>
+          <p:cNvSpPr/>
+          <p:nvPr/>
+        </p:nvSpPr>
+        <p:spPr>
+          <a:xfrm>
+            <a:off x="411480" y="1051560"/>
+            <a:ext cx="8092440" cy="4892040"/>
+          </a:xfrm>
+          <a:prstGeom prst="roundRect">
+            <a:avLst/>
+          </a:prstGeom>
+          <a:solidFill>
+            <a:srgbClr val="FFFFFF"/>
+          </a:solidFill>
+          <a:ln>
+            <a:solidFill>
+              <a:srgbClr val="E8E2F0"/>
+            </a:solidFill>
+          </a:ln>
+        </p:spPr>
+        <p:style>
+          <a:lnRef idx="1">
+            <a:schemeClr val="accent1"/>
+          </a:lnRef>
+          <a:fillRef idx="3">
+            <a:schemeClr val="accent1"/>
+          </a:fillRef>
+          <a:effectRef idx="2">
+            <a:schemeClr val="accent1"/>
+          </a:effectRef>
+          <a:fontRef idx="minor">
+            <a:schemeClr val="lt1"/>
+          </a:fontRef>
+        </p:style>
+        <p:txBody>
+          <a:bodyPr rtlCol="0" anchor="ctr"/>
+          <a:lstStyle/>
+          <a:p>
+            <a:pPr algn="ctr"/>
           </a:p>
         </p:txBody>
       </p:sp>
       <p:pic>
         <p:nvPicPr>
-          <p:cNvPr id="3" name="Picture 2" descr="fig9_error_comparison.png"/>
+          <p:cNvPr id="8" name="Picture 7" descr="fig9_error_comparison.png"/>
           <p:cNvPicPr>
             <a:picLocks noChangeAspect="1"/>
           </p:cNvPicPr>
@@ -3340,8 +4076,8 @@
         </p:blipFill>
         <p:spPr>
           <a:xfrm>
-            <a:off x="274320" y="777240"/>
-            <a:ext cx="7863840" cy="5212080"/>
+            <a:off x="621792" y="1261872"/>
+            <a:ext cx="7680960" cy="4480560"/>
           </a:xfrm>
           <a:prstGeom prst="rect">
             <a:avLst/>
@@ -3350,14 +4086,118 @@
       </p:pic>
       <p:sp>
         <p:nvSpPr>
-          <p:cNvPr id="4" name="TextBox 3"/>
+          <p:cNvPr id="9" name="Rounded Rectangle 8"/>
+          <p:cNvSpPr/>
+          <p:nvPr/>
+        </p:nvSpPr>
+        <p:spPr>
+          <a:xfrm>
+            <a:off x="8641080" y="1051560"/>
+            <a:ext cx="3063240" cy="4892040"/>
+          </a:xfrm>
+          <a:prstGeom prst="roundRect">
+            <a:avLst/>
+          </a:prstGeom>
+          <a:solidFill>
+            <a:srgbClr val="F7F4FC"/>
+          </a:solidFill>
+          <a:ln>
+            <a:solidFill>
+              <a:srgbClr val="E8E2F0"/>
+            </a:solidFill>
+          </a:ln>
+        </p:spPr>
+        <p:style>
+          <a:lnRef idx="1">
+            <a:schemeClr val="accent1"/>
+          </a:lnRef>
+          <a:fillRef idx="3">
+            <a:schemeClr val="accent1"/>
+          </a:fillRef>
+          <a:effectRef idx="2">
+            <a:schemeClr val="accent1"/>
+          </a:effectRef>
+          <a:fontRef idx="minor">
+            <a:schemeClr val="lt1"/>
+          </a:fontRef>
+        </p:style>
+        <p:txBody>
+          <a:bodyPr rtlCol="0" anchor="ctr"/>
+          <a:lstStyle/>
+          <a:p>
+            <a:pPr algn="ctr"/>
+          </a:p>
+        </p:txBody>
+      </p:sp>
+      <p:sp>
+        <p:nvSpPr>
+          <p:cNvPr id="10" name="TextBox 9"/>
           <p:cNvSpPr txBox="1"/>
           <p:nvPr/>
         </p:nvSpPr>
         <p:spPr>
           <a:xfrm>
-            <a:off x="8229600" y="777240"/>
-            <a:ext cx="3474720" cy="5303520"/>
+            <a:off x="8887968" y="1234440"/>
+            <a:ext cx="2651760" cy="4526280"/>
+          </a:xfrm>
+          <a:prstGeom prst="rect">
+            <a:avLst/>
+          </a:prstGeom>
+          <a:noFill/>
+        </p:spPr>
+        <p:txBody>
+          <a:bodyPr wrap="square">
+            <a:spAutoFit/>
+          </a:bodyPr>
+          <a:lstStyle/>
+          <a:p>
+            <a:pPr>
+              <a:defRPr sz="1500">
+                <a:solidFill>
+                  <a:srgbClr val="251F2D"/>
+                </a:solidFill>
+              </a:defRPr>
+            </a:pPr>
+            <a:r>
+              <a:t>- Compares test-set error distributions.</a:t>
+            </a:r>
+          </a:p>
+          <a:p>
+            <a:pPr>
+              <a:defRPr sz="1400">
+                <a:solidFill>
+                  <a:srgbClr val="251F2D"/>
+                </a:solidFill>
+              </a:defRPr>
+            </a:pPr>
+            <a:r>
+              <a:t>- Paired sample view supports hypothesis testing.</a:t>
+            </a:r>
+          </a:p>
+          <a:p>
+            <a:pPr>
+              <a:defRPr sz="1400">
+                <a:solidFill>
+                  <a:srgbClr val="251F2D"/>
+                </a:solidFill>
+              </a:defRPr>
+            </a:pPr>
+            <a:r>
+              <a:t>- RF errors are generally lower than LR.</a:t>
+            </a:r>
+          </a:p>
+        </p:txBody>
+      </p:sp>
+      <p:sp>
+        <p:nvSpPr>
+          <p:cNvPr id="11" name="TextBox 10"/>
+          <p:cNvSpPr txBox="1"/>
+          <p:nvPr/>
+        </p:nvSpPr>
+        <p:spPr>
+          <a:xfrm>
+            <a:off x="658368" y="5623560"/>
+            <a:ext cx="7406640" cy="256032"/>
           </a:xfrm>
           <a:prstGeom prst="rect">
             <a:avLst/>
@@ -3371,26 +4211,14 @@
           <a:lstStyle/>
           <a:p>
             <a:pPr>
-              <a:defRPr sz="1500"/>
+              <a:defRPr sz="1000">
+                <a:solidFill>
+                  <a:srgbClr val="625D6C"/>
+                </a:solidFill>
+              </a:defRPr>
             </a:pPr>
             <a:r>
-              <a:t>Compares test-set error distributions.</a:t>
-            </a:r>
-          </a:p>
-          <a:p>
-            <a:pPr>
-              <a:defRPr sz="1500"/>
-            </a:pPr>
-            <a:r>
-              <a:t>Paired sample view supports hypothesis testing.</a:t>
-            </a:r>
-          </a:p>
-          <a:p>
-            <a:pPr>
-              <a:defRPr sz="1500"/>
-            </a:pPr>
-            <a:r>
-              <a:t>RF errors are generally lower than LR.</a:t>
+              <a:t>All values and figures are generated from scripts/syngas_analysis.py</a:t>
             </a:r>
           </a:p>
         </p:txBody>
@@ -3415,14 +4243,143 @@
       <p:grpSpPr/>
       <p:sp>
         <p:nvSpPr>
-          <p:cNvPr id="2" name="TextBox 1"/>
+          <p:cNvPr id="2" name="Rectangle 1"/>
+          <p:cNvSpPr/>
+          <p:nvPr/>
+        </p:nvSpPr>
+        <p:spPr>
+          <a:xfrm>
+            <a:off x="0" y="0"/>
+            <a:ext cx="12188952" cy="6858000"/>
+          </a:xfrm>
+          <a:prstGeom prst="rect">
+            <a:avLst/>
+          </a:prstGeom>
+          <a:solidFill>
+            <a:srgbClr val="FCFBFF"/>
+          </a:solidFill>
+          <a:ln>
+            <a:noFill/>
+          </a:ln>
+        </p:spPr>
+        <p:style>
+          <a:lnRef idx="1">
+            <a:schemeClr val="accent1"/>
+          </a:lnRef>
+          <a:fillRef idx="3">
+            <a:schemeClr val="accent1"/>
+          </a:fillRef>
+          <a:effectRef idx="2">
+            <a:schemeClr val="accent1"/>
+          </a:effectRef>
+          <a:fontRef idx="minor">
+            <a:schemeClr val="lt1"/>
+          </a:fontRef>
+        </p:style>
+        <p:txBody>
+          <a:bodyPr rtlCol="0" anchor="ctr"/>
+          <a:lstStyle/>
+          <a:p>
+            <a:pPr algn="ctr"/>
+          </a:p>
+        </p:txBody>
+      </p:sp>
+      <p:sp>
+        <p:nvSpPr>
+          <p:cNvPr id="3" name="Rectangle 2"/>
+          <p:cNvSpPr/>
+          <p:nvPr/>
+        </p:nvSpPr>
+        <p:spPr>
+          <a:xfrm>
+            <a:off x="0" y="0"/>
+            <a:ext cx="12188952" cy="411480"/>
+          </a:xfrm>
+          <a:prstGeom prst="rect">
+            <a:avLst/>
+          </a:prstGeom>
+          <a:solidFill>
+            <a:srgbClr val="512888"/>
+          </a:solidFill>
+          <a:ln>
+            <a:noFill/>
+          </a:ln>
+        </p:spPr>
+        <p:style>
+          <a:lnRef idx="1">
+            <a:schemeClr val="accent1"/>
+          </a:lnRef>
+          <a:fillRef idx="3">
+            <a:schemeClr val="accent1"/>
+          </a:fillRef>
+          <a:effectRef idx="2">
+            <a:schemeClr val="accent1"/>
+          </a:effectRef>
+          <a:fontRef idx="minor">
+            <a:schemeClr val="lt1"/>
+          </a:fontRef>
+        </p:style>
+        <p:txBody>
+          <a:bodyPr rtlCol="0" anchor="ctr"/>
+          <a:lstStyle/>
+          <a:p>
+            <a:pPr algn="ctr"/>
+          </a:p>
+        </p:txBody>
+      </p:sp>
+      <p:sp>
+        <p:nvSpPr>
+          <p:cNvPr id="4" name="Rectangle 3"/>
+          <p:cNvSpPr/>
+          <p:nvPr/>
+        </p:nvSpPr>
+        <p:spPr>
+          <a:xfrm>
+            <a:off x="0" y="6583680"/>
+            <a:ext cx="12188952" cy="274320"/>
+          </a:xfrm>
+          <a:prstGeom prst="rect">
+            <a:avLst/>
+          </a:prstGeom>
+          <a:solidFill>
+            <a:srgbClr val="ECE6F5"/>
+          </a:solidFill>
+          <a:ln>
+            <a:noFill/>
+          </a:ln>
+        </p:spPr>
+        <p:style>
+          <a:lnRef idx="1">
+            <a:schemeClr val="accent1"/>
+          </a:lnRef>
+          <a:fillRef idx="3">
+            <a:schemeClr val="accent1"/>
+          </a:fillRef>
+          <a:effectRef idx="2">
+            <a:schemeClr val="accent1"/>
+          </a:effectRef>
+          <a:fontRef idx="minor">
+            <a:schemeClr val="lt1"/>
+          </a:fontRef>
+        </p:style>
+        <p:txBody>
+          <a:bodyPr rtlCol="0" anchor="ctr"/>
+          <a:lstStyle/>
+          <a:p>
+            <a:pPr algn="ctr"/>
+          </a:p>
+        </p:txBody>
+      </p:sp>
+      <p:sp>
+        <p:nvSpPr>
+          <p:cNvPr id="5" name="TextBox 4"/>
           <p:cNvSpPr txBox="1"/>
           <p:nvPr/>
         </p:nvSpPr>
         <p:spPr>
           <a:xfrm>
-            <a:off x="274320" y="91440"/>
-            <a:ext cx="11704320" cy="502920"/>
+            <a:off x="320040" y="6601968"/>
+            <a:ext cx="11521440" cy="201168"/>
           </a:xfrm>
           <a:prstGeom prst="rect">
             <a:avLst/>
@@ -3436,17 +4393,101 @@
           <a:lstStyle/>
           <a:p>
             <a:pPr>
-              <a:defRPr sz="2700" b="1"/>
+              <a:defRPr sz="1000">
+                <a:solidFill>
+                  <a:srgbClr val="544C66"/>
+                </a:solidFill>
+              </a:defRPr>
             </a:pPr>
             <a:r>
+              <a:t>Kansas State University | CIS 732/830 | Figure</a:t>
+            </a:r>
+          </a:p>
+        </p:txBody>
+      </p:sp>
+      <p:sp>
+        <p:nvSpPr>
+          <p:cNvPr id="6" name="TextBox 5"/>
+          <p:cNvSpPr txBox="1"/>
+          <p:nvPr/>
+        </p:nvSpPr>
+        <p:spPr>
+          <a:xfrm>
+            <a:off x="502920" y="475488"/>
+            <a:ext cx="11155680" cy="502920"/>
+          </a:xfrm>
+          <a:prstGeom prst="rect">
+            <a:avLst/>
+          </a:prstGeom>
+          <a:noFill/>
+        </p:spPr>
+        <p:txBody>
+          <a:bodyPr wrap="none">
+            <a:spAutoFit/>
+          </a:bodyPr>
+          <a:lstStyle/>
+          <a:p>
+            <a:pPr>
+              <a:defRPr sz="2800" b="1">
+                <a:solidFill>
+                  <a:srgbClr val="512888"/>
+                </a:solidFill>
+              </a:defRPr>
+            </a:pPr>
+            <a:r>
               <a:t>Figure 10: Robustness Boxplot</a:t>
             </a:r>
+          </a:p>
+        </p:txBody>
+      </p:sp>
+      <p:sp>
+        <p:nvSpPr>
+          <p:cNvPr id="7" name="Rounded Rectangle 6"/>
+          <p:cNvSpPr/>
+          <p:nvPr/>
+        </p:nvSpPr>
+        <p:spPr>
+          <a:xfrm>
+            <a:off x="411480" y="1051560"/>
+            <a:ext cx="8092440" cy="4892040"/>
+          </a:xfrm>
+          <a:prstGeom prst="roundRect">
+            <a:avLst/>
+          </a:prstGeom>
+          <a:solidFill>
+            <a:srgbClr val="FFFFFF"/>
+          </a:solidFill>
+          <a:ln>
+            <a:solidFill>
+              <a:srgbClr val="E8E2F0"/>
+            </a:solidFill>
+          </a:ln>
+        </p:spPr>
+        <p:style>
+          <a:lnRef idx="1">
+            <a:schemeClr val="accent1"/>
+          </a:lnRef>
+          <a:fillRef idx="3">
+            <a:schemeClr val="accent1"/>
+          </a:fillRef>
+          <a:effectRef idx="2">
+            <a:schemeClr val="accent1"/>
+          </a:effectRef>
+          <a:fontRef idx="minor">
+            <a:schemeClr val="lt1"/>
+          </a:fontRef>
+        </p:style>
+        <p:txBody>
+          <a:bodyPr rtlCol="0" anchor="ctr"/>
+          <a:lstStyle/>
+          <a:p>
+            <a:pPr algn="ctr"/>
           </a:p>
         </p:txBody>
       </p:sp>
       <p:pic>
         <p:nvPicPr>
-          <p:cNvPr id="3" name="Picture 2" descr="fig10_robustness_boxplot.png"/>
+          <p:cNvPr id="8" name="Picture 7" descr="fig10_robustness_boxplot.png"/>
           <p:cNvPicPr>
             <a:picLocks noChangeAspect="1"/>
           </p:cNvPicPr>
@@ -3460,8 +4501,8 @@
         </p:blipFill>
         <p:spPr>
           <a:xfrm>
-            <a:off x="274320" y="777240"/>
-            <a:ext cx="7863840" cy="5212080"/>
+            <a:off x="621792" y="1261872"/>
+            <a:ext cx="7680960" cy="4480560"/>
           </a:xfrm>
           <a:prstGeom prst="rect">
             <a:avLst/>
@@ -3470,14 +4511,118 @@
       </p:pic>
       <p:sp>
         <p:nvSpPr>
-          <p:cNvPr id="4" name="TextBox 3"/>
+          <p:cNvPr id="9" name="Rounded Rectangle 8"/>
+          <p:cNvSpPr/>
+          <p:nvPr/>
+        </p:nvSpPr>
+        <p:spPr>
+          <a:xfrm>
+            <a:off x="8641080" y="1051560"/>
+            <a:ext cx="3063240" cy="4892040"/>
+          </a:xfrm>
+          <a:prstGeom prst="roundRect">
+            <a:avLst/>
+          </a:prstGeom>
+          <a:solidFill>
+            <a:srgbClr val="F7F4FC"/>
+          </a:solidFill>
+          <a:ln>
+            <a:solidFill>
+              <a:srgbClr val="E8E2F0"/>
+            </a:solidFill>
+          </a:ln>
+        </p:spPr>
+        <p:style>
+          <a:lnRef idx="1">
+            <a:schemeClr val="accent1"/>
+          </a:lnRef>
+          <a:fillRef idx="3">
+            <a:schemeClr val="accent1"/>
+          </a:fillRef>
+          <a:effectRef idx="2">
+            <a:schemeClr val="accent1"/>
+          </a:effectRef>
+          <a:fontRef idx="minor">
+            <a:schemeClr val="lt1"/>
+          </a:fontRef>
+        </p:style>
+        <p:txBody>
+          <a:bodyPr rtlCol="0" anchor="ctr"/>
+          <a:lstStyle/>
+          <a:p>
+            <a:pPr algn="ctr"/>
+          </a:p>
+        </p:txBody>
+      </p:sp>
+      <p:sp>
+        <p:nvSpPr>
+          <p:cNvPr id="10" name="TextBox 9"/>
           <p:cNvSpPr txBox="1"/>
           <p:nvPr/>
         </p:nvSpPr>
         <p:spPr>
           <a:xfrm>
-            <a:off x="8229600" y="777240"/>
-            <a:ext cx="3474720" cy="5303520"/>
+            <a:off x="8887968" y="1234440"/>
+            <a:ext cx="2651760" cy="4526280"/>
+          </a:xfrm>
+          <a:prstGeom prst="rect">
+            <a:avLst/>
+          </a:prstGeom>
+          <a:noFill/>
+        </p:spPr>
+        <p:txBody>
+          <a:bodyPr wrap="square">
+            <a:spAutoFit/>
+          </a:bodyPr>
+          <a:lstStyle/>
+          <a:p>
+            <a:pPr>
+              <a:defRPr sz="1500">
+                <a:solidFill>
+                  <a:srgbClr val="251F2D"/>
+                </a:solidFill>
+              </a:defRPr>
+            </a:pPr>
+            <a:r>
+              <a:t>- RMSE distribution over 30 random splits.</a:t>
+            </a:r>
+          </a:p>
+          <a:p>
+            <a:pPr>
+              <a:defRPr sz="1400">
+                <a:solidFill>
+                  <a:srgbClr val="251F2D"/>
+                </a:solidFill>
+              </a:defRPr>
+            </a:pPr>
+            <a:r>
+              <a:t>- Measures stability beyond one split.</a:t>
+            </a:r>
+          </a:p>
+          <a:p>
+            <a:pPr>
+              <a:defRPr sz="1400">
+                <a:solidFill>
+                  <a:srgbClr val="251F2D"/>
+                </a:solidFill>
+              </a:defRPr>
+            </a:pPr>
+            <a:r>
+              <a:t>- RF remains most stable overall.</a:t>
+            </a:r>
+          </a:p>
+        </p:txBody>
+      </p:sp>
+      <p:sp>
+        <p:nvSpPr>
+          <p:cNvPr id="11" name="TextBox 10"/>
+          <p:cNvSpPr txBox="1"/>
+          <p:nvPr/>
+        </p:nvSpPr>
+        <p:spPr>
+          <a:xfrm>
+            <a:off x="658368" y="5623560"/>
+            <a:ext cx="7406640" cy="256032"/>
           </a:xfrm>
           <a:prstGeom prst="rect">
             <a:avLst/>
@@ -3491,26 +4636,14 @@
           <a:lstStyle/>
           <a:p>
             <a:pPr>
-              <a:defRPr sz="1500"/>
+              <a:defRPr sz="1000">
+                <a:solidFill>
+                  <a:srgbClr val="625D6C"/>
+                </a:solidFill>
+              </a:defRPr>
             </a:pPr>
             <a:r>
-              <a:t>RMSE distribution over 30 random splits.</a:t>
-            </a:r>
-          </a:p>
-          <a:p>
-            <a:pPr>
-              <a:defRPr sz="1500"/>
-            </a:pPr>
-            <a:r>
-              <a:t>Measures stability beyond one split.</a:t>
-            </a:r>
-          </a:p>
-          <a:p>
-            <a:pPr>
-              <a:defRPr sz="1500"/>
-            </a:pPr>
-            <a:r>
-              <a:t>RF remains most stable overall.</a:t>
+              <a:t>All values and figures are generated from scripts/syngas_analysis.py</a:t>
             </a:r>
           </a:p>
         </p:txBody>
@@ -3535,14 +4668,143 @@
       <p:grpSpPr/>
       <p:sp>
         <p:nvSpPr>
-          <p:cNvPr id="2" name="TextBox 1"/>
+          <p:cNvPr id="2" name="Rectangle 1"/>
+          <p:cNvSpPr/>
+          <p:nvPr/>
+        </p:nvSpPr>
+        <p:spPr>
+          <a:xfrm>
+            <a:off x="0" y="0"/>
+            <a:ext cx="12188952" cy="6858000"/>
+          </a:xfrm>
+          <a:prstGeom prst="rect">
+            <a:avLst/>
+          </a:prstGeom>
+          <a:solidFill>
+            <a:srgbClr val="FCFBFF"/>
+          </a:solidFill>
+          <a:ln>
+            <a:noFill/>
+          </a:ln>
+        </p:spPr>
+        <p:style>
+          <a:lnRef idx="1">
+            <a:schemeClr val="accent1"/>
+          </a:lnRef>
+          <a:fillRef idx="3">
+            <a:schemeClr val="accent1"/>
+          </a:fillRef>
+          <a:effectRef idx="2">
+            <a:schemeClr val="accent1"/>
+          </a:effectRef>
+          <a:fontRef idx="minor">
+            <a:schemeClr val="lt1"/>
+          </a:fontRef>
+        </p:style>
+        <p:txBody>
+          <a:bodyPr rtlCol="0" anchor="ctr"/>
+          <a:lstStyle/>
+          <a:p>
+            <a:pPr algn="ctr"/>
+          </a:p>
+        </p:txBody>
+      </p:sp>
+      <p:sp>
+        <p:nvSpPr>
+          <p:cNvPr id="3" name="Rectangle 2"/>
+          <p:cNvSpPr/>
+          <p:nvPr/>
+        </p:nvSpPr>
+        <p:spPr>
+          <a:xfrm>
+            <a:off x="0" y="0"/>
+            <a:ext cx="12188952" cy="411480"/>
+          </a:xfrm>
+          <a:prstGeom prst="rect">
+            <a:avLst/>
+          </a:prstGeom>
+          <a:solidFill>
+            <a:srgbClr val="512888"/>
+          </a:solidFill>
+          <a:ln>
+            <a:noFill/>
+          </a:ln>
+        </p:spPr>
+        <p:style>
+          <a:lnRef idx="1">
+            <a:schemeClr val="accent1"/>
+          </a:lnRef>
+          <a:fillRef idx="3">
+            <a:schemeClr val="accent1"/>
+          </a:fillRef>
+          <a:effectRef idx="2">
+            <a:schemeClr val="accent1"/>
+          </a:effectRef>
+          <a:fontRef idx="minor">
+            <a:schemeClr val="lt1"/>
+          </a:fontRef>
+        </p:style>
+        <p:txBody>
+          <a:bodyPr rtlCol="0" anchor="ctr"/>
+          <a:lstStyle/>
+          <a:p>
+            <a:pPr algn="ctr"/>
+          </a:p>
+        </p:txBody>
+      </p:sp>
+      <p:sp>
+        <p:nvSpPr>
+          <p:cNvPr id="4" name="Rectangle 3"/>
+          <p:cNvSpPr/>
+          <p:nvPr/>
+        </p:nvSpPr>
+        <p:spPr>
+          <a:xfrm>
+            <a:off x="0" y="6583680"/>
+            <a:ext cx="12188952" cy="274320"/>
+          </a:xfrm>
+          <a:prstGeom prst="rect">
+            <a:avLst/>
+          </a:prstGeom>
+          <a:solidFill>
+            <a:srgbClr val="ECE6F5"/>
+          </a:solidFill>
+          <a:ln>
+            <a:noFill/>
+          </a:ln>
+        </p:spPr>
+        <p:style>
+          <a:lnRef idx="1">
+            <a:schemeClr val="accent1"/>
+          </a:lnRef>
+          <a:fillRef idx="3">
+            <a:schemeClr val="accent1"/>
+          </a:fillRef>
+          <a:effectRef idx="2">
+            <a:schemeClr val="accent1"/>
+          </a:effectRef>
+          <a:fontRef idx="minor">
+            <a:schemeClr val="lt1"/>
+          </a:fontRef>
+        </p:style>
+        <p:txBody>
+          <a:bodyPr rtlCol="0" anchor="ctr"/>
+          <a:lstStyle/>
+          <a:p>
+            <a:pPr algn="ctr"/>
+          </a:p>
+        </p:txBody>
+      </p:sp>
+      <p:sp>
+        <p:nvSpPr>
+          <p:cNvPr id="5" name="TextBox 4"/>
           <p:cNvSpPr txBox="1"/>
           <p:nvPr/>
         </p:nvSpPr>
         <p:spPr>
           <a:xfrm>
-            <a:off x="274320" y="91440"/>
-            <a:ext cx="11704320" cy="502920"/>
+            <a:off x="320040" y="6601968"/>
+            <a:ext cx="11521440" cy="201168"/>
           </a:xfrm>
           <a:prstGeom prst="rect">
             <a:avLst/>
@@ -3556,17 +4818,101 @@
           <a:lstStyle/>
           <a:p>
             <a:pPr>
-              <a:defRPr sz="2700" b="1"/>
+              <a:defRPr sz="1000">
+                <a:solidFill>
+                  <a:srgbClr val="544C66"/>
+                </a:solidFill>
+              </a:defRPr>
             </a:pPr>
             <a:r>
+              <a:t>Kansas State University | CIS 732/830 | Figure</a:t>
+            </a:r>
+          </a:p>
+        </p:txBody>
+      </p:sp>
+      <p:sp>
+        <p:nvSpPr>
+          <p:cNvPr id="6" name="TextBox 5"/>
+          <p:cNvSpPr txBox="1"/>
+          <p:nvPr/>
+        </p:nvSpPr>
+        <p:spPr>
+          <a:xfrm>
+            <a:off x="502920" y="475488"/>
+            <a:ext cx="11155680" cy="502920"/>
+          </a:xfrm>
+          <a:prstGeom prst="rect">
+            <a:avLst/>
+          </a:prstGeom>
+          <a:noFill/>
+        </p:spPr>
+        <p:txBody>
+          <a:bodyPr wrap="none">
+            <a:spAutoFit/>
+          </a:bodyPr>
+          <a:lstStyle/>
+          <a:p>
+            <a:pPr>
+              <a:defRPr sz="2800" b="1">
+                <a:solidFill>
+                  <a:srgbClr val="512888"/>
+                </a:solidFill>
+              </a:defRPr>
+            </a:pPr>
+            <a:r>
               <a:t>Figure 11: Robustness Across Seeds</a:t>
             </a:r>
+          </a:p>
+        </p:txBody>
+      </p:sp>
+      <p:sp>
+        <p:nvSpPr>
+          <p:cNvPr id="7" name="Rounded Rectangle 6"/>
+          <p:cNvSpPr/>
+          <p:nvPr/>
+        </p:nvSpPr>
+        <p:spPr>
+          <a:xfrm>
+            <a:off x="411480" y="1051560"/>
+            <a:ext cx="8092440" cy="4892040"/>
+          </a:xfrm>
+          <a:prstGeom prst="roundRect">
+            <a:avLst/>
+          </a:prstGeom>
+          <a:solidFill>
+            <a:srgbClr val="FFFFFF"/>
+          </a:solidFill>
+          <a:ln>
+            <a:solidFill>
+              <a:srgbClr val="E8E2F0"/>
+            </a:solidFill>
+          </a:ln>
+        </p:spPr>
+        <p:style>
+          <a:lnRef idx="1">
+            <a:schemeClr val="accent1"/>
+          </a:lnRef>
+          <a:fillRef idx="3">
+            <a:schemeClr val="accent1"/>
+          </a:fillRef>
+          <a:effectRef idx="2">
+            <a:schemeClr val="accent1"/>
+          </a:effectRef>
+          <a:fontRef idx="minor">
+            <a:schemeClr val="lt1"/>
+          </a:fontRef>
+        </p:style>
+        <p:txBody>
+          <a:bodyPr rtlCol="0" anchor="ctr"/>
+          <a:lstStyle/>
+          <a:p>
+            <a:pPr algn="ctr"/>
           </a:p>
         </p:txBody>
       </p:sp>
       <p:pic>
         <p:nvPicPr>
-          <p:cNvPr id="3" name="Picture 2" descr="fig11_robustness_line.png"/>
+          <p:cNvPr id="8" name="Picture 7" descr="fig11_robustness_line.png"/>
           <p:cNvPicPr>
             <a:picLocks noChangeAspect="1"/>
           </p:cNvPicPr>
@@ -3580,8 +4926,8 @@
         </p:blipFill>
         <p:spPr>
           <a:xfrm>
-            <a:off x="274320" y="777240"/>
-            <a:ext cx="7863840" cy="5212080"/>
+            <a:off x="621792" y="1261872"/>
+            <a:ext cx="7680960" cy="4480560"/>
           </a:xfrm>
           <a:prstGeom prst="rect">
             <a:avLst/>
@@ -3590,14 +4936,118 @@
       </p:pic>
       <p:sp>
         <p:nvSpPr>
-          <p:cNvPr id="4" name="TextBox 3"/>
+          <p:cNvPr id="9" name="Rounded Rectangle 8"/>
+          <p:cNvSpPr/>
+          <p:nvPr/>
+        </p:nvSpPr>
+        <p:spPr>
+          <a:xfrm>
+            <a:off x="8641080" y="1051560"/>
+            <a:ext cx="3063240" cy="4892040"/>
+          </a:xfrm>
+          <a:prstGeom prst="roundRect">
+            <a:avLst/>
+          </a:prstGeom>
+          <a:solidFill>
+            <a:srgbClr val="F7F4FC"/>
+          </a:solidFill>
+          <a:ln>
+            <a:solidFill>
+              <a:srgbClr val="E8E2F0"/>
+            </a:solidFill>
+          </a:ln>
+        </p:spPr>
+        <p:style>
+          <a:lnRef idx="1">
+            <a:schemeClr val="accent1"/>
+          </a:lnRef>
+          <a:fillRef idx="3">
+            <a:schemeClr val="accent1"/>
+          </a:fillRef>
+          <a:effectRef idx="2">
+            <a:schemeClr val="accent1"/>
+          </a:effectRef>
+          <a:fontRef idx="minor">
+            <a:schemeClr val="lt1"/>
+          </a:fontRef>
+        </p:style>
+        <p:txBody>
+          <a:bodyPr rtlCol="0" anchor="ctr"/>
+          <a:lstStyle/>
+          <a:p>
+            <a:pPr algn="ctr"/>
+          </a:p>
+        </p:txBody>
+      </p:sp>
+      <p:sp>
+        <p:nvSpPr>
+          <p:cNvPr id="10" name="TextBox 9"/>
           <p:cNvSpPr txBox="1"/>
           <p:nvPr/>
         </p:nvSpPr>
         <p:spPr>
           <a:xfrm>
-            <a:off x="8229600" y="777240"/>
-            <a:ext cx="3474720" cy="5303520"/>
+            <a:off x="8887968" y="1234440"/>
+            <a:ext cx="2651760" cy="4526280"/>
+          </a:xfrm>
+          <a:prstGeom prst="rect">
+            <a:avLst/>
+          </a:prstGeom>
+          <a:noFill/>
+        </p:spPr>
+        <p:txBody>
+          <a:bodyPr wrap="square">
+            <a:spAutoFit/>
+          </a:bodyPr>
+          <a:lstStyle/>
+          <a:p>
+            <a:pPr>
+              <a:defRPr sz="1500">
+                <a:solidFill>
+                  <a:srgbClr val="251F2D"/>
+                </a:solidFill>
+              </a:defRPr>
+            </a:pPr>
+            <a:r>
+              <a:t>- Seed-level RMSE trajectories by model.</a:t>
+            </a:r>
+          </a:p>
+          <a:p>
+            <a:pPr>
+              <a:defRPr sz="1400">
+                <a:solidFill>
+                  <a:srgbClr val="251F2D"/>
+                </a:solidFill>
+              </a:defRPr>
+            </a:pPr>
+            <a:r>
+              <a:t>- Shows variance behavior directly.</a:t>
+            </a:r>
+          </a:p>
+          <a:p>
+            <a:pPr>
+              <a:defRPr sz="1400">
+                <a:solidFill>
+                  <a:srgbClr val="251F2D"/>
+                </a:solidFill>
+              </a:defRPr>
+            </a:pPr>
+            <a:r>
+              <a:t>- Complements Figure 10 statistics.</a:t>
+            </a:r>
+          </a:p>
+        </p:txBody>
+      </p:sp>
+      <p:sp>
+        <p:nvSpPr>
+          <p:cNvPr id="11" name="TextBox 10"/>
+          <p:cNvSpPr txBox="1"/>
+          <p:nvPr/>
+        </p:nvSpPr>
+        <p:spPr>
+          <a:xfrm>
+            <a:off x="658368" y="5623560"/>
+            <a:ext cx="7406640" cy="256032"/>
           </a:xfrm>
           <a:prstGeom prst="rect">
             <a:avLst/>
@@ -3611,26 +5061,14 @@
           <a:lstStyle/>
           <a:p>
             <a:pPr>
-              <a:defRPr sz="1500"/>
+              <a:defRPr sz="1000">
+                <a:solidFill>
+                  <a:srgbClr val="625D6C"/>
+                </a:solidFill>
+              </a:defRPr>
             </a:pPr>
             <a:r>
-              <a:t>Seed-level RMSE trajectories by model.</a:t>
-            </a:r>
-          </a:p>
-          <a:p>
-            <a:pPr>
-              <a:defRPr sz="1500"/>
-            </a:pPr>
-            <a:r>
-              <a:t>Shows variance behavior directly.</a:t>
-            </a:r>
-          </a:p>
-          <a:p>
-            <a:pPr>
-              <a:defRPr sz="1500"/>
-            </a:pPr>
-            <a:r>
-              <a:t>Complements Figure 10 statistics.</a:t>
+              <a:t>All values and figures are generated from scripts/syngas_analysis.py</a:t>
             </a:r>
           </a:p>
         </p:txBody>
@@ -3655,14 +5093,143 @@
       <p:grpSpPr/>
       <p:sp>
         <p:nvSpPr>
-          <p:cNvPr id="2" name="TextBox 1"/>
+          <p:cNvPr id="2" name="Rectangle 1"/>
+          <p:cNvSpPr/>
+          <p:nvPr/>
+        </p:nvSpPr>
+        <p:spPr>
+          <a:xfrm>
+            <a:off x="0" y="0"/>
+            <a:ext cx="12188952" cy="6858000"/>
+          </a:xfrm>
+          <a:prstGeom prst="rect">
+            <a:avLst/>
+          </a:prstGeom>
+          <a:solidFill>
+            <a:srgbClr val="FCFBFF"/>
+          </a:solidFill>
+          <a:ln>
+            <a:noFill/>
+          </a:ln>
+        </p:spPr>
+        <p:style>
+          <a:lnRef idx="1">
+            <a:schemeClr val="accent1"/>
+          </a:lnRef>
+          <a:fillRef idx="3">
+            <a:schemeClr val="accent1"/>
+          </a:fillRef>
+          <a:effectRef idx="2">
+            <a:schemeClr val="accent1"/>
+          </a:effectRef>
+          <a:fontRef idx="minor">
+            <a:schemeClr val="lt1"/>
+          </a:fontRef>
+        </p:style>
+        <p:txBody>
+          <a:bodyPr rtlCol="0" anchor="ctr"/>
+          <a:lstStyle/>
+          <a:p>
+            <a:pPr algn="ctr"/>
+          </a:p>
+        </p:txBody>
+      </p:sp>
+      <p:sp>
+        <p:nvSpPr>
+          <p:cNvPr id="3" name="Rectangle 2"/>
+          <p:cNvSpPr/>
+          <p:nvPr/>
+        </p:nvSpPr>
+        <p:spPr>
+          <a:xfrm>
+            <a:off x="0" y="0"/>
+            <a:ext cx="12188952" cy="411480"/>
+          </a:xfrm>
+          <a:prstGeom prst="rect">
+            <a:avLst/>
+          </a:prstGeom>
+          <a:solidFill>
+            <a:srgbClr val="512888"/>
+          </a:solidFill>
+          <a:ln>
+            <a:noFill/>
+          </a:ln>
+        </p:spPr>
+        <p:style>
+          <a:lnRef idx="1">
+            <a:schemeClr val="accent1"/>
+          </a:lnRef>
+          <a:fillRef idx="3">
+            <a:schemeClr val="accent1"/>
+          </a:fillRef>
+          <a:effectRef idx="2">
+            <a:schemeClr val="accent1"/>
+          </a:effectRef>
+          <a:fontRef idx="minor">
+            <a:schemeClr val="lt1"/>
+          </a:fontRef>
+        </p:style>
+        <p:txBody>
+          <a:bodyPr rtlCol="0" anchor="ctr"/>
+          <a:lstStyle/>
+          <a:p>
+            <a:pPr algn="ctr"/>
+          </a:p>
+        </p:txBody>
+      </p:sp>
+      <p:sp>
+        <p:nvSpPr>
+          <p:cNvPr id="4" name="Rectangle 3"/>
+          <p:cNvSpPr/>
+          <p:nvPr/>
+        </p:nvSpPr>
+        <p:spPr>
+          <a:xfrm>
+            <a:off x="0" y="6583680"/>
+            <a:ext cx="12188952" cy="274320"/>
+          </a:xfrm>
+          <a:prstGeom prst="rect">
+            <a:avLst/>
+          </a:prstGeom>
+          <a:solidFill>
+            <a:srgbClr val="ECE6F5"/>
+          </a:solidFill>
+          <a:ln>
+            <a:noFill/>
+          </a:ln>
+        </p:spPr>
+        <p:style>
+          <a:lnRef idx="1">
+            <a:schemeClr val="accent1"/>
+          </a:lnRef>
+          <a:fillRef idx="3">
+            <a:schemeClr val="accent1"/>
+          </a:fillRef>
+          <a:effectRef idx="2">
+            <a:schemeClr val="accent1"/>
+          </a:effectRef>
+          <a:fontRef idx="minor">
+            <a:schemeClr val="lt1"/>
+          </a:fontRef>
+        </p:style>
+        <p:txBody>
+          <a:bodyPr rtlCol="0" anchor="ctr"/>
+          <a:lstStyle/>
+          <a:p>
+            <a:pPr algn="ctr"/>
+          </a:p>
+        </p:txBody>
+      </p:sp>
+      <p:sp>
+        <p:nvSpPr>
+          <p:cNvPr id="5" name="TextBox 4"/>
           <p:cNvSpPr txBox="1"/>
           <p:nvPr/>
         </p:nvSpPr>
         <p:spPr>
           <a:xfrm>
-            <a:off x="274320" y="91440"/>
-            <a:ext cx="11704320" cy="502920"/>
+            <a:off x="320040" y="6601968"/>
+            <a:ext cx="11521440" cy="201168"/>
           </a:xfrm>
           <a:prstGeom prst="rect">
             <a:avLst/>
@@ -3676,17 +5243,101 @@
           <a:lstStyle/>
           <a:p>
             <a:pPr>
-              <a:defRPr sz="2700" b="1"/>
+              <a:defRPr sz="1000">
+                <a:solidFill>
+                  <a:srgbClr val="544C66"/>
+                </a:solidFill>
+              </a:defRPr>
             </a:pPr>
             <a:r>
+              <a:t>Kansas State University | CIS 732/830 | Figure</a:t>
+            </a:r>
+          </a:p>
+        </p:txBody>
+      </p:sp>
+      <p:sp>
+        <p:nvSpPr>
+          <p:cNvPr id="6" name="TextBox 5"/>
+          <p:cNvSpPr txBox="1"/>
+          <p:nvPr/>
+        </p:nvSpPr>
+        <p:spPr>
+          <a:xfrm>
+            <a:off x="502920" y="475488"/>
+            <a:ext cx="11155680" cy="502920"/>
+          </a:xfrm>
+          <a:prstGeom prst="rect">
+            <a:avLst/>
+          </a:prstGeom>
+          <a:noFill/>
+        </p:spPr>
+        <p:txBody>
+          <a:bodyPr wrap="none">
+            <a:spAutoFit/>
+          </a:bodyPr>
+          <a:lstStyle/>
+          <a:p>
+            <a:pPr>
+              <a:defRPr sz="2800" b="1">
+                <a:solidFill>
+                  <a:srgbClr val="512888"/>
+                </a:solidFill>
+              </a:defRPr>
+            </a:pPr>
+            <a:r>
               <a:t>Figure 12: Scaling Ablation (4 Combinations)</a:t>
             </a:r>
+          </a:p>
+        </p:txBody>
+      </p:sp>
+      <p:sp>
+        <p:nvSpPr>
+          <p:cNvPr id="7" name="Rounded Rectangle 6"/>
+          <p:cNvSpPr/>
+          <p:nvPr/>
+        </p:nvSpPr>
+        <p:spPr>
+          <a:xfrm>
+            <a:off x="411480" y="1051560"/>
+            <a:ext cx="8092440" cy="4892040"/>
+          </a:xfrm>
+          <a:prstGeom prst="roundRect">
+            <a:avLst/>
+          </a:prstGeom>
+          <a:solidFill>
+            <a:srgbClr val="FFFFFF"/>
+          </a:solidFill>
+          <a:ln>
+            <a:solidFill>
+              <a:srgbClr val="E8E2F0"/>
+            </a:solidFill>
+          </a:ln>
+        </p:spPr>
+        <p:style>
+          <a:lnRef idx="1">
+            <a:schemeClr val="accent1"/>
+          </a:lnRef>
+          <a:fillRef idx="3">
+            <a:schemeClr val="accent1"/>
+          </a:fillRef>
+          <a:effectRef idx="2">
+            <a:schemeClr val="accent1"/>
+          </a:effectRef>
+          <a:fontRef idx="minor">
+            <a:schemeClr val="lt1"/>
+          </a:fontRef>
+        </p:style>
+        <p:txBody>
+          <a:bodyPr rtlCol="0" anchor="ctr"/>
+          <a:lstStyle/>
+          <a:p>
+            <a:pPr algn="ctr"/>
           </a:p>
         </p:txBody>
       </p:sp>
       <p:pic>
         <p:nvPicPr>
-          <p:cNvPr id="3" name="Picture 2" descr="fig12_scaling_ablation_rmse.png"/>
+          <p:cNvPr id="8" name="Picture 7" descr="fig12_scaling_ablation_rmse.png"/>
           <p:cNvPicPr>
             <a:picLocks noChangeAspect="1"/>
           </p:cNvPicPr>
@@ -3700,8 +5351,8 @@
         </p:blipFill>
         <p:spPr>
           <a:xfrm>
-            <a:off x="274320" y="777240"/>
-            <a:ext cx="7863840" cy="5212080"/>
+            <a:off x="621792" y="1261872"/>
+            <a:ext cx="7680960" cy="4480560"/>
           </a:xfrm>
           <a:prstGeom prst="rect">
             <a:avLst/>
@@ -3710,14 +5361,118 @@
       </p:pic>
       <p:sp>
         <p:nvSpPr>
-          <p:cNvPr id="4" name="TextBox 3"/>
+          <p:cNvPr id="9" name="Rounded Rectangle 8"/>
+          <p:cNvSpPr/>
+          <p:nvPr/>
+        </p:nvSpPr>
+        <p:spPr>
+          <a:xfrm>
+            <a:off x="8641080" y="1051560"/>
+            <a:ext cx="3063240" cy="4892040"/>
+          </a:xfrm>
+          <a:prstGeom prst="roundRect">
+            <a:avLst/>
+          </a:prstGeom>
+          <a:solidFill>
+            <a:srgbClr val="F7F4FC"/>
+          </a:solidFill>
+          <a:ln>
+            <a:solidFill>
+              <a:srgbClr val="E8E2F0"/>
+            </a:solidFill>
+          </a:ln>
+        </p:spPr>
+        <p:style>
+          <a:lnRef idx="1">
+            <a:schemeClr val="accent1"/>
+          </a:lnRef>
+          <a:fillRef idx="3">
+            <a:schemeClr val="accent1"/>
+          </a:fillRef>
+          <a:effectRef idx="2">
+            <a:schemeClr val="accent1"/>
+          </a:effectRef>
+          <a:fontRef idx="minor">
+            <a:schemeClr val="lt1"/>
+          </a:fontRef>
+        </p:style>
+        <p:txBody>
+          <a:bodyPr rtlCol="0" anchor="ctr"/>
+          <a:lstStyle/>
+          <a:p>
+            <a:pPr algn="ctr"/>
+          </a:p>
+        </p:txBody>
+      </p:sp>
+      <p:sp>
+        <p:nvSpPr>
+          <p:cNvPr id="10" name="TextBox 9"/>
           <p:cNvSpPr txBox="1"/>
           <p:nvPr/>
         </p:nvSpPr>
         <p:spPr>
           <a:xfrm>
-            <a:off x="8229600" y="777240"/>
-            <a:ext cx="3474720" cy="5303520"/>
+            <a:off x="8887968" y="1234440"/>
+            <a:ext cx="2651760" cy="4526280"/>
+          </a:xfrm>
+          <a:prstGeom prst="rect">
+            <a:avLst/>
+          </a:prstGeom>
+          <a:noFill/>
+        </p:spPr>
+        <p:txBody>
+          <a:bodyPr wrap="square">
+            <a:spAutoFit/>
+          </a:bodyPr>
+          <a:lstStyle/>
+          <a:p>
+            <a:pPr>
+              <a:defRPr sz="1500">
+                <a:solidFill>
+                  <a:srgbClr val="251F2D"/>
+                </a:solidFill>
+              </a:defRPr>
+            </a:pPr>
+            <a:r>
+              <a:t>- Tests all required scaler on/off combinations.</a:t>
+            </a:r>
+          </a:p>
+          <a:p>
+            <a:pPr>
+              <a:defRPr sz="1400">
+                <a:solidFill>
+                  <a:srgbClr val="251F2D"/>
+                </a:solidFill>
+              </a:defRPr>
+            </a:pPr>
+            <a:r>
+              <a:t>- RF unscaled performs best in this dataset.</a:t>
+            </a:r>
+          </a:p>
+          <a:p>
+            <a:pPr>
+              <a:defRPr sz="1400">
+                <a:solidFill>
+                  <a:srgbClr val="251F2D"/>
+                </a:solidFill>
+              </a:defRPr>
+            </a:pPr>
+            <a:r>
+              <a:t>- Documents preprocessing impact explicitly.</a:t>
+            </a:r>
+          </a:p>
+        </p:txBody>
+      </p:sp>
+      <p:sp>
+        <p:nvSpPr>
+          <p:cNvPr id="11" name="TextBox 10"/>
+          <p:cNvSpPr txBox="1"/>
+          <p:nvPr/>
+        </p:nvSpPr>
+        <p:spPr>
+          <a:xfrm>
+            <a:off x="658368" y="5623560"/>
+            <a:ext cx="7406640" cy="256032"/>
           </a:xfrm>
           <a:prstGeom prst="rect">
             <a:avLst/>
@@ -3731,26 +5486,14 @@
           <a:lstStyle/>
           <a:p>
             <a:pPr>
-              <a:defRPr sz="1500"/>
+              <a:defRPr sz="1000">
+                <a:solidFill>
+                  <a:srgbClr val="625D6C"/>
+                </a:solidFill>
+              </a:defRPr>
             </a:pPr>
             <a:r>
-              <a:t>Tests all required scaler on/off combinations.</a:t>
-            </a:r>
-          </a:p>
-          <a:p>
-            <a:pPr>
-              <a:defRPr sz="1500"/>
-            </a:pPr>
-            <a:r>
-              <a:t>RF unscaled performs best in this dataset.</a:t>
-            </a:r>
-          </a:p>
-          <a:p>
-            <a:pPr>
-              <a:defRPr sz="1500"/>
-            </a:pPr>
-            <a:r>
-              <a:t>Documents preprocessing impact explicitly.</a:t>
+              <a:t>All values and figures are generated from scripts/syngas_analysis.py</a:t>
             </a:r>
           </a:p>
         </p:txBody>
@@ -3775,14 +5518,143 @@
       <p:grpSpPr/>
       <p:sp>
         <p:nvSpPr>
-          <p:cNvPr id="2" name="TextBox 1"/>
+          <p:cNvPr id="2" name="Rectangle 1"/>
+          <p:cNvSpPr/>
+          <p:nvPr/>
+        </p:nvSpPr>
+        <p:spPr>
+          <a:xfrm>
+            <a:off x="0" y="0"/>
+            <a:ext cx="12188952" cy="6858000"/>
+          </a:xfrm>
+          <a:prstGeom prst="rect">
+            <a:avLst/>
+          </a:prstGeom>
+          <a:solidFill>
+            <a:srgbClr val="FCFBFF"/>
+          </a:solidFill>
+          <a:ln>
+            <a:noFill/>
+          </a:ln>
+        </p:spPr>
+        <p:style>
+          <a:lnRef idx="1">
+            <a:schemeClr val="accent1"/>
+          </a:lnRef>
+          <a:fillRef idx="3">
+            <a:schemeClr val="accent1"/>
+          </a:fillRef>
+          <a:effectRef idx="2">
+            <a:schemeClr val="accent1"/>
+          </a:effectRef>
+          <a:fontRef idx="minor">
+            <a:schemeClr val="lt1"/>
+          </a:fontRef>
+        </p:style>
+        <p:txBody>
+          <a:bodyPr rtlCol="0" anchor="ctr"/>
+          <a:lstStyle/>
+          <a:p>
+            <a:pPr algn="ctr"/>
+          </a:p>
+        </p:txBody>
+      </p:sp>
+      <p:sp>
+        <p:nvSpPr>
+          <p:cNvPr id="3" name="Rectangle 2"/>
+          <p:cNvSpPr/>
+          <p:nvPr/>
+        </p:nvSpPr>
+        <p:spPr>
+          <a:xfrm>
+            <a:off x="0" y="0"/>
+            <a:ext cx="12188952" cy="411480"/>
+          </a:xfrm>
+          <a:prstGeom prst="rect">
+            <a:avLst/>
+          </a:prstGeom>
+          <a:solidFill>
+            <a:srgbClr val="512888"/>
+          </a:solidFill>
+          <a:ln>
+            <a:noFill/>
+          </a:ln>
+        </p:spPr>
+        <p:style>
+          <a:lnRef idx="1">
+            <a:schemeClr val="accent1"/>
+          </a:lnRef>
+          <a:fillRef idx="3">
+            <a:schemeClr val="accent1"/>
+          </a:fillRef>
+          <a:effectRef idx="2">
+            <a:schemeClr val="accent1"/>
+          </a:effectRef>
+          <a:fontRef idx="minor">
+            <a:schemeClr val="lt1"/>
+          </a:fontRef>
+        </p:style>
+        <p:txBody>
+          <a:bodyPr rtlCol="0" anchor="ctr"/>
+          <a:lstStyle/>
+          <a:p>
+            <a:pPr algn="ctr"/>
+          </a:p>
+        </p:txBody>
+      </p:sp>
+      <p:sp>
+        <p:nvSpPr>
+          <p:cNvPr id="4" name="Rectangle 3"/>
+          <p:cNvSpPr/>
+          <p:nvPr/>
+        </p:nvSpPr>
+        <p:spPr>
+          <a:xfrm>
+            <a:off x="0" y="6583680"/>
+            <a:ext cx="12188952" cy="274320"/>
+          </a:xfrm>
+          <a:prstGeom prst="rect">
+            <a:avLst/>
+          </a:prstGeom>
+          <a:solidFill>
+            <a:srgbClr val="ECE6F5"/>
+          </a:solidFill>
+          <a:ln>
+            <a:noFill/>
+          </a:ln>
+        </p:spPr>
+        <p:style>
+          <a:lnRef idx="1">
+            <a:schemeClr val="accent1"/>
+          </a:lnRef>
+          <a:fillRef idx="3">
+            <a:schemeClr val="accent1"/>
+          </a:fillRef>
+          <a:effectRef idx="2">
+            <a:schemeClr val="accent1"/>
+          </a:effectRef>
+          <a:fontRef idx="minor">
+            <a:schemeClr val="lt1"/>
+          </a:fontRef>
+        </p:style>
+        <p:txBody>
+          <a:bodyPr rtlCol="0" anchor="ctr"/>
+          <a:lstStyle/>
+          <a:p>
+            <a:pPr algn="ctr"/>
+          </a:p>
+        </p:txBody>
+      </p:sp>
+      <p:sp>
+        <p:nvSpPr>
+          <p:cNvPr id="5" name="TextBox 4"/>
           <p:cNvSpPr txBox="1"/>
           <p:nvPr/>
         </p:nvSpPr>
         <p:spPr>
           <a:xfrm>
-            <a:off x="274320" y="91440"/>
-            <a:ext cx="11704320" cy="502920"/>
+            <a:off x="320040" y="6601968"/>
+            <a:ext cx="11521440" cy="201168"/>
           </a:xfrm>
           <a:prstGeom prst="rect">
             <a:avLst/>
@@ -3796,17 +5668,101 @@
           <a:lstStyle/>
           <a:p>
             <a:pPr>
-              <a:defRPr sz="2700" b="1"/>
+              <a:defRPr sz="1000">
+                <a:solidFill>
+                  <a:srgbClr val="544C66"/>
+                </a:solidFill>
+              </a:defRPr>
             </a:pPr>
             <a:r>
+              <a:t>Kansas State University | CIS 732/830 | Figure</a:t>
+            </a:r>
+          </a:p>
+        </p:txBody>
+      </p:sp>
+      <p:sp>
+        <p:nvSpPr>
+          <p:cNvPr id="6" name="TextBox 5"/>
+          <p:cNvSpPr txBox="1"/>
+          <p:nvPr/>
+        </p:nvSpPr>
+        <p:spPr>
+          <a:xfrm>
+            <a:off x="502920" y="475488"/>
+            <a:ext cx="11155680" cy="502920"/>
+          </a:xfrm>
+          <a:prstGeom prst="rect">
+            <a:avLst/>
+          </a:prstGeom>
+          <a:noFill/>
+        </p:spPr>
+        <p:txBody>
+          <a:bodyPr wrap="none">
+            <a:spAutoFit/>
+          </a:bodyPr>
+          <a:lstStyle/>
+          <a:p>
+            <a:pPr>
+              <a:defRPr sz="2800" b="1">
+                <a:solidFill>
+                  <a:srgbClr val="512888"/>
+                </a:solidFill>
+              </a:defRPr>
+            </a:pPr>
+            <a:r>
               <a:t>Figure 13: Runtime Analysis</a:t>
             </a:r>
+          </a:p>
+        </p:txBody>
+      </p:sp>
+      <p:sp>
+        <p:nvSpPr>
+          <p:cNvPr id="7" name="Rounded Rectangle 6"/>
+          <p:cNvSpPr/>
+          <p:nvPr/>
+        </p:nvSpPr>
+        <p:spPr>
+          <a:xfrm>
+            <a:off x="411480" y="1051560"/>
+            <a:ext cx="8092440" cy="4892040"/>
+          </a:xfrm>
+          <a:prstGeom prst="roundRect">
+            <a:avLst/>
+          </a:prstGeom>
+          <a:solidFill>
+            <a:srgbClr val="FFFFFF"/>
+          </a:solidFill>
+          <a:ln>
+            <a:solidFill>
+              <a:srgbClr val="E8E2F0"/>
+            </a:solidFill>
+          </a:ln>
+        </p:spPr>
+        <p:style>
+          <a:lnRef idx="1">
+            <a:schemeClr val="accent1"/>
+          </a:lnRef>
+          <a:fillRef idx="3">
+            <a:schemeClr val="accent1"/>
+          </a:fillRef>
+          <a:effectRef idx="2">
+            <a:schemeClr val="accent1"/>
+          </a:effectRef>
+          <a:fontRef idx="minor">
+            <a:schemeClr val="lt1"/>
+          </a:fontRef>
+        </p:style>
+        <p:txBody>
+          <a:bodyPr rtlCol="0" anchor="ctr"/>
+          <a:lstStyle/>
+          <a:p>
+            <a:pPr algn="ctr"/>
           </a:p>
         </p:txBody>
       </p:sp>
       <p:pic>
         <p:nvPicPr>
-          <p:cNvPr id="3" name="Picture 2" descr="fig13_runtime_ablation.png"/>
+          <p:cNvPr id="8" name="Picture 7" descr="fig13_runtime_ablation.png"/>
           <p:cNvPicPr>
             <a:picLocks noChangeAspect="1"/>
           </p:cNvPicPr>
@@ -3820,8 +5776,8 @@
         </p:blipFill>
         <p:spPr>
           <a:xfrm>
-            <a:off x="274320" y="777240"/>
-            <a:ext cx="7863840" cy="5212080"/>
+            <a:off x="621792" y="1261872"/>
+            <a:ext cx="7680960" cy="4480560"/>
           </a:xfrm>
           <a:prstGeom prst="rect">
             <a:avLst/>
@@ -3830,14 +5786,118 @@
       </p:pic>
       <p:sp>
         <p:nvSpPr>
-          <p:cNvPr id="4" name="TextBox 3"/>
+          <p:cNvPr id="9" name="Rounded Rectangle 8"/>
+          <p:cNvSpPr/>
+          <p:nvPr/>
+        </p:nvSpPr>
+        <p:spPr>
+          <a:xfrm>
+            <a:off x="8641080" y="1051560"/>
+            <a:ext cx="3063240" cy="4892040"/>
+          </a:xfrm>
+          <a:prstGeom prst="roundRect">
+            <a:avLst/>
+          </a:prstGeom>
+          <a:solidFill>
+            <a:srgbClr val="F7F4FC"/>
+          </a:solidFill>
+          <a:ln>
+            <a:solidFill>
+              <a:srgbClr val="E8E2F0"/>
+            </a:solidFill>
+          </a:ln>
+        </p:spPr>
+        <p:style>
+          <a:lnRef idx="1">
+            <a:schemeClr val="accent1"/>
+          </a:lnRef>
+          <a:fillRef idx="3">
+            <a:schemeClr val="accent1"/>
+          </a:fillRef>
+          <a:effectRef idx="2">
+            <a:schemeClr val="accent1"/>
+          </a:effectRef>
+          <a:fontRef idx="minor">
+            <a:schemeClr val="lt1"/>
+          </a:fontRef>
+        </p:style>
+        <p:txBody>
+          <a:bodyPr rtlCol="0" anchor="ctr"/>
+          <a:lstStyle/>
+          <a:p>
+            <a:pPr algn="ctr"/>
+          </a:p>
+        </p:txBody>
+      </p:sp>
+      <p:sp>
+        <p:nvSpPr>
+          <p:cNvPr id="10" name="TextBox 9"/>
           <p:cNvSpPr txBox="1"/>
           <p:nvPr/>
         </p:nvSpPr>
         <p:spPr>
           <a:xfrm>
-            <a:off x="8229600" y="777240"/>
-            <a:ext cx="3474720" cy="5303520"/>
+            <a:off x="8887968" y="1234440"/>
+            <a:ext cx="2651760" cy="4526280"/>
+          </a:xfrm>
+          <a:prstGeom prst="rect">
+            <a:avLst/>
+          </a:prstGeom>
+          <a:noFill/>
+        </p:spPr>
+        <p:txBody>
+          <a:bodyPr wrap="square">
+            <a:spAutoFit/>
+          </a:bodyPr>
+          <a:lstStyle/>
+          <a:p>
+            <a:pPr>
+              <a:defRPr sz="1500">
+                <a:solidFill>
+                  <a:srgbClr val="251F2D"/>
+                </a:solidFill>
+              </a:defRPr>
+            </a:pPr>
+            <a:r>
+              <a:t>- Wall-clock training and inference comparison.</a:t>
+            </a:r>
+          </a:p>
+          <a:p>
+            <a:pPr>
+              <a:defRPr sz="1400">
+                <a:solidFill>
+                  <a:srgbClr val="251F2D"/>
+                </a:solidFill>
+              </a:defRPr>
+            </a:pPr>
+            <a:r>
+              <a:t>- Inference is sub-millisecond per sample.</a:t>
+            </a:r>
+          </a:p>
+          <a:p>
+            <a:pPr>
+              <a:defRPr sz="1400">
+                <a:solidFill>
+                  <a:srgbClr val="251F2D"/>
+                </a:solidFill>
+              </a:defRPr>
+            </a:pPr>
+            <a:r>
+              <a:t>- Runtime is acceptable for deployment.</a:t>
+            </a:r>
+          </a:p>
+        </p:txBody>
+      </p:sp>
+      <p:sp>
+        <p:nvSpPr>
+          <p:cNvPr id="11" name="TextBox 10"/>
+          <p:cNvSpPr txBox="1"/>
+          <p:nvPr/>
+        </p:nvSpPr>
+        <p:spPr>
+          <a:xfrm>
+            <a:off x="658368" y="5623560"/>
+            <a:ext cx="7406640" cy="256032"/>
           </a:xfrm>
           <a:prstGeom prst="rect">
             <a:avLst/>
@@ -3851,26 +5911,14 @@
           <a:lstStyle/>
           <a:p>
             <a:pPr>
-              <a:defRPr sz="1500"/>
+              <a:defRPr sz="1000">
+                <a:solidFill>
+                  <a:srgbClr val="625D6C"/>
+                </a:solidFill>
+              </a:defRPr>
             </a:pPr>
             <a:r>
-              <a:t>Wall-clock training and inference comparison.</a:t>
-            </a:r>
-          </a:p>
-          <a:p>
-            <a:pPr>
-              <a:defRPr sz="1500"/>
-            </a:pPr>
-            <a:r>
-              <a:t>Inference is sub-millisecond per sample.</a:t>
-            </a:r>
-          </a:p>
-          <a:p>
-            <a:pPr>
-              <a:defRPr sz="1500"/>
-            </a:pPr>
-            <a:r>
-              <a:t>Runtime is acceptable for deployment.</a:t>
+              <a:t>All values and figures are generated from scripts/syngas_analysis.py</a:t>
             </a:r>
           </a:p>
         </p:txBody>
@@ -3895,50 +5943,288 @@
       <p:grpSpPr/>
       <p:sp>
         <p:nvSpPr>
-          <p:cNvPr id="2" name="Title 1"/>
-          <p:cNvSpPr>
-            <a:spLocks noGrp="1"/>
-          </p:cNvSpPr>
-          <p:nvPr>
-            <p:ph type="title"/>
-          </p:nvPr>
-        </p:nvSpPr>
-        <p:spPr/>
-        <p:txBody>
-          <a:bodyPr/>
-          <a:lstStyle/>
-          <a:p>
-            <a:r>
-              <a:t>Conclusion</a:t>
-            </a:r>
-          </a:p>
-        </p:txBody>
-      </p:sp>
-      <p:sp>
-        <p:nvSpPr>
-          <p:cNvPr id="3" name="Content Placeholder 2"/>
-          <p:cNvSpPr>
-            <a:spLocks noGrp="1"/>
-          </p:cNvSpPr>
-          <p:nvPr>
-            <p:ph idx="1"/>
-          </p:nvPr>
-        </p:nvSpPr>
-        <p:spPr/>
-        <p:txBody>
-          <a:bodyPr/>
+          <p:cNvPr id="2" name="Rectangle 1"/>
+          <p:cNvSpPr/>
+          <p:nvPr/>
+        </p:nvSpPr>
+        <p:spPr>
+          <a:xfrm>
+            <a:off x="0" y="0"/>
+            <a:ext cx="12188952" cy="6858000"/>
+          </a:xfrm>
+          <a:prstGeom prst="rect">
+            <a:avLst/>
+          </a:prstGeom>
+          <a:solidFill>
+            <a:srgbClr val="FCFBFF"/>
+          </a:solidFill>
+          <a:ln>
+            <a:noFill/>
+          </a:ln>
+        </p:spPr>
+        <p:style>
+          <a:lnRef idx="1">
+            <a:schemeClr val="accent1"/>
+          </a:lnRef>
+          <a:fillRef idx="3">
+            <a:schemeClr val="accent1"/>
+          </a:fillRef>
+          <a:effectRef idx="2">
+            <a:schemeClr val="accent1"/>
+          </a:effectRef>
+          <a:fontRef idx="minor">
+            <a:schemeClr val="lt1"/>
+          </a:fontRef>
+        </p:style>
+        <p:txBody>
+          <a:bodyPr rtlCol="0" anchor="ctr"/>
+          <a:lstStyle/>
+          <a:p>
+            <a:pPr algn="ctr"/>
+          </a:p>
+        </p:txBody>
+      </p:sp>
+      <p:sp>
+        <p:nvSpPr>
+          <p:cNvPr id="3" name="Rectangle 2"/>
+          <p:cNvSpPr/>
+          <p:nvPr/>
+        </p:nvSpPr>
+        <p:spPr>
+          <a:xfrm>
+            <a:off x="0" y="0"/>
+            <a:ext cx="12188952" cy="411480"/>
+          </a:xfrm>
+          <a:prstGeom prst="rect">
+            <a:avLst/>
+          </a:prstGeom>
+          <a:solidFill>
+            <a:srgbClr val="512888"/>
+          </a:solidFill>
+          <a:ln>
+            <a:noFill/>
+          </a:ln>
+        </p:spPr>
+        <p:style>
+          <a:lnRef idx="1">
+            <a:schemeClr val="accent1"/>
+          </a:lnRef>
+          <a:fillRef idx="3">
+            <a:schemeClr val="accent1"/>
+          </a:fillRef>
+          <a:effectRef idx="2">
+            <a:schemeClr val="accent1"/>
+          </a:effectRef>
+          <a:fontRef idx="minor">
+            <a:schemeClr val="lt1"/>
+          </a:fontRef>
+        </p:style>
+        <p:txBody>
+          <a:bodyPr rtlCol="0" anchor="ctr"/>
+          <a:lstStyle/>
+          <a:p>
+            <a:pPr algn="ctr"/>
+          </a:p>
+        </p:txBody>
+      </p:sp>
+      <p:sp>
+        <p:nvSpPr>
+          <p:cNvPr id="4" name="Rectangle 3"/>
+          <p:cNvSpPr/>
+          <p:nvPr/>
+        </p:nvSpPr>
+        <p:spPr>
+          <a:xfrm>
+            <a:off x="0" y="6583680"/>
+            <a:ext cx="12188952" cy="274320"/>
+          </a:xfrm>
+          <a:prstGeom prst="rect">
+            <a:avLst/>
+          </a:prstGeom>
+          <a:solidFill>
+            <a:srgbClr val="ECE6F5"/>
+          </a:solidFill>
+          <a:ln>
+            <a:noFill/>
+          </a:ln>
+        </p:spPr>
+        <p:style>
+          <a:lnRef idx="1">
+            <a:schemeClr val="accent1"/>
+          </a:lnRef>
+          <a:fillRef idx="3">
+            <a:schemeClr val="accent1"/>
+          </a:fillRef>
+          <a:effectRef idx="2">
+            <a:schemeClr val="accent1"/>
+          </a:effectRef>
+          <a:fontRef idx="minor">
+            <a:schemeClr val="lt1"/>
+          </a:fontRef>
+        </p:style>
+        <p:txBody>
+          <a:bodyPr rtlCol="0" anchor="ctr"/>
+          <a:lstStyle/>
+          <a:p>
+            <a:pPr algn="ctr"/>
+          </a:p>
+        </p:txBody>
+      </p:sp>
+      <p:sp>
+        <p:nvSpPr>
+          <p:cNvPr id="5" name="TextBox 4"/>
+          <p:cNvSpPr txBox="1"/>
+          <p:nvPr/>
+        </p:nvSpPr>
+        <p:spPr>
+          <a:xfrm>
+            <a:off x="320040" y="6601968"/>
+            <a:ext cx="11521440" cy="201168"/>
+          </a:xfrm>
+          <a:prstGeom prst="rect">
+            <a:avLst/>
+          </a:prstGeom>
+          <a:noFill/>
+        </p:spPr>
+        <p:txBody>
+          <a:bodyPr wrap="none">
+            <a:spAutoFit/>
+          </a:bodyPr>
           <a:lstStyle/>
           <a:p>
             <a:pPr>
-              <a:defRPr sz="1800"/>
+              <a:defRPr sz="1000">
+                <a:solidFill>
+                  <a:srgbClr val="544C66"/>
+                </a:solidFill>
+              </a:defRPr>
             </a:pPr>
             <a:r>
+              <a:t>Kansas State University | CIS 732/830 | Conclusion</a:t>
+            </a:r>
+          </a:p>
+        </p:txBody>
+      </p:sp>
+      <p:sp>
+        <p:nvSpPr>
+          <p:cNvPr id="6" name="TextBox 5"/>
+          <p:cNvSpPr txBox="1"/>
+          <p:nvPr/>
+        </p:nvSpPr>
+        <p:spPr>
+          <a:xfrm>
+            <a:off x="502920" y="475488"/>
+            <a:ext cx="11155680" cy="502920"/>
+          </a:xfrm>
+          <a:prstGeom prst="rect">
+            <a:avLst/>
+          </a:prstGeom>
+          <a:noFill/>
+        </p:spPr>
+        <p:txBody>
+          <a:bodyPr wrap="none">
+            <a:spAutoFit/>
+          </a:bodyPr>
+          <a:lstStyle/>
+          <a:p>
+            <a:pPr>
+              <a:defRPr sz="2800" b="1">
+                <a:solidFill>
+                  <a:srgbClr val="512888"/>
+                </a:solidFill>
+              </a:defRPr>
+            </a:pPr>
+            <a:r>
+              <a:t>Conclusion and Recommendation</a:t>
+            </a:r>
+          </a:p>
+        </p:txBody>
+      </p:sp>
+      <p:sp>
+        <p:nvSpPr>
+          <p:cNvPr id="7" name="Rounded Rectangle 6"/>
+          <p:cNvSpPr/>
+          <p:nvPr/>
+        </p:nvSpPr>
+        <p:spPr>
+          <a:xfrm>
+            <a:off x="731520" y="1325880"/>
+            <a:ext cx="10789920" cy="4480560"/>
+          </a:xfrm>
+          <a:prstGeom prst="roundRect">
+            <a:avLst/>
+          </a:prstGeom>
+          <a:solidFill>
+            <a:srgbClr val="F6F4FA"/>
+          </a:solidFill>
+          <a:ln>
+            <a:solidFill>
+              <a:srgbClr val="E8E2F0"/>
+            </a:solidFill>
+          </a:ln>
+        </p:spPr>
+        <p:style>
+          <a:lnRef idx="1">
+            <a:schemeClr val="accent1"/>
+          </a:lnRef>
+          <a:fillRef idx="3">
+            <a:schemeClr val="accent1"/>
+          </a:fillRef>
+          <a:effectRef idx="2">
+            <a:schemeClr val="accent1"/>
+          </a:effectRef>
+          <a:fontRef idx="minor">
+            <a:schemeClr val="lt1"/>
+          </a:fontRef>
+        </p:style>
+        <p:txBody>
+          <a:bodyPr rtlCol="0" anchor="ctr"/>
+          <a:lstStyle/>
+          <a:p>
+            <a:pPr algn="ctr"/>
+          </a:p>
+        </p:txBody>
+      </p:sp>
+      <p:sp>
+        <p:nvSpPr>
+          <p:cNvPr id="8" name="TextBox 7"/>
+          <p:cNvSpPr txBox="1"/>
+          <p:nvPr/>
+        </p:nvSpPr>
+        <p:spPr>
+          <a:xfrm>
+            <a:off x="1051560" y="1600200"/>
+            <a:ext cx="10149840" cy="3840480"/>
+          </a:xfrm>
+          <a:prstGeom prst="rect">
+            <a:avLst/>
+          </a:prstGeom>
+          <a:noFill/>
+        </p:spPr>
+        <p:txBody>
+          <a:bodyPr wrap="none">
+            <a:spAutoFit/>
+          </a:bodyPr>
+          <a:lstStyle/>
+          <a:p>
+            <a:pPr>
+              <a:defRPr sz="2100">
+                <a:solidFill>
+                  <a:srgbClr val="251F2D"/>
+                </a:solidFill>
+              </a:defRPr>
+            </a:pPr>
+            <a:r>
               <a:t>Random Forest is selected as the primary model for this dataset.</a:t>
             </a:r>
           </a:p>
           <a:p>
             <a:pPr>
-              <a:defRPr sz="1600"/>
+              <a:defRPr sz="1800">
+                <a:solidFill>
+                  <a:srgbClr val="251F2D"/>
+                </a:solidFill>
+              </a:defRPr>
             </a:pPr>
             <a:r>
               <a:t>Best fixed-split result: RF RMSE=4.3706, R2=0.9529</a:t>
@@ -3946,7 +6232,11 @@
           </a:p>
           <a:p>
             <a:pPr>
-              <a:defRPr sz="1600"/>
+              <a:defRPr sz="1800">
+                <a:solidFill>
+                  <a:srgbClr val="251F2D"/>
+                </a:solidFill>
+              </a:defRPr>
             </a:pPr>
             <a:r>
               <a:t>30-split robustness supports stable generalization.</a:t>
@@ -3954,7 +6244,11 @@
           </a:p>
           <a:p>
             <a:pPr>
-              <a:defRPr sz="1600"/>
+              <a:defRPr sz="1800">
+                <a:solidFill>
+                  <a:srgbClr val="251F2D"/>
+                </a:solidFill>
+              </a:defRPr>
             </a:pPr>
             <a:r>
               <a:t>Scaling ablation and runtime analyses were fully completed.</a:t>
@@ -3962,7 +6256,11 @@
           </a:p>
           <a:p>
             <a:pPr>
-              <a:defRPr sz="1600"/>
+              <a:defRPr sz="1800">
+                <a:solidFill>
+                  <a:srgbClr val="251F2D"/>
+                </a:solidFill>
+              </a:defRPr>
             </a:pPr>
             <a:r>
               <a:t>Significance confirmed: t-test p=2.79e-06, Wilcoxon p=3.02e-06</a:t>
@@ -3970,7 +6268,11 @@
           </a:p>
           <a:p>
             <a:pPr>
-              <a:defRPr sz="1600"/>
+              <a:defRPr sz="1800">
+                <a:solidFill>
+                  <a:srgbClr val="251F2D"/>
+                </a:solidFill>
+              </a:defRPr>
             </a:pPr>
             <a:r>
               <a:t>Final recommendation: deploy RF first, keep MLP for future extensions.</a:t>
@@ -3998,50 +6300,285 @@
       <p:grpSpPr/>
       <p:sp>
         <p:nvSpPr>
-          <p:cNvPr id="2" name="Title 1"/>
-          <p:cNvSpPr>
-            <a:spLocks noGrp="1"/>
-          </p:cNvSpPr>
-          <p:nvPr>
-            <p:ph type="title"/>
-          </p:nvPr>
-        </p:nvSpPr>
-        <p:spPr/>
-        <p:txBody>
-          <a:bodyPr/>
-          <a:lstStyle/>
-          <a:p>
-            <a:r>
-              <a:t>Overview</a:t>
-            </a:r>
-          </a:p>
-        </p:txBody>
-      </p:sp>
-      <p:sp>
-        <p:nvSpPr>
-          <p:cNvPr id="3" name="Content Placeholder 2"/>
-          <p:cNvSpPr>
-            <a:spLocks noGrp="1"/>
-          </p:cNvSpPr>
-          <p:nvPr>
-            <p:ph idx="1"/>
-          </p:nvPr>
-        </p:nvSpPr>
-        <p:spPr/>
-        <p:txBody>
-          <a:bodyPr/>
+          <p:cNvPr id="2" name="Rectangle 1"/>
+          <p:cNvSpPr/>
+          <p:nvPr/>
+        </p:nvSpPr>
+        <p:spPr>
+          <a:xfrm>
+            <a:off x="0" y="0"/>
+            <a:ext cx="12188952" cy="6858000"/>
+          </a:xfrm>
+          <a:prstGeom prst="rect">
+            <a:avLst/>
+          </a:prstGeom>
+          <a:solidFill>
+            <a:srgbClr val="FCFBFF"/>
+          </a:solidFill>
+          <a:ln>
+            <a:noFill/>
+          </a:ln>
+        </p:spPr>
+        <p:style>
+          <a:lnRef idx="1">
+            <a:schemeClr val="accent1"/>
+          </a:lnRef>
+          <a:fillRef idx="3">
+            <a:schemeClr val="accent1"/>
+          </a:fillRef>
+          <a:effectRef idx="2">
+            <a:schemeClr val="accent1"/>
+          </a:effectRef>
+          <a:fontRef idx="minor">
+            <a:schemeClr val="lt1"/>
+          </a:fontRef>
+        </p:style>
+        <p:txBody>
+          <a:bodyPr rtlCol="0" anchor="ctr"/>
+          <a:lstStyle/>
+          <a:p>
+            <a:pPr algn="ctr"/>
+          </a:p>
+        </p:txBody>
+      </p:sp>
+      <p:sp>
+        <p:nvSpPr>
+          <p:cNvPr id="3" name="Rectangle 2"/>
+          <p:cNvSpPr/>
+          <p:nvPr/>
+        </p:nvSpPr>
+        <p:spPr>
+          <a:xfrm>
+            <a:off x="0" y="0"/>
+            <a:ext cx="12188952" cy="411480"/>
+          </a:xfrm>
+          <a:prstGeom prst="rect">
+            <a:avLst/>
+          </a:prstGeom>
+          <a:solidFill>
+            <a:srgbClr val="512888"/>
+          </a:solidFill>
+          <a:ln>
+            <a:noFill/>
+          </a:ln>
+        </p:spPr>
+        <p:style>
+          <a:lnRef idx="1">
+            <a:schemeClr val="accent1"/>
+          </a:lnRef>
+          <a:fillRef idx="3">
+            <a:schemeClr val="accent1"/>
+          </a:fillRef>
+          <a:effectRef idx="2">
+            <a:schemeClr val="accent1"/>
+          </a:effectRef>
+          <a:fontRef idx="minor">
+            <a:schemeClr val="lt1"/>
+          </a:fontRef>
+        </p:style>
+        <p:txBody>
+          <a:bodyPr rtlCol="0" anchor="ctr"/>
+          <a:lstStyle/>
+          <a:p>
+            <a:pPr algn="ctr"/>
+          </a:p>
+        </p:txBody>
+      </p:sp>
+      <p:sp>
+        <p:nvSpPr>
+          <p:cNvPr id="4" name="Rectangle 3"/>
+          <p:cNvSpPr/>
+          <p:nvPr/>
+        </p:nvSpPr>
+        <p:spPr>
+          <a:xfrm>
+            <a:off x="0" y="6583680"/>
+            <a:ext cx="12188952" cy="274320"/>
+          </a:xfrm>
+          <a:prstGeom prst="rect">
+            <a:avLst/>
+          </a:prstGeom>
+          <a:solidFill>
+            <a:srgbClr val="ECE6F5"/>
+          </a:solidFill>
+          <a:ln>
+            <a:noFill/>
+          </a:ln>
+        </p:spPr>
+        <p:style>
+          <a:lnRef idx="1">
+            <a:schemeClr val="accent1"/>
+          </a:lnRef>
+          <a:fillRef idx="3">
+            <a:schemeClr val="accent1"/>
+          </a:fillRef>
+          <a:effectRef idx="2">
+            <a:schemeClr val="accent1"/>
+          </a:effectRef>
+          <a:fontRef idx="minor">
+            <a:schemeClr val="lt1"/>
+          </a:fontRef>
+        </p:style>
+        <p:txBody>
+          <a:bodyPr rtlCol="0" anchor="ctr"/>
+          <a:lstStyle/>
+          <a:p>
+            <a:pPr algn="ctr"/>
+          </a:p>
+        </p:txBody>
+      </p:sp>
+      <p:sp>
+        <p:nvSpPr>
+          <p:cNvPr id="5" name="TextBox 4"/>
+          <p:cNvSpPr txBox="1"/>
+          <p:nvPr/>
+        </p:nvSpPr>
+        <p:spPr>
+          <a:xfrm>
+            <a:off x="320040" y="6601968"/>
+            <a:ext cx="11521440" cy="201168"/>
+          </a:xfrm>
+          <a:prstGeom prst="rect">
+            <a:avLst/>
+          </a:prstGeom>
+          <a:noFill/>
+        </p:spPr>
+        <p:txBody>
+          <a:bodyPr wrap="none">
+            <a:spAutoFit/>
+          </a:bodyPr>
           <a:lstStyle/>
           <a:p>
             <a:pPr>
-              <a:defRPr sz="1800"/>
+              <a:defRPr sz="1000">
+                <a:solidFill>
+                  <a:srgbClr val="544C66"/>
+                </a:solidFill>
+              </a:defRPr>
             </a:pPr>
             <a:r>
+              <a:t>Kansas State University | CIS 732/830 | Overview</a:t>
+            </a:r>
+          </a:p>
+        </p:txBody>
+      </p:sp>
+      <p:sp>
+        <p:nvSpPr>
+          <p:cNvPr id="6" name="TextBox 5"/>
+          <p:cNvSpPr txBox="1"/>
+          <p:nvPr/>
+        </p:nvSpPr>
+        <p:spPr>
+          <a:xfrm>
+            <a:off x="502920" y="475488"/>
+            <a:ext cx="11155680" cy="502920"/>
+          </a:xfrm>
+          <a:prstGeom prst="rect">
+            <a:avLst/>
+          </a:prstGeom>
+          <a:noFill/>
+        </p:spPr>
+        <p:txBody>
+          <a:bodyPr wrap="none">
+            <a:spAutoFit/>
+          </a:bodyPr>
+          <a:lstStyle/>
+          <a:p>
+            <a:pPr>
+              <a:defRPr sz="2800" b="1">
+                <a:solidFill>
+                  <a:srgbClr val="512888"/>
+                </a:solidFill>
+              </a:defRPr>
+            </a:pPr>
+          </a:p>
+        </p:txBody>
+      </p:sp>
+      <p:sp>
+        <p:nvSpPr>
+          <p:cNvPr id="7" name="Rounded Rectangle 6"/>
+          <p:cNvSpPr/>
+          <p:nvPr/>
+        </p:nvSpPr>
+        <p:spPr>
+          <a:xfrm>
+            <a:off x="731520" y="1325880"/>
+            <a:ext cx="10789920" cy="4480560"/>
+          </a:xfrm>
+          <a:prstGeom prst="roundRect">
+            <a:avLst/>
+          </a:prstGeom>
+          <a:solidFill>
+            <a:srgbClr val="F6F4FA"/>
+          </a:solidFill>
+          <a:ln>
+            <a:solidFill>
+              <a:srgbClr val="E8E2F0"/>
+            </a:solidFill>
+          </a:ln>
+        </p:spPr>
+        <p:style>
+          <a:lnRef idx="1">
+            <a:schemeClr val="accent1"/>
+          </a:lnRef>
+          <a:fillRef idx="3">
+            <a:schemeClr val="accent1"/>
+          </a:fillRef>
+          <a:effectRef idx="2">
+            <a:schemeClr val="accent1"/>
+          </a:effectRef>
+          <a:fontRef idx="minor">
+            <a:schemeClr val="lt1"/>
+          </a:fontRef>
+        </p:style>
+        <p:txBody>
+          <a:bodyPr rtlCol="0" anchor="ctr"/>
+          <a:lstStyle/>
+          <a:p>
+            <a:pPr algn="ctr"/>
+          </a:p>
+        </p:txBody>
+      </p:sp>
+      <p:sp>
+        <p:nvSpPr>
+          <p:cNvPr id="8" name="TextBox 7"/>
+          <p:cNvSpPr txBox="1"/>
+          <p:nvPr/>
+        </p:nvSpPr>
+        <p:spPr>
+          <a:xfrm>
+            <a:off x="1051560" y="1600200"/>
+            <a:ext cx="10149840" cy="3840480"/>
+          </a:xfrm>
+          <a:prstGeom prst="rect">
+            <a:avLst/>
+          </a:prstGeom>
+          <a:noFill/>
+        </p:spPr>
+        <p:txBody>
+          <a:bodyPr wrap="none">
+            <a:spAutoFit/>
+          </a:bodyPr>
+          <a:lstStyle/>
+          <a:p>
+            <a:pPr>
+              <a:defRPr sz="2100">
+                <a:solidFill>
+                  <a:srgbClr val="251F2D"/>
+                </a:solidFill>
+              </a:defRPr>
+            </a:pPr>
+            <a:r>
               <a:t>Dataset: 176 samples, 7 features, target = ethanol (mM)</a:t>
             </a:r>
           </a:p>
           <a:p>
             <a:pPr>
-              <a:defRPr sz="1600"/>
+              <a:defRPr sz="1800">
+                <a:solidFill>
+                  <a:srgbClr val="251F2D"/>
+                </a:solidFill>
+              </a:defRPr>
             </a:pPr>
             <a:r>
               <a:t>RF test: RMSE=4.3706, MAE=3.0850, R2=0.9529 (best)</a:t>
@@ -4049,7 +6586,11 @@
           </a:p>
           <a:p>
             <a:pPr>
-              <a:defRPr sz="1600"/>
+              <a:defRPr sz="1800">
+                <a:solidFill>
+                  <a:srgbClr val="251F2D"/>
+                </a:solidFill>
+              </a:defRPr>
             </a:pPr>
             <a:r>
               <a:t>MLP test: RMSE=5.5337, MAE=4.0084, R2=0.9245</a:t>
@@ -4057,7 +6598,11 @@
           </a:p>
           <a:p>
             <a:pPr>
-              <a:defRPr sz="1600"/>
+              <a:defRPr sz="1800">
+                <a:solidFill>
+                  <a:srgbClr val="251F2D"/>
+                </a:solidFill>
+              </a:defRPr>
             </a:pPr>
             <a:r>
               <a:t>LR test: RMSE=12.1832, MAE=9.2922, R2=0.6340</a:t>
@@ -4065,7 +6610,11 @@
           </a:p>
           <a:p>
             <a:pPr>
-              <a:defRPr sz="1600"/>
+              <a:defRPr sz="1800">
+                <a:solidFill>
+                  <a:srgbClr val="251F2D"/>
+                </a:solidFill>
+              </a:defRPr>
             </a:pPr>
             <a:r>
               <a:t>Statistical tests: paired t-test p=2.79e-06, Wilcoxon p=3.02e-06</a:t>
@@ -4073,7 +6622,11 @@
           </a:p>
           <a:p>
             <a:pPr>
-              <a:defRPr sz="1600"/>
+              <a:defRPr sz="1800">
+                <a:solidFill>
+                  <a:srgbClr val="251F2D"/>
+                </a:solidFill>
+              </a:defRPr>
             </a:pPr>
             <a:r>
               <a:t>Slides 3-15 cover Figure 1 to Figure 13 with explanations.</a:t>
@@ -4101,14 +6654,143 @@
       <p:grpSpPr/>
       <p:sp>
         <p:nvSpPr>
-          <p:cNvPr id="2" name="TextBox 1"/>
+          <p:cNvPr id="2" name="Rectangle 1"/>
+          <p:cNvSpPr/>
+          <p:nvPr/>
+        </p:nvSpPr>
+        <p:spPr>
+          <a:xfrm>
+            <a:off x="0" y="0"/>
+            <a:ext cx="12188952" cy="6858000"/>
+          </a:xfrm>
+          <a:prstGeom prst="rect">
+            <a:avLst/>
+          </a:prstGeom>
+          <a:solidFill>
+            <a:srgbClr val="FCFBFF"/>
+          </a:solidFill>
+          <a:ln>
+            <a:noFill/>
+          </a:ln>
+        </p:spPr>
+        <p:style>
+          <a:lnRef idx="1">
+            <a:schemeClr val="accent1"/>
+          </a:lnRef>
+          <a:fillRef idx="3">
+            <a:schemeClr val="accent1"/>
+          </a:fillRef>
+          <a:effectRef idx="2">
+            <a:schemeClr val="accent1"/>
+          </a:effectRef>
+          <a:fontRef idx="minor">
+            <a:schemeClr val="lt1"/>
+          </a:fontRef>
+        </p:style>
+        <p:txBody>
+          <a:bodyPr rtlCol="0" anchor="ctr"/>
+          <a:lstStyle/>
+          <a:p>
+            <a:pPr algn="ctr"/>
+          </a:p>
+        </p:txBody>
+      </p:sp>
+      <p:sp>
+        <p:nvSpPr>
+          <p:cNvPr id="3" name="Rectangle 2"/>
+          <p:cNvSpPr/>
+          <p:nvPr/>
+        </p:nvSpPr>
+        <p:spPr>
+          <a:xfrm>
+            <a:off x="0" y="0"/>
+            <a:ext cx="12188952" cy="411480"/>
+          </a:xfrm>
+          <a:prstGeom prst="rect">
+            <a:avLst/>
+          </a:prstGeom>
+          <a:solidFill>
+            <a:srgbClr val="512888"/>
+          </a:solidFill>
+          <a:ln>
+            <a:noFill/>
+          </a:ln>
+        </p:spPr>
+        <p:style>
+          <a:lnRef idx="1">
+            <a:schemeClr val="accent1"/>
+          </a:lnRef>
+          <a:fillRef idx="3">
+            <a:schemeClr val="accent1"/>
+          </a:fillRef>
+          <a:effectRef idx="2">
+            <a:schemeClr val="accent1"/>
+          </a:effectRef>
+          <a:fontRef idx="minor">
+            <a:schemeClr val="lt1"/>
+          </a:fontRef>
+        </p:style>
+        <p:txBody>
+          <a:bodyPr rtlCol="0" anchor="ctr"/>
+          <a:lstStyle/>
+          <a:p>
+            <a:pPr algn="ctr"/>
+          </a:p>
+        </p:txBody>
+      </p:sp>
+      <p:sp>
+        <p:nvSpPr>
+          <p:cNvPr id="4" name="Rectangle 3"/>
+          <p:cNvSpPr/>
+          <p:nvPr/>
+        </p:nvSpPr>
+        <p:spPr>
+          <a:xfrm>
+            <a:off x="0" y="6583680"/>
+            <a:ext cx="12188952" cy="274320"/>
+          </a:xfrm>
+          <a:prstGeom prst="rect">
+            <a:avLst/>
+          </a:prstGeom>
+          <a:solidFill>
+            <a:srgbClr val="ECE6F5"/>
+          </a:solidFill>
+          <a:ln>
+            <a:noFill/>
+          </a:ln>
+        </p:spPr>
+        <p:style>
+          <a:lnRef idx="1">
+            <a:schemeClr val="accent1"/>
+          </a:lnRef>
+          <a:fillRef idx="3">
+            <a:schemeClr val="accent1"/>
+          </a:fillRef>
+          <a:effectRef idx="2">
+            <a:schemeClr val="accent1"/>
+          </a:effectRef>
+          <a:fontRef idx="minor">
+            <a:schemeClr val="lt1"/>
+          </a:fontRef>
+        </p:style>
+        <p:txBody>
+          <a:bodyPr rtlCol="0" anchor="ctr"/>
+          <a:lstStyle/>
+          <a:p>
+            <a:pPr algn="ctr"/>
+          </a:p>
+        </p:txBody>
+      </p:sp>
+      <p:sp>
+        <p:nvSpPr>
+          <p:cNvPr id="5" name="TextBox 4"/>
           <p:cNvSpPr txBox="1"/>
           <p:nvPr/>
         </p:nvSpPr>
         <p:spPr>
           <a:xfrm>
-            <a:off x="274320" y="91440"/>
-            <a:ext cx="11704320" cy="502920"/>
+            <a:off x="320040" y="6601968"/>
+            <a:ext cx="11521440" cy="201168"/>
           </a:xfrm>
           <a:prstGeom prst="rect">
             <a:avLst/>
@@ -4122,17 +6804,101 @@
           <a:lstStyle/>
           <a:p>
             <a:pPr>
-              <a:defRPr sz="2700" b="1"/>
+              <a:defRPr sz="1000">
+                <a:solidFill>
+                  <a:srgbClr val="544C66"/>
+                </a:solidFill>
+              </a:defRPr>
             </a:pPr>
             <a:r>
+              <a:t>Kansas State University | CIS 732/830 | Figure</a:t>
+            </a:r>
+          </a:p>
+        </p:txBody>
+      </p:sp>
+      <p:sp>
+        <p:nvSpPr>
+          <p:cNvPr id="6" name="TextBox 5"/>
+          <p:cNvSpPr txBox="1"/>
+          <p:nvPr/>
+        </p:nvSpPr>
+        <p:spPr>
+          <a:xfrm>
+            <a:off x="502920" y="475488"/>
+            <a:ext cx="11155680" cy="502920"/>
+          </a:xfrm>
+          <a:prstGeom prst="rect">
+            <a:avLst/>
+          </a:prstGeom>
+          <a:noFill/>
+        </p:spPr>
+        <p:txBody>
+          <a:bodyPr wrap="none">
+            <a:spAutoFit/>
+          </a:bodyPr>
+          <a:lstStyle/>
+          <a:p>
+            <a:pPr>
+              <a:defRPr sz="2800" b="1">
+                <a:solidFill>
+                  <a:srgbClr val="512888"/>
+                </a:solidFill>
+              </a:defRPr>
+            </a:pPr>
+            <a:r>
               <a:t>Figure 1: Data Distributions</a:t>
             </a:r>
+          </a:p>
+        </p:txBody>
+      </p:sp>
+      <p:sp>
+        <p:nvSpPr>
+          <p:cNvPr id="7" name="Rounded Rectangle 6"/>
+          <p:cNvSpPr/>
+          <p:nvPr/>
+        </p:nvSpPr>
+        <p:spPr>
+          <a:xfrm>
+            <a:off x="411480" y="1051560"/>
+            <a:ext cx="8092440" cy="4892040"/>
+          </a:xfrm>
+          <a:prstGeom prst="roundRect">
+            <a:avLst/>
+          </a:prstGeom>
+          <a:solidFill>
+            <a:srgbClr val="FFFFFF"/>
+          </a:solidFill>
+          <a:ln>
+            <a:solidFill>
+              <a:srgbClr val="E8E2F0"/>
+            </a:solidFill>
+          </a:ln>
+        </p:spPr>
+        <p:style>
+          <a:lnRef idx="1">
+            <a:schemeClr val="accent1"/>
+          </a:lnRef>
+          <a:fillRef idx="3">
+            <a:schemeClr val="accent1"/>
+          </a:fillRef>
+          <a:effectRef idx="2">
+            <a:schemeClr val="accent1"/>
+          </a:effectRef>
+          <a:fontRef idx="minor">
+            <a:schemeClr val="lt1"/>
+          </a:fontRef>
+        </p:style>
+        <p:txBody>
+          <a:bodyPr rtlCol="0" anchor="ctr"/>
+          <a:lstStyle/>
+          <a:p>
+            <a:pPr algn="ctr"/>
           </a:p>
         </p:txBody>
       </p:sp>
       <p:pic>
         <p:nvPicPr>
-          <p:cNvPr id="3" name="Picture 2" descr="fig1_data_distributions.png"/>
+          <p:cNvPr id="8" name="Picture 7" descr="fig1_data_distributions.png"/>
           <p:cNvPicPr>
             <a:picLocks noChangeAspect="1"/>
           </p:cNvPicPr>
@@ -4146,8 +6912,8 @@
         </p:blipFill>
         <p:spPr>
           <a:xfrm>
-            <a:off x="274320" y="777240"/>
-            <a:ext cx="7863840" cy="5212080"/>
+            <a:off x="621792" y="1261872"/>
+            <a:ext cx="7680960" cy="4480560"/>
           </a:xfrm>
           <a:prstGeom prst="rect">
             <a:avLst/>
@@ -4156,14 +6922,118 @@
       </p:pic>
       <p:sp>
         <p:nvSpPr>
-          <p:cNvPr id="4" name="TextBox 3"/>
+          <p:cNvPr id="9" name="Rounded Rectangle 8"/>
+          <p:cNvSpPr/>
+          <p:nvPr/>
+        </p:nvSpPr>
+        <p:spPr>
+          <a:xfrm>
+            <a:off x="8641080" y="1051560"/>
+            <a:ext cx="3063240" cy="4892040"/>
+          </a:xfrm>
+          <a:prstGeom prst="roundRect">
+            <a:avLst/>
+          </a:prstGeom>
+          <a:solidFill>
+            <a:srgbClr val="F7F4FC"/>
+          </a:solidFill>
+          <a:ln>
+            <a:solidFill>
+              <a:srgbClr val="E8E2F0"/>
+            </a:solidFill>
+          </a:ln>
+        </p:spPr>
+        <p:style>
+          <a:lnRef idx="1">
+            <a:schemeClr val="accent1"/>
+          </a:lnRef>
+          <a:fillRef idx="3">
+            <a:schemeClr val="accent1"/>
+          </a:fillRef>
+          <a:effectRef idx="2">
+            <a:schemeClr val="accent1"/>
+          </a:effectRef>
+          <a:fontRef idx="minor">
+            <a:schemeClr val="lt1"/>
+          </a:fontRef>
+        </p:style>
+        <p:txBody>
+          <a:bodyPr rtlCol="0" anchor="ctr"/>
+          <a:lstStyle/>
+          <a:p>
+            <a:pPr algn="ctr"/>
+          </a:p>
+        </p:txBody>
+      </p:sp>
+      <p:sp>
+        <p:nvSpPr>
+          <p:cNvPr id="10" name="TextBox 9"/>
           <p:cNvSpPr txBox="1"/>
           <p:nvPr/>
         </p:nvSpPr>
         <p:spPr>
           <a:xfrm>
-            <a:off x="8229600" y="777240"/>
-            <a:ext cx="3474720" cy="5303520"/>
+            <a:off x="8887968" y="1234440"/>
+            <a:ext cx="2651760" cy="4526280"/>
+          </a:xfrm>
+          <a:prstGeom prst="rect">
+            <a:avLst/>
+          </a:prstGeom>
+          <a:noFill/>
+        </p:spPr>
+        <p:txBody>
+          <a:bodyPr wrap="square">
+            <a:spAutoFit/>
+          </a:bodyPr>
+          <a:lstStyle/>
+          <a:p>
+            <a:pPr>
+              <a:defRPr sz="1500">
+                <a:solidFill>
+                  <a:srgbClr val="251F2D"/>
+                </a:solidFill>
+              </a:defRPr>
+            </a:pPr>
+            <a:r>
+              <a:t>- Shows spread/skewness of all features and target.</a:t>
+            </a:r>
+          </a:p>
+          <a:p>
+            <a:pPr>
+              <a:defRPr sz="1400">
+                <a:solidFill>
+                  <a:srgbClr val="251F2D"/>
+                </a:solidFill>
+              </a:defRPr>
+            </a:pPr>
+            <a:r>
+              <a:t>- Confirms heterogeneous feature scales.</a:t>
+            </a:r>
+          </a:p>
+          <a:p>
+            <a:pPr>
+              <a:defRPr sz="1400">
+                <a:solidFill>
+                  <a:srgbClr val="251F2D"/>
+                </a:solidFill>
+              </a:defRPr>
+            </a:pPr>
+            <a:r>
+              <a:t>- Supports preprocessing and scaling decisions.</a:t>
+            </a:r>
+          </a:p>
+        </p:txBody>
+      </p:sp>
+      <p:sp>
+        <p:nvSpPr>
+          <p:cNvPr id="11" name="TextBox 10"/>
+          <p:cNvSpPr txBox="1"/>
+          <p:nvPr/>
+        </p:nvSpPr>
+        <p:spPr>
+          <a:xfrm>
+            <a:off x="658368" y="5623560"/>
+            <a:ext cx="7406640" cy="256032"/>
           </a:xfrm>
           <a:prstGeom prst="rect">
             <a:avLst/>
@@ -4177,26 +7047,14 @@
           <a:lstStyle/>
           <a:p>
             <a:pPr>
-              <a:defRPr sz="1500"/>
+              <a:defRPr sz="1000">
+                <a:solidFill>
+                  <a:srgbClr val="625D6C"/>
+                </a:solidFill>
+              </a:defRPr>
             </a:pPr>
             <a:r>
-              <a:t>Shows spread/skewness of all features and target.</a:t>
-            </a:r>
-          </a:p>
-          <a:p>
-            <a:pPr>
-              <a:defRPr sz="1500"/>
-            </a:pPr>
-            <a:r>
-              <a:t>Confirms heterogeneous feature scales.</a:t>
-            </a:r>
-          </a:p>
-          <a:p>
-            <a:pPr>
-              <a:defRPr sz="1500"/>
-            </a:pPr>
-            <a:r>
-              <a:t>Supports preprocessing and scaling decisions.</a:t>
+              <a:t>All values and figures are generated from scripts/syngas_analysis.py</a:t>
             </a:r>
           </a:p>
         </p:txBody>
@@ -4221,14 +7079,143 @@
       <p:grpSpPr/>
       <p:sp>
         <p:nvSpPr>
-          <p:cNvPr id="2" name="TextBox 1"/>
+          <p:cNvPr id="2" name="Rectangle 1"/>
+          <p:cNvSpPr/>
+          <p:nvPr/>
+        </p:nvSpPr>
+        <p:spPr>
+          <a:xfrm>
+            <a:off x="0" y="0"/>
+            <a:ext cx="12188952" cy="6858000"/>
+          </a:xfrm>
+          <a:prstGeom prst="rect">
+            <a:avLst/>
+          </a:prstGeom>
+          <a:solidFill>
+            <a:srgbClr val="FCFBFF"/>
+          </a:solidFill>
+          <a:ln>
+            <a:noFill/>
+          </a:ln>
+        </p:spPr>
+        <p:style>
+          <a:lnRef idx="1">
+            <a:schemeClr val="accent1"/>
+          </a:lnRef>
+          <a:fillRef idx="3">
+            <a:schemeClr val="accent1"/>
+          </a:fillRef>
+          <a:effectRef idx="2">
+            <a:schemeClr val="accent1"/>
+          </a:effectRef>
+          <a:fontRef idx="minor">
+            <a:schemeClr val="lt1"/>
+          </a:fontRef>
+        </p:style>
+        <p:txBody>
+          <a:bodyPr rtlCol="0" anchor="ctr"/>
+          <a:lstStyle/>
+          <a:p>
+            <a:pPr algn="ctr"/>
+          </a:p>
+        </p:txBody>
+      </p:sp>
+      <p:sp>
+        <p:nvSpPr>
+          <p:cNvPr id="3" name="Rectangle 2"/>
+          <p:cNvSpPr/>
+          <p:nvPr/>
+        </p:nvSpPr>
+        <p:spPr>
+          <a:xfrm>
+            <a:off x="0" y="0"/>
+            <a:ext cx="12188952" cy="411480"/>
+          </a:xfrm>
+          <a:prstGeom prst="rect">
+            <a:avLst/>
+          </a:prstGeom>
+          <a:solidFill>
+            <a:srgbClr val="512888"/>
+          </a:solidFill>
+          <a:ln>
+            <a:noFill/>
+          </a:ln>
+        </p:spPr>
+        <p:style>
+          <a:lnRef idx="1">
+            <a:schemeClr val="accent1"/>
+          </a:lnRef>
+          <a:fillRef idx="3">
+            <a:schemeClr val="accent1"/>
+          </a:fillRef>
+          <a:effectRef idx="2">
+            <a:schemeClr val="accent1"/>
+          </a:effectRef>
+          <a:fontRef idx="minor">
+            <a:schemeClr val="lt1"/>
+          </a:fontRef>
+        </p:style>
+        <p:txBody>
+          <a:bodyPr rtlCol="0" anchor="ctr"/>
+          <a:lstStyle/>
+          <a:p>
+            <a:pPr algn="ctr"/>
+          </a:p>
+        </p:txBody>
+      </p:sp>
+      <p:sp>
+        <p:nvSpPr>
+          <p:cNvPr id="4" name="Rectangle 3"/>
+          <p:cNvSpPr/>
+          <p:nvPr/>
+        </p:nvSpPr>
+        <p:spPr>
+          <a:xfrm>
+            <a:off x="0" y="6583680"/>
+            <a:ext cx="12188952" cy="274320"/>
+          </a:xfrm>
+          <a:prstGeom prst="rect">
+            <a:avLst/>
+          </a:prstGeom>
+          <a:solidFill>
+            <a:srgbClr val="ECE6F5"/>
+          </a:solidFill>
+          <a:ln>
+            <a:noFill/>
+          </a:ln>
+        </p:spPr>
+        <p:style>
+          <a:lnRef idx="1">
+            <a:schemeClr val="accent1"/>
+          </a:lnRef>
+          <a:fillRef idx="3">
+            <a:schemeClr val="accent1"/>
+          </a:fillRef>
+          <a:effectRef idx="2">
+            <a:schemeClr val="accent1"/>
+          </a:effectRef>
+          <a:fontRef idx="minor">
+            <a:schemeClr val="lt1"/>
+          </a:fontRef>
+        </p:style>
+        <p:txBody>
+          <a:bodyPr rtlCol="0" anchor="ctr"/>
+          <a:lstStyle/>
+          <a:p>
+            <a:pPr algn="ctr"/>
+          </a:p>
+        </p:txBody>
+      </p:sp>
+      <p:sp>
+        <p:nvSpPr>
+          <p:cNvPr id="5" name="TextBox 4"/>
           <p:cNvSpPr txBox="1"/>
           <p:nvPr/>
         </p:nvSpPr>
         <p:spPr>
           <a:xfrm>
-            <a:off x="274320" y="91440"/>
-            <a:ext cx="11704320" cy="502920"/>
+            <a:off x="320040" y="6601968"/>
+            <a:ext cx="11521440" cy="201168"/>
           </a:xfrm>
           <a:prstGeom prst="rect">
             <a:avLst/>
@@ -4242,17 +7229,101 @@
           <a:lstStyle/>
           <a:p>
             <a:pPr>
-              <a:defRPr sz="2700" b="1"/>
+              <a:defRPr sz="1000">
+                <a:solidFill>
+                  <a:srgbClr val="544C66"/>
+                </a:solidFill>
+              </a:defRPr>
             </a:pPr>
             <a:r>
+              <a:t>Kansas State University | CIS 732/830 | Figure</a:t>
+            </a:r>
+          </a:p>
+        </p:txBody>
+      </p:sp>
+      <p:sp>
+        <p:nvSpPr>
+          <p:cNvPr id="6" name="TextBox 5"/>
+          <p:cNvSpPr txBox="1"/>
+          <p:nvPr/>
+        </p:nvSpPr>
+        <p:spPr>
+          <a:xfrm>
+            <a:off x="502920" y="475488"/>
+            <a:ext cx="11155680" cy="502920"/>
+          </a:xfrm>
+          <a:prstGeom prst="rect">
+            <a:avLst/>
+          </a:prstGeom>
+          <a:noFill/>
+        </p:spPr>
+        <p:txBody>
+          <a:bodyPr wrap="none">
+            <a:spAutoFit/>
+          </a:bodyPr>
+          <a:lstStyle/>
+          <a:p>
+            <a:pPr>
+              <a:defRPr sz="2800" b="1">
+                <a:solidFill>
+                  <a:srgbClr val="512888"/>
+                </a:solidFill>
+              </a:defRPr>
+            </a:pPr>
+            <a:r>
               <a:t>Figure 2: Feature vs Target</a:t>
             </a:r>
+          </a:p>
+        </p:txBody>
+      </p:sp>
+      <p:sp>
+        <p:nvSpPr>
+          <p:cNvPr id="7" name="Rounded Rectangle 6"/>
+          <p:cNvSpPr/>
+          <p:nvPr/>
+        </p:nvSpPr>
+        <p:spPr>
+          <a:xfrm>
+            <a:off x="411480" y="1051560"/>
+            <a:ext cx="8092440" cy="4892040"/>
+          </a:xfrm>
+          <a:prstGeom prst="roundRect">
+            <a:avLst/>
+          </a:prstGeom>
+          <a:solidFill>
+            <a:srgbClr val="FFFFFF"/>
+          </a:solidFill>
+          <a:ln>
+            <a:solidFill>
+              <a:srgbClr val="E8E2F0"/>
+            </a:solidFill>
+          </a:ln>
+        </p:spPr>
+        <p:style>
+          <a:lnRef idx="1">
+            <a:schemeClr val="accent1"/>
+          </a:lnRef>
+          <a:fillRef idx="3">
+            <a:schemeClr val="accent1"/>
+          </a:fillRef>
+          <a:effectRef idx="2">
+            <a:schemeClr val="accent1"/>
+          </a:effectRef>
+          <a:fontRef idx="minor">
+            <a:schemeClr val="lt1"/>
+          </a:fontRef>
+        </p:style>
+        <p:txBody>
+          <a:bodyPr rtlCol="0" anchor="ctr"/>
+          <a:lstStyle/>
+          <a:p>
+            <a:pPr algn="ctr"/>
           </a:p>
         </p:txBody>
       </p:sp>
       <p:pic>
         <p:nvPicPr>
-          <p:cNvPr id="3" name="Picture 2" descr="fig2_feature_vs_target.png"/>
+          <p:cNvPr id="8" name="Picture 7" descr="fig2_feature_vs_target.png"/>
           <p:cNvPicPr>
             <a:picLocks noChangeAspect="1"/>
           </p:cNvPicPr>
@@ -4266,8 +7337,8 @@
         </p:blipFill>
         <p:spPr>
           <a:xfrm>
-            <a:off x="274320" y="777240"/>
-            <a:ext cx="7863840" cy="5212080"/>
+            <a:off x="621792" y="1261872"/>
+            <a:ext cx="7680960" cy="4480560"/>
           </a:xfrm>
           <a:prstGeom prst="rect">
             <a:avLst/>
@@ -4276,14 +7347,118 @@
       </p:pic>
       <p:sp>
         <p:nvSpPr>
-          <p:cNvPr id="4" name="TextBox 3"/>
+          <p:cNvPr id="9" name="Rounded Rectangle 8"/>
+          <p:cNvSpPr/>
+          <p:nvPr/>
+        </p:nvSpPr>
+        <p:spPr>
+          <a:xfrm>
+            <a:off x="8641080" y="1051560"/>
+            <a:ext cx="3063240" cy="4892040"/>
+          </a:xfrm>
+          <a:prstGeom prst="roundRect">
+            <a:avLst/>
+          </a:prstGeom>
+          <a:solidFill>
+            <a:srgbClr val="F7F4FC"/>
+          </a:solidFill>
+          <a:ln>
+            <a:solidFill>
+              <a:srgbClr val="E8E2F0"/>
+            </a:solidFill>
+          </a:ln>
+        </p:spPr>
+        <p:style>
+          <a:lnRef idx="1">
+            <a:schemeClr val="accent1"/>
+          </a:lnRef>
+          <a:fillRef idx="3">
+            <a:schemeClr val="accent1"/>
+          </a:fillRef>
+          <a:effectRef idx="2">
+            <a:schemeClr val="accent1"/>
+          </a:effectRef>
+          <a:fontRef idx="minor">
+            <a:schemeClr val="lt1"/>
+          </a:fontRef>
+        </p:style>
+        <p:txBody>
+          <a:bodyPr rtlCol="0" anchor="ctr"/>
+          <a:lstStyle/>
+          <a:p>
+            <a:pPr algn="ctr"/>
+          </a:p>
+        </p:txBody>
+      </p:sp>
+      <p:sp>
+        <p:nvSpPr>
+          <p:cNvPr id="10" name="TextBox 9"/>
           <p:cNvSpPr txBox="1"/>
           <p:nvPr/>
         </p:nvSpPr>
         <p:spPr>
           <a:xfrm>
-            <a:off x="8229600" y="777240"/>
-            <a:ext cx="3474720" cy="5303520"/>
+            <a:off x="8887968" y="1234440"/>
+            <a:ext cx="2651760" cy="4526280"/>
+          </a:xfrm>
+          <a:prstGeom prst="rect">
+            <a:avLst/>
+          </a:prstGeom>
+          <a:noFill/>
+        </p:spPr>
+        <p:txBody>
+          <a:bodyPr wrap="square">
+            <a:spAutoFit/>
+          </a:bodyPr>
+          <a:lstStyle/>
+          <a:p>
+            <a:pPr>
+              <a:defRPr sz="1500">
+                <a:solidFill>
+                  <a:srgbClr val="251F2D"/>
+                </a:solidFill>
+              </a:defRPr>
+            </a:pPr>
+            <a:r>
+              <a:t>- Visual evidence of nonlinear relationships.</a:t>
+            </a:r>
+          </a:p>
+          <a:p>
+            <a:pPr>
+              <a:defRPr sz="1400">
+                <a:solidFill>
+                  <a:srgbClr val="251F2D"/>
+                </a:solidFill>
+              </a:defRPr>
+            </a:pPr>
+            <a:r>
+              <a:t>- Motivates RF/MLP beyond linear baseline.</a:t>
+            </a:r>
+          </a:p>
+          <a:p>
+            <a:pPr>
+              <a:defRPr sz="1400">
+                <a:solidFill>
+                  <a:srgbClr val="251F2D"/>
+                </a:solidFill>
+              </a:defRPr>
+            </a:pPr>
+            <a:r>
+              <a:t>- Helps identify interaction effects.</a:t>
+            </a:r>
+          </a:p>
+        </p:txBody>
+      </p:sp>
+      <p:sp>
+        <p:nvSpPr>
+          <p:cNvPr id="11" name="TextBox 10"/>
+          <p:cNvSpPr txBox="1"/>
+          <p:nvPr/>
+        </p:nvSpPr>
+        <p:spPr>
+          <a:xfrm>
+            <a:off x="658368" y="5623560"/>
+            <a:ext cx="7406640" cy="256032"/>
           </a:xfrm>
           <a:prstGeom prst="rect">
             <a:avLst/>
@@ -4297,26 +7472,14 @@
           <a:lstStyle/>
           <a:p>
             <a:pPr>
-              <a:defRPr sz="1500"/>
+              <a:defRPr sz="1000">
+                <a:solidFill>
+                  <a:srgbClr val="625D6C"/>
+                </a:solidFill>
+              </a:defRPr>
             </a:pPr>
             <a:r>
-              <a:t>Visual evidence of nonlinear relationships.</a:t>
-            </a:r>
-          </a:p>
-          <a:p>
-            <a:pPr>
-              <a:defRPr sz="1500"/>
-            </a:pPr>
-            <a:r>
-              <a:t>Motivates RF/MLP beyond linear baseline.</a:t>
-            </a:r>
-          </a:p>
-          <a:p>
-            <a:pPr>
-              <a:defRPr sz="1500"/>
-            </a:pPr>
-            <a:r>
-              <a:t>Helps identify interaction effects.</a:t>
+              <a:t>All values and figures are generated from scripts/syngas_analysis.py</a:t>
             </a:r>
           </a:p>
         </p:txBody>
@@ -4341,14 +7504,143 @@
       <p:grpSpPr/>
       <p:sp>
         <p:nvSpPr>
-          <p:cNvPr id="2" name="TextBox 1"/>
+          <p:cNvPr id="2" name="Rectangle 1"/>
+          <p:cNvSpPr/>
+          <p:nvPr/>
+        </p:nvSpPr>
+        <p:spPr>
+          <a:xfrm>
+            <a:off x="0" y="0"/>
+            <a:ext cx="12188952" cy="6858000"/>
+          </a:xfrm>
+          <a:prstGeom prst="rect">
+            <a:avLst/>
+          </a:prstGeom>
+          <a:solidFill>
+            <a:srgbClr val="FCFBFF"/>
+          </a:solidFill>
+          <a:ln>
+            <a:noFill/>
+          </a:ln>
+        </p:spPr>
+        <p:style>
+          <a:lnRef idx="1">
+            <a:schemeClr val="accent1"/>
+          </a:lnRef>
+          <a:fillRef idx="3">
+            <a:schemeClr val="accent1"/>
+          </a:fillRef>
+          <a:effectRef idx="2">
+            <a:schemeClr val="accent1"/>
+          </a:effectRef>
+          <a:fontRef idx="minor">
+            <a:schemeClr val="lt1"/>
+          </a:fontRef>
+        </p:style>
+        <p:txBody>
+          <a:bodyPr rtlCol="0" anchor="ctr"/>
+          <a:lstStyle/>
+          <a:p>
+            <a:pPr algn="ctr"/>
+          </a:p>
+        </p:txBody>
+      </p:sp>
+      <p:sp>
+        <p:nvSpPr>
+          <p:cNvPr id="3" name="Rectangle 2"/>
+          <p:cNvSpPr/>
+          <p:nvPr/>
+        </p:nvSpPr>
+        <p:spPr>
+          <a:xfrm>
+            <a:off x="0" y="0"/>
+            <a:ext cx="12188952" cy="411480"/>
+          </a:xfrm>
+          <a:prstGeom prst="rect">
+            <a:avLst/>
+          </a:prstGeom>
+          <a:solidFill>
+            <a:srgbClr val="512888"/>
+          </a:solidFill>
+          <a:ln>
+            <a:noFill/>
+          </a:ln>
+        </p:spPr>
+        <p:style>
+          <a:lnRef idx="1">
+            <a:schemeClr val="accent1"/>
+          </a:lnRef>
+          <a:fillRef idx="3">
+            <a:schemeClr val="accent1"/>
+          </a:fillRef>
+          <a:effectRef idx="2">
+            <a:schemeClr val="accent1"/>
+          </a:effectRef>
+          <a:fontRef idx="minor">
+            <a:schemeClr val="lt1"/>
+          </a:fontRef>
+        </p:style>
+        <p:txBody>
+          <a:bodyPr rtlCol="0" anchor="ctr"/>
+          <a:lstStyle/>
+          <a:p>
+            <a:pPr algn="ctr"/>
+          </a:p>
+        </p:txBody>
+      </p:sp>
+      <p:sp>
+        <p:nvSpPr>
+          <p:cNvPr id="4" name="Rectangle 3"/>
+          <p:cNvSpPr/>
+          <p:nvPr/>
+        </p:nvSpPr>
+        <p:spPr>
+          <a:xfrm>
+            <a:off x="0" y="6583680"/>
+            <a:ext cx="12188952" cy="274320"/>
+          </a:xfrm>
+          <a:prstGeom prst="rect">
+            <a:avLst/>
+          </a:prstGeom>
+          <a:solidFill>
+            <a:srgbClr val="ECE6F5"/>
+          </a:solidFill>
+          <a:ln>
+            <a:noFill/>
+          </a:ln>
+        </p:spPr>
+        <p:style>
+          <a:lnRef idx="1">
+            <a:schemeClr val="accent1"/>
+          </a:lnRef>
+          <a:fillRef idx="3">
+            <a:schemeClr val="accent1"/>
+          </a:fillRef>
+          <a:effectRef idx="2">
+            <a:schemeClr val="accent1"/>
+          </a:effectRef>
+          <a:fontRef idx="minor">
+            <a:schemeClr val="lt1"/>
+          </a:fontRef>
+        </p:style>
+        <p:txBody>
+          <a:bodyPr rtlCol="0" anchor="ctr"/>
+          <a:lstStyle/>
+          <a:p>
+            <a:pPr algn="ctr"/>
+          </a:p>
+        </p:txBody>
+      </p:sp>
+      <p:sp>
+        <p:nvSpPr>
+          <p:cNvPr id="5" name="TextBox 4"/>
           <p:cNvSpPr txBox="1"/>
           <p:nvPr/>
         </p:nvSpPr>
         <p:spPr>
           <a:xfrm>
-            <a:off x="274320" y="91440"/>
-            <a:ext cx="11704320" cy="502920"/>
+            <a:off x="320040" y="6601968"/>
+            <a:ext cx="11521440" cy="201168"/>
           </a:xfrm>
           <a:prstGeom prst="rect">
             <a:avLst/>
@@ -4362,17 +7654,101 @@
           <a:lstStyle/>
           <a:p>
             <a:pPr>
-              <a:defRPr sz="2700" b="1"/>
+              <a:defRPr sz="1000">
+                <a:solidFill>
+                  <a:srgbClr val="544C66"/>
+                </a:solidFill>
+              </a:defRPr>
             </a:pPr>
             <a:r>
+              <a:t>Kansas State University | CIS 732/830 | Figure</a:t>
+            </a:r>
+          </a:p>
+        </p:txBody>
+      </p:sp>
+      <p:sp>
+        <p:nvSpPr>
+          <p:cNvPr id="6" name="TextBox 5"/>
+          <p:cNvSpPr txBox="1"/>
+          <p:nvPr/>
+        </p:nvSpPr>
+        <p:spPr>
+          <a:xfrm>
+            <a:off x="502920" y="475488"/>
+            <a:ext cx="11155680" cy="502920"/>
+          </a:xfrm>
+          <a:prstGeom prst="rect">
+            <a:avLst/>
+          </a:prstGeom>
+          <a:noFill/>
+        </p:spPr>
+        <p:txBody>
+          <a:bodyPr wrap="none">
+            <a:spAutoFit/>
+          </a:bodyPr>
+          <a:lstStyle/>
+          <a:p>
+            <a:pPr>
+              <a:defRPr sz="2800" b="1">
+                <a:solidFill>
+                  <a:srgbClr val="512888"/>
+                </a:solidFill>
+              </a:defRPr>
+            </a:pPr>
+            <a:r>
               <a:t>Figure 3: MLP Training Loss Curve</a:t>
             </a:r>
+          </a:p>
+        </p:txBody>
+      </p:sp>
+      <p:sp>
+        <p:nvSpPr>
+          <p:cNvPr id="7" name="Rounded Rectangle 6"/>
+          <p:cNvSpPr/>
+          <p:nvPr/>
+        </p:nvSpPr>
+        <p:spPr>
+          <a:xfrm>
+            <a:off x="411480" y="1051560"/>
+            <a:ext cx="8092440" cy="4892040"/>
+          </a:xfrm>
+          <a:prstGeom prst="roundRect">
+            <a:avLst/>
+          </a:prstGeom>
+          <a:solidFill>
+            <a:srgbClr val="FFFFFF"/>
+          </a:solidFill>
+          <a:ln>
+            <a:solidFill>
+              <a:srgbClr val="E8E2F0"/>
+            </a:solidFill>
+          </a:ln>
+        </p:spPr>
+        <p:style>
+          <a:lnRef idx="1">
+            <a:schemeClr val="accent1"/>
+          </a:lnRef>
+          <a:fillRef idx="3">
+            <a:schemeClr val="accent1"/>
+          </a:fillRef>
+          <a:effectRef idx="2">
+            <a:schemeClr val="accent1"/>
+          </a:effectRef>
+          <a:fontRef idx="minor">
+            <a:schemeClr val="lt1"/>
+          </a:fontRef>
+        </p:style>
+        <p:txBody>
+          <a:bodyPr rtlCol="0" anchor="ctr"/>
+          <a:lstStyle/>
+          <a:p>
+            <a:pPr algn="ctr"/>
           </a:p>
         </p:txBody>
       </p:sp>
       <p:pic>
         <p:nvPicPr>
-          <p:cNvPr id="3" name="Picture 2" descr="fig3_mlp_training_loss.png"/>
+          <p:cNvPr id="8" name="Picture 7" descr="fig3_mlp_training_loss.png"/>
           <p:cNvPicPr>
             <a:picLocks noChangeAspect="1"/>
           </p:cNvPicPr>
@@ -4386,8 +7762,8 @@
         </p:blipFill>
         <p:spPr>
           <a:xfrm>
-            <a:off x="274320" y="777240"/>
-            <a:ext cx="7863840" cy="5212080"/>
+            <a:off x="621792" y="1261872"/>
+            <a:ext cx="7680960" cy="4480560"/>
           </a:xfrm>
           <a:prstGeom prst="rect">
             <a:avLst/>
@@ -4396,14 +7772,118 @@
       </p:pic>
       <p:sp>
         <p:nvSpPr>
-          <p:cNvPr id="4" name="TextBox 3"/>
+          <p:cNvPr id="9" name="Rounded Rectangle 8"/>
+          <p:cNvSpPr/>
+          <p:nvPr/>
+        </p:nvSpPr>
+        <p:spPr>
+          <a:xfrm>
+            <a:off x="8641080" y="1051560"/>
+            <a:ext cx="3063240" cy="4892040"/>
+          </a:xfrm>
+          <a:prstGeom prst="roundRect">
+            <a:avLst/>
+          </a:prstGeom>
+          <a:solidFill>
+            <a:srgbClr val="F7F4FC"/>
+          </a:solidFill>
+          <a:ln>
+            <a:solidFill>
+              <a:srgbClr val="E8E2F0"/>
+            </a:solidFill>
+          </a:ln>
+        </p:spPr>
+        <p:style>
+          <a:lnRef idx="1">
+            <a:schemeClr val="accent1"/>
+          </a:lnRef>
+          <a:fillRef idx="3">
+            <a:schemeClr val="accent1"/>
+          </a:fillRef>
+          <a:effectRef idx="2">
+            <a:schemeClr val="accent1"/>
+          </a:effectRef>
+          <a:fontRef idx="minor">
+            <a:schemeClr val="lt1"/>
+          </a:fontRef>
+        </p:style>
+        <p:txBody>
+          <a:bodyPr rtlCol="0" anchor="ctr"/>
+          <a:lstStyle/>
+          <a:p>
+            <a:pPr algn="ctr"/>
+          </a:p>
+        </p:txBody>
+      </p:sp>
+      <p:sp>
+        <p:nvSpPr>
+          <p:cNvPr id="10" name="TextBox 9"/>
           <p:cNvSpPr txBox="1"/>
           <p:nvPr/>
         </p:nvSpPr>
         <p:spPr>
           <a:xfrm>
-            <a:off x="8229600" y="777240"/>
-            <a:ext cx="3474720" cy="5303520"/>
+            <a:off x="8887968" y="1234440"/>
+            <a:ext cx="2651760" cy="4526280"/>
+          </a:xfrm>
+          <a:prstGeom prst="rect">
+            <a:avLst/>
+          </a:prstGeom>
+          <a:noFill/>
+        </p:spPr>
+        <p:txBody>
+          <a:bodyPr wrap="square">
+            <a:spAutoFit/>
+          </a:bodyPr>
+          <a:lstStyle/>
+          <a:p>
+            <a:pPr>
+              <a:defRPr sz="1500">
+                <a:solidFill>
+                  <a:srgbClr val="251F2D"/>
+                </a:solidFill>
+              </a:defRPr>
+            </a:pPr>
+            <a:r>
+              <a:t>- Tracks optimization behavior across epochs.</a:t>
+            </a:r>
+          </a:p>
+          <a:p>
+            <a:pPr>
+              <a:defRPr sz="1400">
+                <a:solidFill>
+                  <a:srgbClr val="251F2D"/>
+                </a:solidFill>
+              </a:defRPr>
+            </a:pPr>
+            <a:r>
+              <a:t>- Shows convergence trend and sensitivity.</a:t>
+            </a:r>
+          </a:p>
+          <a:p>
+            <a:pPr>
+              <a:defRPr sz="1400">
+                <a:solidFill>
+                  <a:srgbClr val="251F2D"/>
+                </a:solidFill>
+              </a:defRPr>
+            </a:pPr>
+            <a:r>
+              <a:t>- Used for training-dynamics discussion.</a:t>
+            </a:r>
+          </a:p>
+        </p:txBody>
+      </p:sp>
+      <p:sp>
+        <p:nvSpPr>
+          <p:cNvPr id="11" name="TextBox 10"/>
+          <p:cNvSpPr txBox="1"/>
+          <p:nvPr/>
+        </p:nvSpPr>
+        <p:spPr>
+          <a:xfrm>
+            <a:off x="658368" y="5623560"/>
+            <a:ext cx="7406640" cy="256032"/>
           </a:xfrm>
           <a:prstGeom prst="rect">
             <a:avLst/>
@@ -4417,26 +7897,14 @@
           <a:lstStyle/>
           <a:p>
             <a:pPr>
-              <a:defRPr sz="1500"/>
+              <a:defRPr sz="1000">
+                <a:solidFill>
+                  <a:srgbClr val="625D6C"/>
+                </a:solidFill>
+              </a:defRPr>
             </a:pPr>
             <a:r>
-              <a:t>Tracks optimization behavior across epochs.</a:t>
-            </a:r>
-          </a:p>
-          <a:p>
-            <a:pPr>
-              <a:defRPr sz="1500"/>
-            </a:pPr>
-            <a:r>
-              <a:t>Shows convergence trend and sensitivity.</a:t>
-            </a:r>
-          </a:p>
-          <a:p>
-            <a:pPr>
-              <a:defRPr sz="1500"/>
-            </a:pPr>
-            <a:r>
-              <a:t>Used for training-dynamics discussion.</a:t>
+              <a:t>All values and figures are generated from scripts/syngas_analysis.py</a:t>
             </a:r>
           </a:p>
         </p:txBody>
@@ -4461,14 +7929,143 @@
       <p:grpSpPr/>
       <p:sp>
         <p:nvSpPr>
-          <p:cNvPr id="2" name="TextBox 1"/>
+          <p:cNvPr id="2" name="Rectangle 1"/>
+          <p:cNvSpPr/>
+          <p:nvPr/>
+        </p:nvSpPr>
+        <p:spPr>
+          <a:xfrm>
+            <a:off x="0" y="0"/>
+            <a:ext cx="12188952" cy="6858000"/>
+          </a:xfrm>
+          <a:prstGeom prst="rect">
+            <a:avLst/>
+          </a:prstGeom>
+          <a:solidFill>
+            <a:srgbClr val="FCFBFF"/>
+          </a:solidFill>
+          <a:ln>
+            <a:noFill/>
+          </a:ln>
+        </p:spPr>
+        <p:style>
+          <a:lnRef idx="1">
+            <a:schemeClr val="accent1"/>
+          </a:lnRef>
+          <a:fillRef idx="3">
+            <a:schemeClr val="accent1"/>
+          </a:fillRef>
+          <a:effectRef idx="2">
+            <a:schemeClr val="accent1"/>
+          </a:effectRef>
+          <a:fontRef idx="minor">
+            <a:schemeClr val="lt1"/>
+          </a:fontRef>
+        </p:style>
+        <p:txBody>
+          <a:bodyPr rtlCol="0" anchor="ctr"/>
+          <a:lstStyle/>
+          <a:p>
+            <a:pPr algn="ctr"/>
+          </a:p>
+        </p:txBody>
+      </p:sp>
+      <p:sp>
+        <p:nvSpPr>
+          <p:cNvPr id="3" name="Rectangle 2"/>
+          <p:cNvSpPr/>
+          <p:nvPr/>
+        </p:nvSpPr>
+        <p:spPr>
+          <a:xfrm>
+            <a:off x="0" y="0"/>
+            <a:ext cx="12188952" cy="411480"/>
+          </a:xfrm>
+          <a:prstGeom prst="rect">
+            <a:avLst/>
+          </a:prstGeom>
+          <a:solidFill>
+            <a:srgbClr val="512888"/>
+          </a:solidFill>
+          <a:ln>
+            <a:noFill/>
+          </a:ln>
+        </p:spPr>
+        <p:style>
+          <a:lnRef idx="1">
+            <a:schemeClr val="accent1"/>
+          </a:lnRef>
+          <a:fillRef idx="3">
+            <a:schemeClr val="accent1"/>
+          </a:fillRef>
+          <a:effectRef idx="2">
+            <a:schemeClr val="accent1"/>
+          </a:effectRef>
+          <a:fontRef idx="minor">
+            <a:schemeClr val="lt1"/>
+          </a:fontRef>
+        </p:style>
+        <p:txBody>
+          <a:bodyPr rtlCol="0" anchor="ctr"/>
+          <a:lstStyle/>
+          <a:p>
+            <a:pPr algn="ctr"/>
+          </a:p>
+        </p:txBody>
+      </p:sp>
+      <p:sp>
+        <p:nvSpPr>
+          <p:cNvPr id="4" name="Rectangle 3"/>
+          <p:cNvSpPr/>
+          <p:nvPr/>
+        </p:nvSpPr>
+        <p:spPr>
+          <a:xfrm>
+            <a:off x="0" y="6583680"/>
+            <a:ext cx="12188952" cy="274320"/>
+          </a:xfrm>
+          <a:prstGeom prst="rect">
+            <a:avLst/>
+          </a:prstGeom>
+          <a:solidFill>
+            <a:srgbClr val="ECE6F5"/>
+          </a:solidFill>
+          <a:ln>
+            <a:noFill/>
+          </a:ln>
+        </p:spPr>
+        <p:style>
+          <a:lnRef idx="1">
+            <a:schemeClr val="accent1"/>
+          </a:lnRef>
+          <a:fillRef idx="3">
+            <a:schemeClr val="accent1"/>
+          </a:fillRef>
+          <a:effectRef idx="2">
+            <a:schemeClr val="accent1"/>
+          </a:effectRef>
+          <a:fontRef idx="minor">
+            <a:schemeClr val="lt1"/>
+          </a:fontRef>
+        </p:style>
+        <p:txBody>
+          <a:bodyPr rtlCol="0" anchor="ctr"/>
+          <a:lstStyle/>
+          <a:p>
+            <a:pPr algn="ctr"/>
+          </a:p>
+        </p:txBody>
+      </p:sp>
+      <p:sp>
+        <p:nvSpPr>
+          <p:cNvPr id="5" name="TextBox 4"/>
           <p:cNvSpPr txBox="1"/>
           <p:nvPr/>
         </p:nvSpPr>
         <p:spPr>
           <a:xfrm>
-            <a:off x="274320" y="91440"/>
-            <a:ext cx="11704320" cy="502920"/>
+            <a:off x="320040" y="6601968"/>
+            <a:ext cx="11521440" cy="201168"/>
           </a:xfrm>
           <a:prstGeom prst="rect">
             <a:avLst/>
@@ -4482,17 +8079,101 @@
           <a:lstStyle/>
           <a:p>
             <a:pPr>
-              <a:defRPr sz="2700" b="1"/>
+              <a:defRPr sz="1000">
+                <a:solidFill>
+                  <a:srgbClr val="544C66"/>
+                </a:solidFill>
+              </a:defRPr>
             </a:pPr>
             <a:r>
+              <a:t>Kansas State University | CIS 732/830 | Figure</a:t>
+            </a:r>
+          </a:p>
+        </p:txBody>
+      </p:sp>
+      <p:sp>
+        <p:nvSpPr>
+          <p:cNvPr id="6" name="TextBox 5"/>
+          <p:cNvSpPr txBox="1"/>
+          <p:nvPr/>
+        </p:nvSpPr>
+        <p:spPr>
+          <a:xfrm>
+            <a:off x="502920" y="475488"/>
+            <a:ext cx="11155680" cy="502920"/>
+          </a:xfrm>
+          <a:prstGeom prst="rect">
+            <a:avLst/>
+          </a:prstGeom>
+          <a:noFill/>
+        </p:spPr>
+        <p:txBody>
+          <a:bodyPr wrap="none">
+            <a:spAutoFit/>
+          </a:bodyPr>
+          <a:lstStyle/>
+          <a:p>
+            <a:pPr>
+              <a:defRPr sz="2800" b="1">
+                <a:solidFill>
+                  <a:srgbClr val="512888"/>
+                </a:solidFill>
+              </a:defRPr>
+            </a:pPr>
+            <a:r>
               <a:t>Figure 4: Train vs Test Performance</a:t>
             </a:r>
+          </a:p>
+        </p:txBody>
+      </p:sp>
+      <p:sp>
+        <p:nvSpPr>
+          <p:cNvPr id="7" name="Rounded Rectangle 6"/>
+          <p:cNvSpPr/>
+          <p:nvPr/>
+        </p:nvSpPr>
+        <p:spPr>
+          <a:xfrm>
+            <a:off x="411480" y="1051560"/>
+            <a:ext cx="8092440" cy="4892040"/>
+          </a:xfrm>
+          <a:prstGeom prst="roundRect">
+            <a:avLst/>
+          </a:prstGeom>
+          <a:solidFill>
+            <a:srgbClr val="FFFFFF"/>
+          </a:solidFill>
+          <a:ln>
+            <a:solidFill>
+              <a:srgbClr val="E8E2F0"/>
+            </a:solidFill>
+          </a:ln>
+        </p:spPr>
+        <p:style>
+          <a:lnRef idx="1">
+            <a:schemeClr val="accent1"/>
+          </a:lnRef>
+          <a:fillRef idx="3">
+            <a:schemeClr val="accent1"/>
+          </a:fillRef>
+          <a:effectRef idx="2">
+            <a:schemeClr val="accent1"/>
+          </a:effectRef>
+          <a:fontRef idx="minor">
+            <a:schemeClr val="lt1"/>
+          </a:fontRef>
+        </p:style>
+        <p:txBody>
+          <a:bodyPr rtlCol="0" anchor="ctr"/>
+          <a:lstStyle/>
+          <a:p>
+            <a:pPr algn="ctr"/>
           </a:p>
         </p:txBody>
       </p:sp>
       <p:pic>
         <p:nvPicPr>
-          <p:cNvPr id="3" name="Picture 2" descr="fig4_train_vs_test_performance.png"/>
+          <p:cNvPr id="8" name="Picture 7" descr="fig4_train_vs_test_performance.png"/>
           <p:cNvPicPr>
             <a:picLocks noChangeAspect="1"/>
           </p:cNvPicPr>
@@ -4506,8 +8187,8 @@
         </p:blipFill>
         <p:spPr>
           <a:xfrm>
-            <a:off x="274320" y="777240"/>
-            <a:ext cx="7863840" cy="5212080"/>
+            <a:off x="621792" y="1261872"/>
+            <a:ext cx="7680960" cy="4480560"/>
           </a:xfrm>
           <a:prstGeom prst="rect">
             <a:avLst/>
@@ -4516,14 +8197,118 @@
       </p:pic>
       <p:sp>
         <p:nvSpPr>
-          <p:cNvPr id="4" name="TextBox 3"/>
+          <p:cNvPr id="9" name="Rounded Rectangle 8"/>
+          <p:cNvSpPr/>
+          <p:nvPr/>
+        </p:nvSpPr>
+        <p:spPr>
+          <a:xfrm>
+            <a:off x="8641080" y="1051560"/>
+            <a:ext cx="3063240" cy="4892040"/>
+          </a:xfrm>
+          <a:prstGeom prst="roundRect">
+            <a:avLst/>
+          </a:prstGeom>
+          <a:solidFill>
+            <a:srgbClr val="F7F4FC"/>
+          </a:solidFill>
+          <a:ln>
+            <a:solidFill>
+              <a:srgbClr val="E8E2F0"/>
+            </a:solidFill>
+          </a:ln>
+        </p:spPr>
+        <p:style>
+          <a:lnRef idx="1">
+            <a:schemeClr val="accent1"/>
+          </a:lnRef>
+          <a:fillRef idx="3">
+            <a:schemeClr val="accent1"/>
+          </a:fillRef>
+          <a:effectRef idx="2">
+            <a:schemeClr val="accent1"/>
+          </a:effectRef>
+          <a:fontRef idx="minor">
+            <a:schemeClr val="lt1"/>
+          </a:fontRef>
+        </p:style>
+        <p:txBody>
+          <a:bodyPr rtlCol="0" anchor="ctr"/>
+          <a:lstStyle/>
+          <a:p>
+            <a:pPr algn="ctr"/>
+          </a:p>
+        </p:txBody>
+      </p:sp>
+      <p:sp>
+        <p:nvSpPr>
+          <p:cNvPr id="10" name="TextBox 9"/>
           <p:cNvSpPr txBox="1"/>
           <p:nvPr/>
         </p:nvSpPr>
         <p:spPr>
           <a:xfrm>
-            <a:off x="8229600" y="777240"/>
-            <a:ext cx="3474720" cy="5303520"/>
+            <a:off x="8887968" y="1234440"/>
+            <a:ext cx="2651760" cy="4526280"/>
+          </a:xfrm>
+          <a:prstGeom prst="rect">
+            <a:avLst/>
+          </a:prstGeom>
+          <a:noFill/>
+        </p:spPr>
+        <p:txBody>
+          <a:bodyPr wrap="square">
+            <a:spAutoFit/>
+          </a:bodyPr>
+          <a:lstStyle/>
+          <a:p>
+            <a:pPr>
+              <a:defRPr sz="1500">
+                <a:solidFill>
+                  <a:srgbClr val="251F2D"/>
+                </a:solidFill>
+              </a:defRPr>
+            </a:pPr>
+            <a:r>
+              <a:t>- Compares generalization across LR/RF/MLP.</a:t>
+            </a:r>
+          </a:p>
+          <a:p>
+            <a:pPr>
+              <a:defRPr sz="1400">
+                <a:solidFill>
+                  <a:srgbClr val="251F2D"/>
+                </a:solidFill>
+              </a:defRPr>
+            </a:pPr>
+            <a:r>
+              <a:t>- RF has strongest test metrics.</a:t>
+            </a:r>
+          </a:p>
+          <a:p>
+            <a:pPr>
+              <a:defRPr sz="1400">
+                <a:solidFill>
+                  <a:srgbClr val="251F2D"/>
+                </a:solidFill>
+              </a:defRPr>
+            </a:pPr>
+            <a:r>
+              <a:t>- Useful for overfit/underfit diagnosis.</a:t>
+            </a:r>
+          </a:p>
+        </p:txBody>
+      </p:sp>
+      <p:sp>
+        <p:nvSpPr>
+          <p:cNvPr id="11" name="TextBox 10"/>
+          <p:cNvSpPr txBox="1"/>
+          <p:nvPr/>
+        </p:nvSpPr>
+        <p:spPr>
+          <a:xfrm>
+            <a:off x="658368" y="5623560"/>
+            <a:ext cx="7406640" cy="256032"/>
           </a:xfrm>
           <a:prstGeom prst="rect">
             <a:avLst/>
@@ -4537,26 +8322,14 @@
           <a:lstStyle/>
           <a:p>
             <a:pPr>
-              <a:defRPr sz="1500"/>
+              <a:defRPr sz="1000">
+                <a:solidFill>
+                  <a:srgbClr val="625D6C"/>
+                </a:solidFill>
+              </a:defRPr>
             </a:pPr>
             <a:r>
-              <a:t>Compares generalization across LR/RF/MLP.</a:t>
-            </a:r>
-          </a:p>
-          <a:p>
-            <a:pPr>
-              <a:defRPr sz="1500"/>
-            </a:pPr>
-            <a:r>
-              <a:t>RF has strongest test metrics.</a:t>
-            </a:r>
-          </a:p>
-          <a:p>
-            <a:pPr>
-              <a:defRPr sz="1500"/>
-            </a:pPr>
-            <a:r>
-              <a:t>Useful for overfit/underfit diagnosis.</a:t>
+              <a:t>All values and figures are generated from scripts/syngas_analysis.py</a:t>
             </a:r>
           </a:p>
         </p:txBody>
@@ -4581,14 +8354,143 @@
       <p:grpSpPr/>
       <p:sp>
         <p:nvSpPr>
-          <p:cNvPr id="2" name="TextBox 1"/>
+          <p:cNvPr id="2" name="Rectangle 1"/>
+          <p:cNvSpPr/>
+          <p:nvPr/>
+        </p:nvSpPr>
+        <p:spPr>
+          <a:xfrm>
+            <a:off x="0" y="0"/>
+            <a:ext cx="12188952" cy="6858000"/>
+          </a:xfrm>
+          <a:prstGeom prst="rect">
+            <a:avLst/>
+          </a:prstGeom>
+          <a:solidFill>
+            <a:srgbClr val="FCFBFF"/>
+          </a:solidFill>
+          <a:ln>
+            <a:noFill/>
+          </a:ln>
+        </p:spPr>
+        <p:style>
+          <a:lnRef idx="1">
+            <a:schemeClr val="accent1"/>
+          </a:lnRef>
+          <a:fillRef idx="3">
+            <a:schemeClr val="accent1"/>
+          </a:fillRef>
+          <a:effectRef idx="2">
+            <a:schemeClr val="accent1"/>
+          </a:effectRef>
+          <a:fontRef idx="minor">
+            <a:schemeClr val="lt1"/>
+          </a:fontRef>
+        </p:style>
+        <p:txBody>
+          <a:bodyPr rtlCol="0" anchor="ctr"/>
+          <a:lstStyle/>
+          <a:p>
+            <a:pPr algn="ctr"/>
+          </a:p>
+        </p:txBody>
+      </p:sp>
+      <p:sp>
+        <p:nvSpPr>
+          <p:cNvPr id="3" name="Rectangle 2"/>
+          <p:cNvSpPr/>
+          <p:nvPr/>
+        </p:nvSpPr>
+        <p:spPr>
+          <a:xfrm>
+            <a:off x="0" y="0"/>
+            <a:ext cx="12188952" cy="411480"/>
+          </a:xfrm>
+          <a:prstGeom prst="rect">
+            <a:avLst/>
+          </a:prstGeom>
+          <a:solidFill>
+            <a:srgbClr val="512888"/>
+          </a:solidFill>
+          <a:ln>
+            <a:noFill/>
+          </a:ln>
+        </p:spPr>
+        <p:style>
+          <a:lnRef idx="1">
+            <a:schemeClr val="accent1"/>
+          </a:lnRef>
+          <a:fillRef idx="3">
+            <a:schemeClr val="accent1"/>
+          </a:fillRef>
+          <a:effectRef idx="2">
+            <a:schemeClr val="accent1"/>
+          </a:effectRef>
+          <a:fontRef idx="minor">
+            <a:schemeClr val="lt1"/>
+          </a:fontRef>
+        </p:style>
+        <p:txBody>
+          <a:bodyPr rtlCol="0" anchor="ctr"/>
+          <a:lstStyle/>
+          <a:p>
+            <a:pPr algn="ctr"/>
+          </a:p>
+        </p:txBody>
+      </p:sp>
+      <p:sp>
+        <p:nvSpPr>
+          <p:cNvPr id="4" name="Rectangle 3"/>
+          <p:cNvSpPr/>
+          <p:nvPr/>
+        </p:nvSpPr>
+        <p:spPr>
+          <a:xfrm>
+            <a:off x="0" y="6583680"/>
+            <a:ext cx="12188952" cy="274320"/>
+          </a:xfrm>
+          <a:prstGeom prst="rect">
+            <a:avLst/>
+          </a:prstGeom>
+          <a:solidFill>
+            <a:srgbClr val="ECE6F5"/>
+          </a:solidFill>
+          <a:ln>
+            <a:noFill/>
+          </a:ln>
+        </p:spPr>
+        <p:style>
+          <a:lnRef idx="1">
+            <a:schemeClr val="accent1"/>
+          </a:lnRef>
+          <a:fillRef idx="3">
+            <a:schemeClr val="accent1"/>
+          </a:fillRef>
+          <a:effectRef idx="2">
+            <a:schemeClr val="accent1"/>
+          </a:effectRef>
+          <a:fontRef idx="minor">
+            <a:schemeClr val="lt1"/>
+          </a:fontRef>
+        </p:style>
+        <p:txBody>
+          <a:bodyPr rtlCol="0" anchor="ctr"/>
+          <a:lstStyle/>
+          <a:p>
+            <a:pPr algn="ctr"/>
+          </a:p>
+        </p:txBody>
+      </p:sp>
+      <p:sp>
+        <p:nvSpPr>
+          <p:cNvPr id="5" name="TextBox 4"/>
           <p:cNvSpPr txBox="1"/>
           <p:nvPr/>
         </p:nvSpPr>
         <p:spPr>
           <a:xfrm>
-            <a:off x="274320" y="91440"/>
-            <a:ext cx="11704320" cy="502920"/>
+            <a:off x="320040" y="6601968"/>
+            <a:ext cx="11521440" cy="201168"/>
           </a:xfrm>
           <a:prstGeom prst="rect">
             <a:avLst/>
@@ -4602,17 +8504,101 @@
           <a:lstStyle/>
           <a:p>
             <a:pPr>
-              <a:defRPr sz="2700" b="1"/>
+              <a:defRPr sz="1000">
+                <a:solidFill>
+                  <a:srgbClr val="544C66"/>
+                </a:solidFill>
+              </a:defRPr>
             </a:pPr>
             <a:r>
+              <a:t>Kansas State University | CIS 732/830 | Figure</a:t>
+            </a:r>
+          </a:p>
+        </p:txBody>
+      </p:sp>
+      <p:sp>
+        <p:nvSpPr>
+          <p:cNvPr id="6" name="TextBox 5"/>
+          <p:cNvSpPr txBox="1"/>
+          <p:nvPr/>
+        </p:nvSpPr>
+        <p:spPr>
+          <a:xfrm>
+            <a:off x="502920" y="475488"/>
+            <a:ext cx="11155680" cy="502920"/>
+          </a:xfrm>
+          <a:prstGeom prst="rect">
+            <a:avLst/>
+          </a:prstGeom>
+          <a:noFill/>
+        </p:spPr>
+        <p:txBody>
+          <a:bodyPr wrap="none">
+            <a:spAutoFit/>
+          </a:bodyPr>
+          <a:lstStyle/>
+          <a:p>
+            <a:pPr>
+              <a:defRPr sz="2800" b="1">
+                <a:solidFill>
+                  <a:srgbClr val="512888"/>
+                </a:solidFill>
+              </a:defRPr>
+            </a:pPr>
+            <a:r>
               <a:t>Figure 5: LR Actual vs Predicted</a:t>
             </a:r>
+          </a:p>
+        </p:txBody>
+      </p:sp>
+      <p:sp>
+        <p:nvSpPr>
+          <p:cNvPr id="7" name="Rounded Rectangle 6"/>
+          <p:cNvSpPr/>
+          <p:nvPr/>
+        </p:nvSpPr>
+        <p:spPr>
+          <a:xfrm>
+            <a:off x="411480" y="1051560"/>
+            <a:ext cx="8092440" cy="4892040"/>
+          </a:xfrm>
+          <a:prstGeom prst="roundRect">
+            <a:avLst/>
+          </a:prstGeom>
+          <a:solidFill>
+            <a:srgbClr val="FFFFFF"/>
+          </a:solidFill>
+          <a:ln>
+            <a:solidFill>
+              <a:srgbClr val="E8E2F0"/>
+            </a:solidFill>
+          </a:ln>
+        </p:spPr>
+        <p:style>
+          <a:lnRef idx="1">
+            <a:schemeClr val="accent1"/>
+          </a:lnRef>
+          <a:fillRef idx="3">
+            <a:schemeClr val="accent1"/>
+          </a:fillRef>
+          <a:effectRef idx="2">
+            <a:schemeClr val="accent1"/>
+          </a:effectRef>
+          <a:fontRef idx="minor">
+            <a:schemeClr val="lt1"/>
+          </a:fontRef>
+        </p:style>
+        <p:txBody>
+          <a:bodyPr rtlCol="0" anchor="ctr"/>
+          <a:lstStyle/>
+          <a:p>
+            <a:pPr algn="ctr"/>
           </a:p>
         </p:txBody>
       </p:sp>
       <p:pic>
         <p:nvPicPr>
-          <p:cNvPr id="3" name="Picture 2" descr="fig5_scatter_LR_train_test.png"/>
+          <p:cNvPr id="8" name="Picture 7" descr="fig5_scatter_LR_train_test.png"/>
           <p:cNvPicPr>
             <a:picLocks noChangeAspect="1"/>
           </p:cNvPicPr>
@@ -4626,8 +8612,8 @@
         </p:blipFill>
         <p:spPr>
           <a:xfrm>
-            <a:off x="274320" y="777240"/>
-            <a:ext cx="7863840" cy="5212080"/>
+            <a:off x="621792" y="1261872"/>
+            <a:ext cx="7680960" cy="4480560"/>
           </a:xfrm>
           <a:prstGeom prst="rect">
             <a:avLst/>
@@ -4636,14 +8622,118 @@
       </p:pic>
       <p:sp>
         <p:nvSpPr>
-          <p:cNvPr id="4" name="TextBox 3"/>
+          <p:cNvPr id="9" name="Rounded Rectangle 8"/>
+          <p:cNvSpPr/>
+          <p:nvPr/>
+        </p:nvSpPr>
+        <p:spPr>
+          <a:xfrm>
+            <a:off x="8641080" y="1051560"/>
+            <a:ext cx="3063240" cy="4892040"/>
+          </a:xfrm>
+          <a:prstGeom prst="roundRect">
+            <a:avLst/>
+          </a:prstGeom>
+          <a:solidFill>
+            <a:srgbClr val="F7F4FC"/>
+          </a:solidFill>
+          <a:ln>
+            <a:solidFill>
+              <a:srgbClr val="E8E2F0"/>
+            </a:solidFill>
+          </a:ln>
+        </p:spPr>
+        <p:style>
+          <a:lnRef idx="1">
+            <a:schemeClr val="accent1"/>
+          </a:lnRef>
+          <a:fillRef idx="3">
+            <a:schemeClr val="accent1"/>
+          </a:fillRef>
+          <a:effectRef idx="2">
+            <a:schemeClr val="accent1"/>
+          </a:effectRef>
+          <a:fontRef idx="minor">
+            <a:schemeClr val="lt1"/>
+          </a:fontRef>
+        </p:style>
+        <p:txBody>
+          <a:bodyPr rtlCol="0" anchor="ctr"/>
+          <a:lstStyle/>
+          <a:p>
+            <a:pPr algn="ctr"/>
+          </a:p>
+        </p:txBody>
+      </p:sp>
+      <p:sp>
+        <p:nvSpPr>
+          <p:cNvPr id="10" name="TextBox 9"/>
           <p:cNvSpPr txBox="1"/>
           <p:nvPr/>
         </p:nvSpPr>
         <p:spPr>
           <a:xfrm>
-            <a:off x="8229600" y="777240"/>
-            <a:ext cx="3474720" cy="5303520"/>
+            <a:off x="8887968" y="1234440"/>
+            <a:ext cx="2651760" cy="4526280"/>
+          </a:xfrm>
+          <a:prstGeom prst="rect">
+            <a:avLst/>
+          </a:prstGeom>
+          <a:noFill/>
+        </p:spPr>
+        <p:txBody>
+          <a:bodyPr wrap="square">
+            <a:spAutoFit/>
+          </a:bodyPr>
+          <a:lstStyle/>
+          <a:p>
+            <a:pPr>
+              <a:defRPr sz="1500">
+                <a:solidFill>
+                  <a:srgbClr val="251F2D"/>
+                </a:solidFill>
+              </a:defRPr>
+            </a:pPr>
+            <a:r>
+              <a:t>- Baseline behavior on train/test splits.</a:t>
+            </a:r>
+          </a:p>
+          <a:p>
+            <a:pPr>
+              <a:defRPr sz="1400">
+                <a:solidFill>
+                  <a:srgbClr val="251F2D"/>
+                </a:solidFill>
+              </a:defRPr>
+            </a:pPr>
+            <a:r>
+              <a:t>- Larger deviation from diagonal than RF/MLP.</a:t>
+            </a:r>
+          </a:p>
+          <a:p>
+            <a:pPr>
+              <a:defRPr sz="1400">
+                <a:solidFill>
+                  <a:srgbClr val="251F2D"/>
+                </a:solidFill>
+              </a:defRPr>
+            </a:pPr>
+            <a:r>
+              <a:t>- Reference for significance tests.</a:t>
+            </a:r>
+          </a:p>
+        </p:txBody>
+      </p:sp>
+      <p:sp>
+        <p:nvSpPr>
+          <p:cNvPr id="11" name="TextBox 10"/>
+          <p:cNvSpPr txBox="1"/>
+          <p:nvPr/>
+        </p:nvSpPr>
+        <p:spPr>
+          <a:xfrm>
+            <a:off x="658368" y="5623560"/>
+            <a:ext cx="7406640" cy="256032"/>
           </a:xfrm>
           <a:prstGeom prst="rect">
             <a:avLst/>
@@ -4657,26 +8747,14 @@
           <a:lstStyle/>
           <a:p>
             <a:pPr>
-              <a:defRPr sz="1500"/>
+              <a:defRPr sz="1000">
+                <a:solidFill>
+                  <a:srgbClr val="625D6C"/>
+                </a:solidFill>
+              </a:defRPr>
             </a:pPr>
             <a:r>
-              <a:t>Baseline behavior on train/test splits.</a:t>
-            </a:r>
-          </a:p>
-          <a:p>
-            <a:pPr>
-              <a:defRPr sz="1500"/>
-            </a:pPr>
-            <a:r>
-              <a:t>Larger deviation from diagonal than RF/MLP.</a:t>
-            </a:r>
-          </a:p>
-          <a:p>
-            <a:pPr>
-              <a:defRPr sz="1500"/>
-            </a:pPr>
-            <a:r>
-              <a:t>Reference for significance tests.</a:t>
+              <a:t>All values and figures are generated from scripts/syngas_analysis.py</a:t>
             </a:r>
           </a:p>
         </p:txBody>
@@ -4701,14 +8779,143 @@
       <p:grpSpPr/>
       <p:sp>
         <p:nvSpPr>
-          <p:cNvPr id="2" name="TextBox 1"/>
+          <p:cNvPr id="2" name="Rectangle 1"/>
+          <p:cNvSpPr/>
+          <p:nvPr/>
+        </p:nvSpPr>
+        <p:spPr>
+          <a:xfrm>
+            <a:off x="0" y="0"/>
+            <a:ext cx="12188952" cy="6858000"/>
+          </a:xfrm>
+          <a:prstGeom prst="rect">
+            <a:avLst/>
+          </a:prstGeom>
+          <a:solidFill>
+            <a:srgbClr val="FCFBFF"/>
+          </a:solidFill>
+          <a:ln>
+            <a:noFill/>
+          </a:ln>
+        </p:spPr>
+        <p:style>
+          <a:lnRef idx="1">
+            <a:schemeClr val="accent1"/>
+          </a:lnRef>
+          <a:fillRef idx="3">
+            <a:schemeClr val="accent1"/>
+          </a:fillRef>
+          <a:effectRef idx="2">
+            <a:schemeClr val="accent1"/>
+          </a:effectRef>
+          <a:fontRef idx="minor">
+            <a:schemeClr val="lt1"/>
+          </a:fontRef>
+        </p:style>
+        <p:txBody>
+          <a:bodyPr rtlCol="0" anchor="ctr"/>
+          <a:lstStyle/>
+          <a:p>
+            <a:pPr algn="ctr"/>
+          </a:p>
+        </p:txBody>
+      </p:sp>
+      <p:sp>
+        <p:nvSpPr>
+          <p:cNvPr id="3" name="Rectangle 2"/>
+          <p:cNvSpPr/>
+          <p:nvPr/>
+        </p:nvSpPr>
+        <p:spPr>
+          <a:xfrm>
+            <a:off x="0" y="0"/>
+            <a:ext cx="12188952" cy="411480"/>
+          </a:xfrm>
+          <a:prstGeom prst="rect">
+            <a:avLst/>
+          </a:prstGeom>
+          <a:solidFill>
+            <a:srgbClr val="512888"/>
+          </a:solidFill>
+          <a:ln>
+            <a:noFill/>
+          </a:ln>
+        </p:spPr>
+        <p:style>
+          <a:lnRef idx="1">
+            <a:schemeClr val="accent1"/>
+          </a:lnRef>
+          <a:fillRef idx="3">
+            <a:schemeClr val="accent1"/>
+          </a:fillRef>
+          <a:effectRef idx="2">
+            <a:schemeClr val="accent1"/>
+          </a:effectRef>
+          <a:fontRef idx="minor">
+            <a:schemeClr val="lt1"/>
+          </a:fontRef>
+        </p:style>
+        <p:txBody>
+          <a:bodyPr rtlCol="0" anchor="ctr"/>
+          <a:lstStyle/>
+          <a:p>
+            <a:pPr algn="ctr"/>
+          </a:p>
+        </p:txBody>
+      </p:sp>
+      <p:sp>
+        <p:nvSpPr>
+          <p:cNvPr id="4" name="Rectangle 3"/>
+          <p:cNvSpPr/>
+          <p:nvPr/>
+        </p:nvSpPr>
+        <p:spPr>
+          <a:xfrm>
+            <a:off x="0" y="6583680"/>
+            <a:ext cx="12188952" cy="274320"/>
+          </a:xfrm>
+          <a:prstGeom prst="rect">
+            <a:avLst/>
+          </a:prstGeom>
+          <a:solidFill>
+            <a:srgbClr val="ECE6F5"/>
+          </a:solidFill>
+          <a:ln>
+            <a:noFill/>
+          </a:ln>
+        </p:spPr>
+        <p:style>
+          <a:lnRef idx="1">
+            <a:schemeClr val="accent1"/>
+          </a:lnRef>
+          <a:fillRef idx="3">
+            <a:schemeClr val="accent1"/>
+          </a:fillRef>
+          <a:effectRef idx="2">
+            <a:schemeClr val="accent1"/>
+          </a:effectRef>
+          <a:fontRef idx="minor">
+            <a:schemeClr val="lt1"/>
+          </a:fontRef>
+        </p:style>
+        <p:txBody>
+          <a:bodyPr rtlCol="0" anchor="ctr"/>
+          <a:lstStyle/>
+          <a:p>
+            <a:pPr algn="ctr"/>
+          </a:p>
+        </p:txBody>
+      </p:sp>
+      <p:sp>
+        <p:nvSpPr>
+          <p:cNvPr id="5" name="TextBox 4"/>
           <p:cNvSpPr txBox="1"/>
           <p:nvPr/>
         </p:nvSpPr>
         <p:spPr>
           <a:xfrm>
-            <a:off x="274320" y="91440"/>
-            <a:ext cx="11704320" cy="502920"/>
+            <a:off x="320040" y="6601968"/>
+            <a:ext cx="11521440" cy="201168"/>
           </a:xfrm>
           <a:prstGeom prst="rect">
             <a:avLst/>
@@ -4722,17 +8929,101 @@
           <a:lstStyle/>
           <a:p>
             <a:pPr>
-              <a:defRPr sz="2700" b="1"/>
+              <a:defRPr sz="1000">
+                <a:solidFill>
+                  <a:srgbClr val="544C66"/>
+                </a:solidFill>
+              </a:defRPr>
             </a:pPr>
             <a:r>
+              <a:t>Kansas State University | CIS 732/830 | Figure</a:t>
+            </a:r>
+          </a:p>
+        </p:txBody>
+      </p:sp>
+      <p:sp>
+        <p:nvSpPr>
+          <p:cNvPr id="6" name="TextBox 5"/>
+          <p:cNvSpPr txBox="1"/>
+          <p:nvPr/>
+        </p:nvSpPr>
+        <p:spPr>
+          <a:xfrm>
+            <a:off x="502920" y="475488"/>
+            <a:ext cx="11155680" cy="502920"/>
+          </a:xfrm>
+          <a:prstGeom prst="rect">
+            <a:avLst/>
+          </a:prstGeom>
+          <a:noFill/>
+        </p:spPr>
+        <p:txBody>
+          <a:bodyPr wrap="none">
+            <a:spAutoFit/>
+          </a:bodyPr>
+          <a:lstStyle/>
+          <a:p>
+            <a:pPr>
+              <a:defRPr sz="2800" b="1">
+                <a:solidFill>
+                  <a:srgbClr val="512888"/>
+                </a:solidFill>
+              </a:defRPr>
+            </a:pPr>
+            <a:r>
               <a:t>Figure 6: RF Actual vs Predicted</a:t>
             </a:r>
+          </a:p>
+        </p:txBody>
+      </p:sp>
+      <p:sp>
+        <p:nvSpPr>
+          <p:cNvPr id="7" name="Rounded Rectangle 6"/>
+          <p:cNvSpPr/>
+          <p:nvPr/>
+        </p:nvSpPr>
+        <p:spPr>
+          <a:xfrm>
+            <a:off x="411480" y="1051560"/>
+            <a:ext cx="8092440" cy="4892040"/>
+          </a:xfrm>
+          <a:prstGeom prst="roundRect">
+            <a:avLst/>
+          </a:prstGeom>
+          <a:solidFill>
+            <a:srgbClr val="FFFFFF"/>
+          </a:solidFill>
+          <a:ln>
+            <a:solidFill>
+              <a:srgbClr val="E8E2F0"/>
+            </a:solidFill>
+          </a:ln>
+        </p:spPr>
+        <p:style>
+          <a:lnRef idx="1">
+            <a:schemeClr val="accent1"/>
+          </a:lnRef>
+          <a:fillRef idx="3">
+            <a:schemeClr val="accent1"/>
+          </a:fillRef>
+          <a:effectRef idx="2">
+            <a:schemeClr val="accent1"/>
+          </a:effectRef>
+          <a:fontRef idx="minor">
+            <a:schemeClr val="lt1"/>
+          </a:fontRef>
+        </p:style>
+        <p:txBody>
+          <a:bodyPr rtlCol="0" anchor="ctr"/>
+          <a:lstStyle/>
+          <a:p>
+            <a:pPr algn="ctr"/>
           </a:p>
         </p:txBody>
       </p:sp>
       <p:pic>
         <p:nvPicPr>
-          <p:cNvPr id="3" name="Picture 2" descr="fig6_scatter_RF_train_test.png"/>
+          <p:cNvPr id="8" name="Picture 7" descr="fig6_scatter_RF_train_test.png"/>
           <p:cNvPicPr>
             <a:picLocks noChangeAspect="1"/>
           </p:cNvPicPr>
@@ -4746,8 +9037,8 @@
         </p:blipFill>
         <p:spPr>
           <a:xfrm>
-            <a:off x="274320" y="777240"/>
-            <a:ext cx="7863840" cy="5212080"/>
+            <a:off x="621792" y="1261872"/>
+            <a:ext cx="7680960" cy="4480560"/>
           </a:xfrm>
           <a:prstGeom prst="rect">
             <a:avLst/>
@@ -4756,14 +9047,118 @@
       </p:pic>
       <p:sp>
         <p:nvSpPr>
-          <p:cNvPr id="4" name="TextBox 3"/>
+          <p:cNvPr id="9" name="Rounded Rectangle 8"/>
+          <p:cNvSpPr/>
+          <p:nvPr/>
+        </p:nvSpPr>
+        <p:spPr>
+          <a:xfrm>
+            <a:off x="8641080" y="1051560"/>
+            <a:ext cx="3063240" cy="4892040"/>
+          </a:xfrm>
+          <a:prstGeom prst="roundRect">
+            <a:avLst/>
+          </a:prstGeom>
+          <a:solidFill>
+            <a:srgbClr val="F7F4FC"/>
+          </a:solidFill>
+          <a:ln>
+            <a:solidFill>
+              <a:srgbClr val="E8E2F0"/>
+            </a:solidFill>
+          </a:ln>
+        </p:spPr>
+        <p:style>
+          <a:lnRef idx="1">
+            <a:schemeClr val="accent1"/>
+          </a:lnRef>
+          <a:fillRef idx="3">
+            <a:schemeClr val="accent1"/>
+          </a:fillRef>
+          <a:effectRef idx="2">
+            <a:schemeClr val="accent1"/>
+          </a:effectRef>
+          <a:fontRef idx="minor">
+            <a:schemeClr val="lt1"/>
+          </a:fontRef>
+        </p:style>
+        <p:txBody>
+          <a:bodyPr rtlCol="0" anchor="ctr"/>
+          <a:lstStyle/>
+          <a:p>
+            <a:pPr algn="ctr"/>
+          </a:p>
+        </p:txBody>
+      </p:sp>
+      <p:sp>
+        <p:nvSpPr>
+          <p:cNvPr id="10" name="TextBox 9"/>
           <p:cNvSpPr txBox="1"/>
           <p:nvPr/>
         </p:nvSpPr>
         <p:spPr>
           <a:xfrm>
-            <a:off x="8229600" y="777240"/>
-            <a:ext cx="3474720" cy="5303520"/>
+            <a:off x="8887968" y="1234440"/>
+            <a:ext cx="2651760" cy="4526280"/>
+          </a:xfrm>
+          <a:prstGeom prst="rect">
+            <a:avLst/>
+          </a:prstGeom>
+          <a:noFill/>
+        </p:spPr>
+        <p:txBody>
+          <a:bodyPr wrap="square">
+            <a:spAutoFit/>
+          </a:bodyPr>
+          <a:lstStyle/>
+          <a:p>
+            <a:pPr>
+              <a:defRPr sz="1500">
+                <a:solidFill>
+                  <a:srgbClr val="251F2D"/>
+                </a:solidFill>
+              </a:defRPr>
+            </a:pPr>
+            <a:r>
+              <a:t>- Predictions cluster close to diagonal.</a:t>
+            </a:r>
+          </a:p>
+          <a:p>
+            <a:pPr>
+              <a:defRPr sz="1400">
+                <a:solidFill>
+                  <a:srgbClr val="251F2D"/>
+                </a:solidFill>
+              </a:defRPr>
+            </a:pPr>
+            <a:r>
+              <a:t>- Best test performance among compared models.</a:t>
+            </a:r>
+          </a:p>
+          <a:p>
+            <a:pPr>
+              <a:defRPr sz="1400">
+                <a:solidFill>
+                  <a:srgbClr val="251F2D"/>
+                </a:solidFill>
+              </a:defRPr>
+            </a:pPr>
+            <a:r>
+              <a:t>- Primary deployment candidate evidence.</a:t>
+            </a:r>
+          </a:p>
+        </p:txBody>
+      </p:sp>
+      <p:sp>
+        <p:nvSpPr>
+          <p:cNvPr id="11" name="TextBox 10"/>
+          <p:cNvSpPr txBox="1"/>
+          <p:nvPr/>
+        </p:nvSpPr>
+        <p:spPr>
+          <a:xfrm>
+            <a:off x="658368" y="5623560"/>
+            <a:ext cx="7406640" cy="256032"/>
           </a:xfrm>
           <a:prstGeom prst="rect">
             <a:avLst/>
@@ -4777,26 +9172,14 @@
           <a:lstStyle/>
           <a:p>
             <a:pPr>
-              <a:defRPr sz="1500"/>
+              <a:defRPr sz="1000">
+                <a:solidFill>
+                  <a:srgbClr val="625D6C"/>
+                </a:solidFill>
+              </a:defRPr>
             </a:pPr>
             <a:r>
-              <a:t>Predictions cluster close to diagonal.</a:t>
-            </a:r>
-          </a:p>
-          <a:p>
-            <a:pPr>
-              <a:defRPr sz="1500"/>
-            </a:pPr>
-            <a:r>
-              <a:t>Best test performance among compared models.</a:t>
-            </a:r>
-          </a:p>
-          <a:p>
-            <a:pPr>
-              <a:defRPr sz="1500"/>
-            </a:pPr>
-            <a:r>
-              <a:t>Primary deployment candidate evidence.</a:t>
+              <a:t>All values and figures are generated from scripts/syngas_analysis.py</a:t>
             </a:r>
           </a:p>
         </p:txBody>
@@ -4821,14 +9204,143 @@
       <p:grpSpPr/>
       <p:sp>
         <p:nvSpPr>
-          <p:cNvPr id="2" name="TextBox 1"/>
+          <p:cNvPr id="2" name="Rectangle 1"/>
+          <p:cNvSpPr/>
+          <p:nvPr/>
+        </p:nvSpPr>
+        <p:spPr>
+          <a:xfrm>
+            <a:off x="0" y="0"/>
+            <a:ext cx="12188952" cy="6858000"/>
+          </a:xfrm>
+          <a:prstGeom prst="rect">
+            <a:avLst/>
+          </a:prstGeom>
+          <a:solidFill>
+            <a:srgbClr val="FCFBFF"/>
+          </a:solidFill>
+          <a:ln>
+            <a:noFill/>
+          </a:ln>
+        </p:spPr>
+        <p:style>
+          <a:lnRef idx="1">
+            <a:schemeClr val="accent1"/>
+          </a:lnRef>
+          <a:fillRef idx="3">
+            <a:schemeClr val="accent1"/>
+          </a:fillRef>
+          <a:effectRef idx="2">
+            <a:schemeClr val="accent1"/>
+          </a:effectRef>
+          <a:fontRef idx="minor">
+            <a:schemeClr val="lt1"/>
+          </a:fontRef>
+        </p:style>
+        <p:txBody>
+          <a:bodyPr rtlCol="0" anchor="ctr"/>
+          <a:lstStyle/>
+          <a:p>
+            <a:pPr algn="ctr"/>
+          </a:p>
+        </p:txBody>
+      </p:sp>
+      <p:sp>
+        <p:nvSpPr>
+          <p:cNvPr id="3" name="Rectangle 2"/>
+          <p:cNvSpPr/>
+          <p:nvPr/>
+        </p:nvSpPr>
+        <p:spPr>
+          <a:xfrm>
+            <a:off x="0" y="0"/>
+            <a:ext cx="12188952" cy="411480"/>
+          </a:xfrm>
+          <a:prstGeom prst="rect">
+            <a:avLst/>
+          </a:prstGeom>
+          <a:solidFill>
+            <a:srgbClr val="512888"/>
+          </a:solidFill>
+          <a:ln>
+            <a:noFill/>
+          </a:ln>
+        </p:spPr>
+        <p:style>
+          <a:lnRef idx="1">
+            <a:schemeClr val="accent1"/>
+          </a:lnRef>
+          <a:fillRef idx="3">
+            <a:schemeClr val="accent1"/>
+          </a:fillRef>
+          <a:effectRef idx="2">
+            <a:schemeClr val="accent1"/>
+          </a:effectRef>
+          <a:fontRef idx="minor">
+            <a:schemeClr val="lt1"/>
+          </a:fontRef>
+        </p:style>
+        <p:txBody>
+          <a:bodyPr rtlCol="0" anchor="ctr"/>
+          <a:lstStyle/>
+          <a:p>
+            <a:pPr algn="ctr"/>
+          </a:p>
+        </p:txBody>
+      </p:sp>
+      <p:sp>
+        <p:nvSpPr>
+          <p:cNvPr id="4" name="Rectangle 3"/>
+          <p:cNvSpPr/>
+          <p:nvPr/>
+        </p:nvSpPr>
+        <p:spPr>
+          <a:xfrm>
+            <a:off x="0" y="6583680"/>
+            <a:ext cx="12188952" cy="274320"/>
+          </a:xfrm>
+          <a:prstGeom prst="rect">
+            <a:avLst/>
+          </a:prstGeom>
+          <a:solidFill>
+            <a:srgbClr val="ECE6F5"/>
+          </a:solidFill>
+          <a:ln>
+            <a:noFill/>
+          </a:ln>
+        </p:spPr>
+        <p:style>
+          <a:lnRef idx="1">
+            <a:schemeClr val="accent1"/>
+          </a:lnRef>
+          <a:fillRef idx="3">
+            <a:schemeClr val="accent1"/>
+          </a:fillRef>
+          <a:effectRef idx="2">
+            <a:schemeClr val="accent1"/>
+          </a:effectRef>
+          <a:fontRef idx="minor">
+            <a:schemeClr val="lt1"/>
+          </a:fontRef>
+        </p:style>
+        <p:txBody>
+          <a:bodyPr rtlCol="0" anchor="ctr"/>
+          <a:lstStyle/>
+          <a:p>
+            <a:pPr algn="ctr"/>
+          </a:p>
+        </p:txBody>
+      </p:sp>
+      <p:sp>
+        <p:nvSpPr>
+          <p:cNvPr id="5" name="TextBox 4"/>
           <p:cNvSpPr txBox="1"/>
           <p:nvPr/>
         </p:nvSpPr>
         <p:spPr>
           <a:xfrm>
-            <a:off x="274320" y="91440"/>
-            <a:ext cx="11704320" cy="502920"/>
+            <a:off x="320040" y="6601968"/>
+            <a:ext cx="11521440" cy="201168"/>
           </a:xfrm>
           <a:prstGeom prst="rect">
             <a:avLst/>
@@ -4842,17 +9354,101 @@
           <a:lstStyle/>
           <a:p>
             <a:pPr>
-              <a:defRPr sz="2700" b="1"/>
+              <a:defRPr sz="1000">
+                <a:solidFill>
+                  <a:srgbClr val="544C66"/>
+                </a:solidFill>
+              </a:defRPr>
             </a:pPr>
             <a:r>
+              <a:t>Kansas State University | CIS 732/830 | Figure</a:t>
+            </a:r>
+          </a:p>
+        </p:txBody>
+      </p:sp>
+      <p:sp>
+        <p:nvSpPr>
+          <p:cNvPr id="6" name="TextBox 5"/>
+          <p:cNvSpPr txBox="1"/>
+          <p:nvPr/>
+        </p:nvSpPr>
+        <p:spPr>
+          <a:xfrm>
+            <a:off x="502920" y="475488"/>
+            <a:ext cx="11155680" cy="502920"/>
+          </a:xfrm>
+          <a:prstGeom prst="rect">
+            <a:avLst/>
+          </a:prstGeom>
+          <a:noFill/>
+        </p:spPr>
+        <p:txBody>
+          <a:bodyPr wrap="none">
+            <a:spAutoFit/>
+          </a:bodyPr>
+          <a:lstStyle/>
+          <a:p>
+            <a:pPr>
+              <a:defRPr sz="2800" b="1">
+                <a:solidFill>
+                  <a:srgbClr val="512888"/>
+                </a:solidFill>
+              </a:defRPr>
+            </a:pPr>
+            <a:r>
               <a:t>Figure 7: MLP Actual vs Predicted</a:t>
             </a:r>
+          </a:p>
+        </p:txBody>
+      </p:sp>
+      <p:sp>
+        <p:nvSpPr>
+          <p:cNvPr id="7" name="Rounded Rectangle 6"/>
+          <p:cNvSpPr/>
+          <p:nvPr/>
+        </p:nvSpPr>
+        <p:spPr>
+          <a:xfrm>
+            <a:off x="411480" y="1051560"/>
+            <a:ext cx="8092440" cy="4892040"/>
+          </a:xfrm>
+          <a:prstGeom prst="roundRect">
+            <a:avLst/>
+          </a:prstGeom>
+          <a:solidFill>
+            <a:srgbClr val="FFFFFF"/>
+          </a:solidFill>
+          <a:ln>
+            <a:solidFill>
+              <a:srgbClr val="E8E2F0"/>
+            </a:solidFill>
+          </a:ln>
+        </p:spPr>
+        <p:style>
+          <a:lnRef idx="1">
+            <a:schemeClr val="accent1"/>
+          </a:lnRef>
+          <a:fillRef idx="3">
+            <a:schemeClr val="accent1"/>
+          </a:fillRef>
+          <a:effectRef idx="2">
+            <a:schemeClr val="accent1"/>
+          </a:effectRef>
+          <a:fontRef idx="minor">
+            <a:schemeClr val="lt1"/>
+          </a:fontRef>
+        </p:style>
+        <p:txBody>
+          <a:bodyPr rtlCol="0" anchor="ctr"/>
+          <a:lstStyle/>
+          <a:p>
+            <a:pPr algn="ctr"/>
           </a:p>
         </p:txBody>
       </p:sp>
       <p:pic>
         <p:nvPicPr>
-          <p:cNvPr id="3" name="Picture 2" descr="fig7_scatter_MLP_train_test.png"/>
+          <p:cNvPr id="8" name="Picture 7" descr="fig7_scatter_MLP_train_test.png"/>
           <p:cNvPicPr>
             <a:picLocks noChangeAspect="1"/>
           </p:cNvPicPr>
@@ -4866,8 +9462,8 @@
         </p:blipFill>
         <p:spPr>
           <a:xfrm>
-            <a:off x="274320" y="777240"/>
-            <a:ext cx="7863840" cy="5212080"/>
+            <a:off x="621792" y="1261872"/>
+            <a:ext cx="7680960" cy="4480560"/>
           </a:xfrm>
           <a:prstGeom prst="rect">
             <a:avLst/>
@@ -4876,14 +9472,118 @@
       </p:pic>
       <p:sp>
         <p:nvSpPr>
-          <p:cNvPr id="4" name="TextBox 3"/>
+          <p:cNvPr id="9" name="Rounded Rectangle 8"/>
+          <p:cNvSpPr/>
+          <p:nvPr/>
+        </p:nvSpPr>
+        <p:spPr>
+          <a:xfrm>
+            <a:off x="8641080" y="1051560"/>
+            <a:ext cx="3063240" cy="4892040"/>
+          </a:xfrm>
+          <a:prstGeom prst="roundRect">
+            <a:avLst/>
+          </a:prstGeom>
+          <a:solidFill>
+            <a:srgbClr val="F7F4FC"/>
+          </a:solidFill>
+          <a:ln>
+            <a:solidFill>
+              <a:srgbClr val="E8E2F0"/>
+            </a:solidFill>
+          </a:ln>
+        </p:spPr>
+        <p:style>
+          <a:lnRef idx="1">
+            <a:schemeClr val="accent1"/>
+          </a:lnRef>
+          <a:fillRef idx="3">
+            <a:schemeClr val="accent1"/>
+          </a:fillRef>
+          <a:effectRef idx="2">
+            <a:schemeClr val="accent1"/>
+          </a:effectRef>
+          <a:fontRef idx="minor">
+            <a:schemeClr val="lt1"/>
+          </a:fontRef>
+        </p:style>
+        <p:txBody>
+          <a:bodyPr rtlCol="0" anchor="ctr"/>
+          <a:lstStyle/>
+          <a:p>
+            <a:pPr algn="ctr"/>
+          </a:p>
+        </p:txBody>
+      </p:sp>
+      <p:sp>
+        <p:nvSpPr>
+          <p:cNvPr id="10" name="TextBox 9"/>
           <p:cNvSpPr txBox="1"/>
           <p:nvPr/>
         </p:nvSpPr>
         <p:spPr>
           <a:xfrm>
-            <a:off x="8229600" y="777240"/>
-            <a:ext cx="3474720" cy="5303520"/>
+            <a:off x="8887968" y="1234440"/>
+            <a:ext cx="2651760" cy="4526280"/>
+          </a:xfrm>
+          <a:prstGeom prst="rect">
+            <a:avLst/>
+          </a:prstGeom>
+          <a:noFill/>
+        </p:spPr>
+        <p:txBody>
+          <a:bodyPr wrap="square">
+            <a:spAutoFit/>
+          </a:bodyPr>
+          <a:lstStyle/>
+          <a:p>
+            <a:pPr>
+              <a:defRPr sz="1500">
+                <a:solidFill>
+                  <a:srgbClr val="251F2D"/>
+                </a:solidFill>
+              </a:defRPr>
+            </a:pPr>
+            <a:r>
+              <a:t>- Nonlinear fit is competitive with RF.</a:t>
+            </a:r>
+          </a:p>
+          <a:p>
+            <a:pPr>
+              <a:defRPr sz="1400">
+                <a:solidFill>
+                  <a:srgbClr val="251F2D"/>
+                </a:solidFill>
+              </a:defRPr>
+            </a:pPr>
+            <a:r>
+              <a:t>- Sensitivity appears higher than RF.</a:t>
+            </a:r>
+          </a:p>
+          <a:p>
+            <a:pPr>
+              <a:defRPr sz="1400">
+                <a:solidFill>
+                  <a:srgbClr val="251F2D"/>
+                </a:solidFill>
+              </a:defRPr>
+            </a:pPr>
+            <a:r>
+              <a:t>- Interpreted with scaling ablation results.</a:t>
+            </a:r>
+          </a:p>
+        </p:txBody>
+      </p:sp>
+      <p:sp>
+        <p:nvSpPr>
+          <p:cNvPr id="11" name="TextBox 10"/>
+          <p:cNvSpPr txBox="1"/>
+          <p:nvPr/>
+        </p:nvSpPr>
+        <p:spPr>
+          <a:xfrm>
+            <a:off x="658368" y="5623560"/>
+            <a:ext cx="7406640" cy="256032"/>
           </a:xfrm>
           <a:prstGeom prst="rect">
             <a:avLst/>
@@ -4897,26 +9597,14 @@
           <a:lstStyle/>
           <a:p>
             <a:pPr>
-              <a:defRPr sz="1500"/>
+              <a:defRPr sz="1000">
+                <a:solidFill>
+                  <a:srgbClr val="625D6C"/>
+                </a:solidFill>
+              </a:defRPr>
             </a:pPr>
             <a:r>
-              <a:t>Nonlinear fit is competitive with RF.</a:t>
-            </a:r>
-          </a:p>
-          <a:p>
-            <a:pPr>
-              <a:defRPr sz="1500"/>
-            </a:pPr>
-            <a:r>
-              <a:t>Sensitivity appears higher than RF.</a:t>
-            </a:r>
-          </a:p>
-          <a:p>
-            <a:pPr>
-              <a:defRPr sz="1500"/>
-            </a:pPr>
-            <a:r>
-              <a:t>Interpreted with scaling ablation results.</a:t>
+              <a:t>All values and figures are generated from scripts/syngas_analysis.py</a:t>
             </a:r>
           </a:p>
         </p:txBody>

--- a/slides/term_project_presentation_SYNGAS--group 6 Ying.pptx
+++ b/slides/term_project_presentation_SYNGAS--group 6 Ying.pptx
@@ -3112,7 +3112,7 @@
         <p:spPr>
           <a:xfrm>
             <a:off x="0" y="0"/>
-            <a:ext cx="12188952" cy="6858000"/>
+            <a:ext cx="9144000" cy="6858000"/>
           </a:xfrm>
           <a:prstGeom prst="rect">
             <a:avLst/>
@@ -3155,7 +3155,7 @@
         <p:spPr>
           <a:xfrm>
             <a:off x="0" y="0"/>
-            <a:ext cx="12188952" cy="411480"/>
+            <a:ext cx="9144000" cy="411480"/>
           </a:xfrm>
           <a:prstGeom prst="rect">
             <a:avLst/>
@@ -3198,7 +3198,7 @@
         <p:spPr>
           <a:xfrm>
             <a:off x="0" y="6583680"/>
-            <a:ext cx="12188952" cy="274320"/>
+            <a:ext cx="9144000" cy="274320"/>
           </a:xfrm>
           <a:prstGeom prst="rect">
             <a:avLst/>
@@ -3240,8 +3240,8 @@
         </p:nvSpPr>
         <p:spPr>
           <a:xfrm>
-            <a:off x="320040" y="6601968"/>
-            <a:ext cx="11521440" cy="201168"/>
+            <a:off x="256032" y="6601968"/>
+            <a:ext cx="8595360" cy="201168"/>
           </a:xfrm>
           <a:prstGeom prst="rect">
             <a:avLst/>
@@ -3275,8 +3275,8 @@
         </p:nvSpPr>
         <p:spPr>
           <a:xfrm>
-            <a:off x="548640" y="1143000"/>
-            <a:ext cx="11064240" cy="4480560"/>
+            <a:off x="457200" y="1143000"/>
+            <a:ext cx="8229600" cy="4480560"/>
           </a:xfrm>
           <a:prstGeom prst="rect">
             <a:avLst/>
@@ -3318,8 +3318,8 @@
         </p:nvSpPr>
         <p:spPr>
           <a:xfrm>
-            <a:off x="914400" y="1554480"/>
-            <a:ext cx="10332720" cy="1920240"/>
+            <a:off x="731520" y="1554480"/>
+            <a:ext cx="7680960" cy="1920240"/>
           </a:xfrm>
           <a:prstGeom prst="rect">
             <a:avLst/>
@@ -3333,7 +3333,7 @@
           <a:lstStyle/>
           <a:p>
             <a:pPr algn="ctr">
-              <a:defRPr sz="4000" b="1">
+              <a:defRPr sz="3200" b="1">
                 <a:solidFill>
                   <a:srgbClr val="FFFFFF"/>
                 </a:solidFill>
@@ -3345,23 +3345,23 @@
             <a:br/>
             <a:r>
               <a:t>in Syngas Fermentation</a:t>
-            </a:r>
-          </a:p>
-          <a:p>
-            <a:pPr algn="ctr">
-              <a:defRPr sz="2200">
-                <a:solidFill>
-                  <a:srgbClr val="E8E2F0"/>
-                </a:solidFill>
-              </a:defRPr>
-            </a:pPr>
-            <a:r>
-              <a:t>CIS 732/830 Final Project</a:t>
             </a:r>
           </a:p>
           <a:p>
             <a:pPr algn="ctr">
               <a:defRPr sz="1800">
+                <a:solidFill>
+                  <a:srgbClr val="E8E2F0"/>
+                </a:solidFill>
+              </a:defRPr>
+            </a:pPr>
+            <a:r>
+              <a:t>CIS 732/830 Final Project</a:t>
+            </a:r>
+          </a:p>
+          <a:p>
+            <a:pPr algn="ctr">
+              <a:defRPr sz="1400">
                 <a:solidFill>
                   <a:srgbClr val="E8E2F0"/>
                 </a:solidFill>
@@ -3400,7 +3400,7 @@
         <p:spPr>
           <a:xfrm>
             <a:off x="0" y="0"/>
-            <a:ext cx="12188952" cy="6858000"/>
+            <a:ext cx="9144000" cy="6858000"/>
           </a:xfrm>
           <a:prstGeom prst="rect">
             <a:avLst/>
@@ -3443,7 +3443,7 @@
         <p:spPr>
           <a:xfrm>
             <a:off x="0" y="0"/>
-            <a:ext cx="12188952" cy="411480"/>
+            <a:ext cx="9144000" cy="411480"/>
           </a:xfrm>
           <a:prstGeom prst="rect">
             <a:avLst/>
@@ -3486,7 +3486,7 @@
         <p:spPr>
           <a:xfrm>
             <a:off x="0" y="6583680"/>
-            <a:ext cx="12188952" cy="274320"/>
+            <a:ext cx="9144000" cy="274320"/>
           </a:xfrm>
           <a:prstGeom prst="rect">
             <a:avLst/>
@@ -3528,8 +3528,8 @@
         </p:nvSpPr>
         <p:spPr>
           <a:xfrm>
-            <a:off x="320040" y="6601968"/>
-            <a:ext cx="11521440" cy="201168"/>
+            <a:off x="256032" y="6601968"/>
+            <a:ext cx="8595360" cy="201168"/>
           </a:xfrm>
           <a:prstGeom prst="rect">
             <a:avLst/>
@@ -3563,8 +3563,8 @@
         </p:nvSpPr>
         <p:spPr>
           <a:xfrm>
-            <a:off x="502920" y="475488"/>
-            <a:ext cx="11155680" cy="502920"/>
+            <a:off x="365760" y="475488"/>
+            <a:ext cx="8412480" cy="502920"/>
           </a:xfrm>
           <a:prstGeom prst="rect">
             <a:avLst/>
@@ -3578,7 +3578,7 @@
           <a:lstStyle/>
           <a:p>
             <a:pPr>
-              <a:defRPr sz="2800" b="1">
+              <a:defRPr sz="2400" b="1">
                 <a:solidFill>
                   <a:srgbClr val="512888"/>
                 </a:solidFill>
@@ -3598,8 +3598,8 @@
         </p:nvSpPr>
         <p:spPr>
           <a:xfrm>
-            <a:off x="411480" y="1051560"/>
-            <a:ext cx="8092440" cy="4892040"/>
+            <a:off x="320040" y="1051560"/>
+            <a:ext cx="5989320" cy="4892040"/>
           </a:xfrm>
           <a:prstGeom prst="roundRect">
             <a:avLst/>
@@ -3651,8 +3651,8 @@
         </p:blipFill>
         <p:spPr>
           <a:xfrm>
-            <a:off x="621792" y="1261872"/>
-            <a:ext cx="7680960" cy="4480560"/>
+            <a:off x="475488" y="1261872"/>
+            <a:ext cx="5669280" cy="4480560"/>
           </a:xfrm>
           <a:prstGeom prst="rect">
             <a:avLst/>
@@ -3667,8 +3667,8 @@
         </p:nvSpPr>
         <p:spPr>
           <a:xfrm>
-            <a:off x="8641080" y="1051560"/>
-            <a:ext cx="3063240" cy="4892040"/>
+            <a:off x="6446520" y="1051560"/>
+            <a:ext cx="2377440" cy="4892040"/>
           </a:xfrm>
           <a:prstGeom prst="roundRect">
             <a:avLst/>
@@ -3712,8 +3712,8 @@
         </p:nvSpPr>
         <p:spPr>
           <a:xfrm>
-            <a:off x="8887968" y="1234440"/>
-            <a:ext cx="2651760" cy="4526280"/>
+            <a:off x="6601968" y="1234440"/>
+            <a:ext cx="2084831" cy="4526280"/>
           </a:xfrm>
           <a:prstGeom prst="rect">
             <a:avLst/>
@@ -3727,7 +3727,7 @@
           <a:lstStyle/>
           <a:p>
             <a:pPr>
-              <a:defRPr sz="1500">
+              <a:defRPr sz="1300">
                 <a:solidFill>
                   <a:srgbClr val="251F2D"/>
                 </a:solidFill>
@@ -3739,7 +3739,7 @@
           </a:p>
           <a:p>
             <a:pPr>
-              <a:defRPr sz="1400">
+              <a:defRPr sz="1200">
                 <a:solidFill>
                   <a:srgbClr val="251F2D"/>
                 </a:solidFill>
@@ -3751,7 +3751,7 @@
           </a:p>
           <a:p>
             <a:pPr>
-              <a:defRPr sz="1400">
+              <a:defRPr sz="1200">
                 <a:solidFill>
                   <a:srgbClr val="251F2D"/>
                 </a:solidFill>
@@ -3771,8 +3771,8 @@
         </p:nvSpPr>
         <p:spPr>
           <a:xfrm>
-            <a:off x="658368" y="5623560"/>
-            <a:ext cx="7406640" cy="256032"/>
+            <a:off x="411480" y="5623560"/>
+            <a:ext cx="5852160" cy="256032"/>
           </a:xfrm>
           <a:prstGeom prst="rect">
             <a:avLst/>
@@ -3825,7 +3825,7 @@
         <p:spPr>
           <a:xfrm>
             <a:off x="0" y="0"/>
-            <a:ext cx="12188952" cy="6858000"/>
+            <a:ext cx="9144000" cy="6858000"/>
           </a:xfrm>
           <a:prstGeom prst="rect">
             <a:avLst/>
@@ -3868,7 +3868,7 @@
         <p:spPr>
           <a:xfrm>
             <a:off x="0" y="0"/>
-            <a:ext cx="12188952" cy="411480"/>
+            <a:ext cx="9144000" cy="411480"/>
           </a:xfrm>
           <a:prstGeom prst="rect">
             <a:avLst/>
@@ -3911,7 +3911,7 @@
         <p:spPr>
           <a:xfrm>
             <a:off x="0" y="6583680"/>
-            <a:ext cx="12188952" cy="274320"/>
+            <a:ext cx="9144000" cy="274320"/>
           </a:xfrm>
           <a:prstGeom prst="rect">
             <a:avLst/>
@@ -3953,8 +3953,8 @@
         </p:nvSpPr>
         <p:spPr>
           <a:xfrm>
-            <a:off x="320040" y="6601968"/>
-            <a:ext cx="11521440" cy="201168"/>
+            <a:off x="256032" y="6601968"/>
+            <a:ext cx="8595360" cy="201168"/>
           </a:xfrm>
           <a:prstGeom prst="rect">
             <a:avLst/>
@@ -3988,8 +3988,8 @@
         </p:nvSpPr>
         <p:spPr>
           <a:xfrm>
-            <a:off x="502920" y="475488"/>
-            <a:ext cx="11155680" cy="502920"/>
+            <a:off x="365760" y="475488"/>
+            <a:ext cx="8412480" cy="502920"/>
           </a:xfrm>
           <a:prstGeom prst="rect">
             <a:avLst/>
@@ -4003,7 +4003,7 @@
           <a:lstStyle/>
           <a:p>
             <a:pPr>
-              <a:defRPr sz="2800" b="1">
+              <a:defRPr sz="2400" b="1">
                 <a:solidFill>
                   <a:srgbClr val="512888"/>
                 </a:solidFill>
@@ -4023,8 +4023,8 @@
         </p:nvSpPr>
         <p:spPr>
           <a:xfrm>
-            <a:off x="411480" y="1051560"/>
-            <a:ext cx="8092440" cy="4892040"/>
+            <a:off x="320040" y="1051560"/>
+            <a:ext cx="5989320" cy="4892040"/>
           </a:xfrm>
           <a:prstGeom prst="roundRect">
             <a:avLst/>
@@ -4076,8 +4076,8 @@
         </p:blipFill>
         <p:spPr>
           <a:xfrm>
-            <a:off x="621792" y="1261872"/>
-            <a:ext cx="7680960" cy="4480560"/>
+            <a:off x="475488" y="1261872"/>
+            <a:ext cx="5669280" cy="4480560"/>
           </a:xfrm>
           <a:prstGeom prst="rect">
             <a:avLst/>
@@ -4092,8 +4092,8 @@
         </p:nvSpPr>
         <p:spPr>
           <a:xfrm>
-            <a:off x="8641080" y="1051560"/>
-            <a:ext cx="3063240" cy="4892040"/>
+            <a:off x="6446520" y="1051560"/>
+            <a:ext cx="2377440" cy="4892040"/>
           </a:xfrm>
           <a:prstGeom prst="roundRect">
             <a:avLst/>
@@ -4137,8 +4137,8 @@
         </p:nvSpPr>
         <p:spPr>
           <a:xfrm>
-            <a:off x="8887968" y="1234440"/>
-            <a:ext cx="2651760" cy="4526280"/>
+            <a:off x="6601968" y="1234440"/>
+            <a:ext cx="2084831" cy="4526280"/>
           </a:xfrm>
           <a:prstGeom prst="rect">
             <a:avLst/>
@@ -4152,7 +4152,7 @@
           <a:lstStyle/>
           <a:p>
             <a:pPr>
-              <a:defRPr sz="1500">
+              <a:defRPr sz="1300">
                 <a:solidFill>
                   <a:srgbClr val="251F2D"/>
                 </a:solidFill>
@@ -4164,7 +4164,7 @@
           </a:p>
           <a:p>
             <a:pPr>
-              <a:defRPr sz="1400">
+              <a:defRPr sz="1200">
                 <a:solidFill>
                   <a:srgbClr val="251F2D"/>
                 </a:solidFill>
@@ -4176,7 +4176,7 @@
           </a:p>
           <a:p>
             <a:pPr>
-              <a:defRPr sz="1400">
+              <a:defRPr sz="1200">
                 <a:solidFill>
                   <a:srgbClr val="251F2D"/>
                 </a:solidFill>
@@ -4196,8 +4196,8 @@
         </p:nvSpPr>
         <p:spPr>
           <a:xfrm>
-            <a:off x="658368" y="5623560"/>
-            <a:ext cx="7406640" cy="256032"/>
+            <a:off x="411480" y="5623560"/>
+            <a:ext cx="5852160" cy="256032"/>
           </a:xfrm>
           <a:prstGeom prst="rect">
             <a:avLst/>
@@ -4250,7 +4250,7 @@
         <p:spPr>
           <a:xfrm>
             <a:off x="0" y="0"/>
-            <a:ext cx="12188952" cy="6858000"/>
+            <a:ext cx="9144000" cy="6858000"/>
           </a:xfrm>
           <a:prstGeom prst="rect">
             <a:avLst/>
@@ -4293,7 +4293,7 @@
         <p:spPr>
           <a:xfrm>
             <a:off x="0" y="0"/>
-            <a:ext cx="12188952" cy="411480"/>
+            <a:ext cx="9144000" cy="411480"/>
           </a:xfrm>
           <a:prstGeom prst="rect">
             <a:avLst/>
@@ -4336,7 +4336,7 @@
         <p:spPr>
           <a:xfrm>
             <a:off x="0" y="6583680"/>
-            <a:ext cx="12188952" cy="274320"/>
+            <a:ext cx="9144000" cy="274320"/>
           </a:xfrm>
           <a:prstGeom prst="rect">
             <a:avLst/>
@@ -4378,8 +4378,8 @@
         </p:nvSpPr>
         <p:spPr>
           <a:xfrm>
-            <a:off x="320040" y="6601968"/>
-            <a:ext cx="11521440" cy="201168"/>
+            <a:off x="256032" y="6601968"/>
+            <a:ext cx="8595360" cy="201168"/>
           </a:xfrm>
           <a:prstGeom prst="rect">
             <a:avLst/>
@@ -4413,8 +4413,8 @@
         </p:nvSpPr>
         <p:spPr>
           <a:xfrm>
-            <a:off x="502920" y="475488"/>
-            <a:ext cx="11155680" cy="502920"/>
+            <a:off x="365760" y="475488"/>
+            <a:ext cx="8412480" cy="502920"/>
           </a:xfrm>
           <a:prstGeom prst="rect">
             <a:avLst/>
@@ -4428,7 +4428,7 @@
           <a:lstStyle/>
           <a:p>
             <a:pPr>
-              <a:defRPr sz="2800" b="1">
+              <a:defRPr sz="2400" b="1">
                 <a:solidFill>
                   <a:srgbClr val="512888"/>
                 </a:solidFill>
@@ -4448,8 +4448,8 @@
         </p:nvSpPr>
         <p:spPr>
           <a:xfrm>
-            <a:off x="411480" y="1051560"/>
-            <a:ext cx="8092440" cy="4892040"/>
+            <a:off x="320040" y="1051560"/>
+            <a:ext cx="5989320" cy="4892040"/>
           </a:xfrm>
           <a:prstGeom prst="roundRect">
             <a:avLst/>
@@ -4501,8 +4501,8 @@
         </p:blipFill>
         <p:spPr>
           <a:xfrm>
-            <a:off x="621792" y="1261872"/>
-            <a:ext cx="7680960" cy="4480560"/>
+            <a:off x="475488" y="1261872"/>
+            <a:ext cx="5669280" cy="4480560"/>
           </a:xfrm>
           <a:prstGeom prst="rect">
             <a:avLst/>
@@ -4517,8 +4517,8 @@
         </p:nvSpPr>
         <p:spPr>
           <a:xfrm>
-            <a:off x="8641080" y="1051560"/>
-            <a:ext cx="3063240" cy="4892040"/>
+            <a:off x="6446520" y="1051560"/>
+            <a:ext cx="2377440" cy="4892040"/>
           </a:xfrm>
           <a:prstGeom prst="roundRect">
             <a:avLst/>
@@ -4562,8 +4562,8 @@
         </p:nvSpPr>
         <p:spPr>
           <a:xfrm>
-            <a:off x="8887968" y="1234440"/>
-            <a:ext cx="2651760" cy="4526280"/>
+            <a:off x="6601968" y="1234440"/>
+            <a:ext cx="2084831" cy="4526280"/>
           </a:xfrm>
           <a:prstGeom prst="rect">
             <a:avLst/>
@@ -4577,7 +4577,7 @@
           <a:lstStyle/>
           <a:p>
             <a:pPr>
-              <a:defRPr sz="1500">
+              <a:defRPr sz="1300">
                 <a:solidFill>
                   <a:srgbClr val="251F2D"/>
                 </a:solidFill>
@@ -4589,7 +4589,7 @@
           </a:p>
           <a:p>
             <a:pPr>
-              <a:defRPr sz="1400">
+              <a:defRPr sz="1200">
                 <a:solidFill>
                   <a:srgbClr val="251F2D"/>
                 </a:solidFill>
@@ -4601,7 +4601,7 @@
           </a:p>
           <a:p>
             <a:pPr>
-              <a:defRPr sz="1400">
+              <a:defRPr sz="1200">
                 <a:solidFill>
                   <a:srgbClr val="251F2D"/>
                 </a:solidFill>
@@ -4621,8 +4621,8 @@
         </p:nvSpPr>
         <p:spPr>
           <a:xfrm>
-            <a:off x="658368" y="5623560"/>
-            <a:ext cx="7406640" cy="256032"/>
+            <a:off x="411480" y="5623560"/>
+            <a:ext cx="5852160" cy="256032"/>
           </a:xfrm>
           <a:prstGeom prst="rect">
             <a:avLst/>
@@ -4675,7 +4675,7 @@
         <p:spPr>
           <a:xfrm>
             <a:off x="0" y="0"/>
-            <a:ext cx="12188952" cy="6858000"/>
+            <a:ext cx="9144000" cy="6858000"/>
           </a:xfrm>
           <a:prstGeom prst="rect">
             <a:avLst/>
@@ -4718,7 +4718,7 @@
         <p:spPr>
           <a:xfrm>
             <a:off x="0" y="0"/>
-            <a:ext cx="12188952" cy="411480"/>
+            <a:ext cx="9144000" cy="411480"/>
           </a:xfrm>
           <a:prstGeom prst="rect">
             <a:avLst/>
@@ -4761,7 +4761,7 @@
         <p:spPr>
           <a:xfrm>
             <a:off x="0" y="6583680"/>
-            <a:ext cx="12188952" cy="274320"/>
+            <a:ext cx="9144000" cy="274320"/>
           </a:xfrm>
           <a:prstGeom prst="rect">
             <a:avLst/>
@@ -4803,8 +4803,8 @@
         </p:nvSpPr>
         <p:spPr>
           <a:xfrm>
-            <a:off x="320040" y="6601968"/>
-            <a:ext cx="11521440" cy="201168"/>
+            <a:off x="256032" y="6601968"/>
+            <a:ext cx="8595360" cy="201168"/>
           </a:xfrm>
           <a:prstGeom prst="rect">
             <a:avLst/>
@@ -4838,8 +4838,8 @@
         </p:nvSpPr>
         <p:spPr>
           <a:xfrm>
-            <a:off x="502920" y="475488"/>
-            <a:ext cx="11155680" cy="502920"/>
+            <a:off x="365760" y="475488"/>
+            <a:ext cx="8412480" cy="502920"/>
           </a:xfrm>
           <a:prstGeom prst="rect">
             <a:avLst/>
@@ -4853,7 +4853,7 @@
           <a:lstStyle/>
           <a:p>
             <a:pPr>
-              <a:defRPr sz="2800" b="1">
+              <a:defRPr sz="2400" b="1">
                 <a:solidFill>
                   <a:srgbClr val="512888"/>
                 </a:solidFill>
@@ -4873,8 +4873,8 @@
         </p:nvSpPr>
         <p:spPr>
           <a:xfrm>
-            <a:off x="411480" y="1051560"/>
-            <a:ext cx="8092440" cy="4892040"/>
+            <a:off x="320040" y="1051560"/>
+            <a:ext cx="5989320" cy="4892040"/>
           </a:xfrm>
           <a:prstGeom prst="roundRect">
             <a:avLst/>
@@ -4926,8 +4926,8 @@
         </p:blipFill>
         <p:spPr>
           <a:xfrm>
-            <a:off x="621792" y="1261872"/>
-            <a:ext cx="7680960" cy="4480560"/>
+            <a:off x="475488" y="1261872"/>
+            <a:ext cx="5669280" cy="4480560"/>
           </a:xfrm>
           <a:prstGeom prst="rect">
             <a:avLst/>
@@ -4942,8 +4942,8 @@
         </p:nvSpPr>
         <p:spPr>
           <a:xfrm>
-            <a:off x="8641080" y="1051560"/>
-            <a:ext cx="3063240" cy="4892040"/>
+            <a:off x="6446520" y="1051560"/>
+            <a:ext cx="2377440" cy="4892040"/>
           </a:xfrm>
           <a:prstGeom prst="roundRect">
             <a:avLst/>
@@ -4987,8 +4987,8 @@
         </p:nvSpPr>
         <p:spPr>
           <a:xfrm>
-            <a:off x="8887968" y="1234440"/>
-            <a:ext cx="2651760" cy="4526280"/>
+            <a:off x="6601968" y="1234440"/>
+            <a:ext cx="2084831" cy="4526280"/>
           </a:xfrm>
           <a:prstGeom prst="rect">
             <a:avLst/>
@@ -5002,7 +5002,7 @@
           <a:lstStyle/>
           <a:p>
             <a:pPr>
-              <a:defRPr sz="1500">
+              <a:defRPr sz="1300">
                 <a:solidFill>
                   <a:srgbClr val="251F2D"/>
                 </a:solidFill>
@@ -5014,7 +5014,7 @@
           </a:p>
           <a:p>
             <a:pPr>
-              <a:defRPr sz="1400">
+              <a:defRPr sz="1200">
                 <a:solidFill>
                   <a:srgbClr val="251F2D"/>
                 </a:solidFill>
@@ -5026,7 +5026,7 @@
           </a:p>
           <a:p>
             <a:pPr>
-              <a:defRPr sz="1400">
+              <a:defRPr sz="1200">
                 <a:solidFill>
                   <a:srgbClr val="251F2D"/>
                 </a:solidFill>
@@ -5046,8 +5046,8 @@
         </p:nvSpPr>
         <p:spPr>
           <a:xfrm>
-            <a:off x="658368" y="5623560"/>
-            <a:ext cx="7406640" cy="256032"/>
+            <a:off x="411480" y="5623560"/>
+            <a:ext cx="5852160" cy="256032"/>
           </a:xfrm>
           <a:prstGeom prst="rect">
             <a:avLst/>
@@ -5100,7 +5100,7 @@
         <p:spPr>
           <a:xfrm>
             <a:off x="0" y="0"/>
-            <a:ext cx="12188952" cy="6858000"/>
+            <a:ext cx="9144000" cy="6858000"/>
           </a:xfrm>
           <a:prstGeom prst="rect">
             <a:avLst/>
@@ -5143,7 +5143,7 @@
         <p:spPr>
           <a:xfrm>
             <a:off x="0" y="0"/>
-            <a:ext cx="12188952" cy="411480"/>
+            <a:ext cx="9144000" cy="411480"/>
           </a:xfrm>
           <a:prstGeom prst="rect">
             <a:avLst/>
@@ -5186,7 +5186,7 @@
         <p:spPr>
           <a:xfrm>
             <a:off x="0" y="6583680"/>
-            <a:ext cx="12188952" cy="274320"/>
+            <a:ext cx="9144000" cy="274320"/>
           </a:xfrm>
           <a:prstGeom prst="rect">
             <a:avLst/>
@@ -5228,8 +5228,8 @@
         </p:nvSpPr>
         <p:spPr>
           <a:xfrm>
-            <a:off x="320040" y="6601968"/>
-            <a:ext cx="11521440" cy="201168"/>
+            <a:off x="256032" y="6601968"/>
+            <a:ext cx="8595360" cy="201168"/>
           </a:xfrm>
           <a:prstGeom prst="rect">
             <a:avLst/>
@@ -5263,8 +5263,8 @@
         </p:nvSpPr>
         <p:spPr>
           <a:xfrm>
-            <a:off x="502920" y="475488"/>
-            <a:ext cx="11155680" cy="502920"/>
+            <a:off x="365760" y="475488"/>
+            <a:ext cx="8412480" cy="502920"/>
           </a:xfrm>
           <a:prstGeom prst="rect">
             <a:avLst/>
@@ -5278,7 +5278,7 @@
           <a:lstStyle/>
           <a:p>
             <a:pPr>
-              <a:defRPr sz="2800" b="1">
+              <a:defRPr sz="2400" b="1">
                 <a:solidFill>
                   <a:srgbClr val="512888"/>
                 </a:solidFill>
@@ -5298,8 +5298,8 @@
         </p:nvSpPr>
         <p:spPr>
           <a:xfrm>
-            <a:off x="411480" y="1051560"/>
-            <a:ext cx="8092440" cy="4892040"/>
+            <a:off x="320040" y="1051560"/>
+            <a:ext cx="5989320" cy="4892040"/>
           </a:xfrm>
           <a:prstGeom prst="roundRect">
             <a:avLst/>
@@ -5351,8 +5351,8 @@
         </p:blipFill>
         <p:spPr>
           <a:xfrm>
-            <a:off x="621792" y="1261872"/>
-            <a:ext cx="7680960" cy="4480560"/>
+            <a:off x="475488" y="1261872"/>
+            <a:ext cx="5669280" cy="4480560"/>
           </a:xfrm>
           <a:prstGeom prst="rect">
             <a:avLst/>
@@ -5367,8 +5367,8 @@
         </p:nvSpPr>
         <p:spPr>
           <a:xfrm>
-            <a:off x="8641080" y="1051560"/>
-            <a:ext cx="3063240" cy="4892040"/>
+            <a:off x="6446520" y="1051560"/>
+            <a:ext cx="2377440" cy="4892040"/>
           </a:xfrm>
           <a:prstGeom prst="roundRect">
             <a:avLst/>
@@ -5412,8 +5412,8 @@
         </p:nvSpPr>
         <p:spPr>
           <a:xfrm>
-            <a:off x="8887968" y="1234440"/>
-            <a:ext cx="2651760" cy="4526280"/>
+            <a:off x="6601968" y="1234440"/>
+            <a:ext cx="2084831" cy="4526280"/>
           </a:xfrm>
           <a:prstGeom prst="rect">
             <a:avLst/>
@@ -5427,7 +5427,7 @@
           <a:lstStyle/>
           <a:p>
             <a:pPr>
-              <a:defRPr sz="1500">
+              <a:defRPr sz="1300">
                 <a:solidFill>
                   <a:srgbClr val="251F2D"/>
                 </a:solidFill>
@@ -5439,7 +5439,7 @@
           </a:p>
           <a:p>
             <a:pPr>
-              <a:defRPr sz="1400">
+              <a:defRPr sz="1200">
                 <a:solidFill>
                   <a:srgbClr val="251F2D"/>
                 </a:solidFill>
@@ -5451,7 +5451,7 @@
           </a:p>
           <a:p>
             <a:pPr>
-              <a:defRPr sz="1400">
+              <a:defRPr sz="1200">
                 <a:solidFill>
                   <a:srgbClr val="251F2D"/>
                 </a:solidFill>
@@ -5471,8 +5471,8 @@
         </p:nvSpPr>
         <p:spPr>
           <a:xfrm>
-            <a:off x="658368" y="5623560"/>
-            <a:ext cx="7406640" cy="256032"/>
+            <a:off x="411480" y="5623560"/>
+            <a:ext cx="5852160" cy="256032"/>
           </a:xfrm>
           <a:prstGeom prst="rect">
             <a:avLst/>
@@ -5525,7 +5525,7 @@
         <p:spPr>
           <a:xfrm>
             <a:off x="0" y="0"/>
-            <a:ext cx="12188952" cy="6858000"/>
+            <a:ext cx="9144000" cy="6858000"/>
           </a:xfrm>
           <a:prstGeom prst="rect">
             <a:avLst/>
@@ -5568,7 +5568,7 @@
         <p:spPr>
           <a:xfrm>
             <a:off x="0" y="0"/>
-            <a:ext cx="12188952" cy="411480"/>
+            <a:ext cx="9144000" cy="411480"/>
           </a:xfrm>
           <a:prstGeom prst="rect">
             <a:avLst/>
@@ -5611,7 +5611,7 @@
         <p:spPr>
           <a:xfrm>
             <a:off x="0" y="6583680"/>
-            <a:ext cx="12188952" cy="274320"/>
+            <a:ext cx="9144000" cy="274320"/>
           </a:xfrm>
           <a:prstGeom prst="rect">
             <a:avLst/>
@@ -5653,8 +5653,8 @@
         </p:nvSpPr>
         <p:spPr>
           <a:xfrm>
-            <a:off x="320040" y="6601968"/>
-            <a:ext cx="11521440" cy="201168"/>
+            <a:off x="256032" y="6601968"/>
+            <a:ext cx="8595360" cy="201168"/>
           </a:xfrm>
           <a:prstGeom prst="rect">
             <a:avLst/>
@@ -5688,8 +5688,8 @@
         </p:nvSpPr>
         <p:spPr>
           <a:xfrm>
-            <a:off x="502920" y="475488"/>
-            <a:ext cx="11155680" cy="502920"/>
+            <a:off x="365760" y="475488"/>
+            <a:ext cx="8412480" cy="502920"/>
           </a:xfrm>
           <a:prstGeom prst="rect">
             <a:avLst/>
@@ -5703,7 +5703,7 @@
           <a:lstStyle/>
           <a:p>
             <a:pPr>
-              <a:defRPr sz="2800" b="1">
+              <a:defRPr sz="2400" b="1">
                 <a:solidFill>
                   <a:srgbClr val="512888"/>
                 </a:solidFill>
@@ -5723,8 +5723,8 @@
         </p:nvSpPr>
         <p:spPr>
           <a:xfrm>
-            <a:off x="411480" y="1051560"/>
-            <a:ext cx="8092440" cy="4892040"/>
+            <a:off x="320040" y="1051560"/>
+            <a:ext cx="5989320" cy="4892040"/>
           </a:xfrm>
           <a:prstGeom prst="roundRect">
             <a:avLst/>
@@ -5776,8 +5776,8 @@
         </p:blipFill>
         <p:spPr>
           <a:xfrm>
-            <a:off x="621792" y="1261872"/>
-            <a:ext cx="7680960" cy="4480560"/>
+            <a:off x="475488" y="1261872"/>
+            <a:ext cx="5669280" cy="4480560"/>
           </a:xfrm>
           <a:prstGeom prst="rect">
             <a:avLst/>
@@ -5792,8 +5792,8 @@
         </p:nvSpPr>
         <p:spPr>
           <a:xfrm>
-            <a:off x="8641080" y="1051560"/>
-            <a:ext cx="3063240" cy="4892040"/>
+            <a:off x="6446520" y="1051560"/>
+            <a:ext cx="2377440" cy="4892040"/>
           </a:xfrm>
           <a:prstGeom prst="roundRect">
             <a:avLst/>
@@ -5837,8 +5837,8 @@
         </p:nvSpPr>
         <p:spPr>
           <a:xfrm>
-            <a:off x="8887968" y="1234440"/>
-            <a:ext cx="2651760" cy="4526280"/>
+            <a:off x="6601968" y="1234440"/>
+            <a:ext cx="2084831" cy="4526280"/>
           </a:xfrm>
           <a:prstGeom prst="rect">
             <a:avLst/>
@@ -5852,7 +5852,7 @@
           <a:lstStyle/>
           <a:p>
             <a:pPr>
-              <a:defRPr sz="1500">
+              <a:defRPr sz="1300">
                 <a:solidFill>
                   <a:srgbClr val="251F2D"/>
                 </a:solidFill>
@@ -5864,7 +5864,7 @@
           </a:p>
           <a:p>
             <a:pPr>
-              <a:defRPr sz="1400">
+              <a:defRPr sz="1200">
                 <a:solidFill>
                   <a:srgbClr val="251F2D"/>
                 </a:solidFill>
@@ -5876,7 +5876,7 @@
           </a:p>
           <a:p>
             <a:pPr>
-              <a:defRPr sz="1400">
+              <a:defRPr sz="1200">
                 <a:solidFill>
                   <a:srgbClr val="251F2D"/>
                 </a:solidFill>
@@ -5896,8 +5896,8 @@
         </p:nvSpPr>
         <p:spPr>
           <a:xfrm>
-            <a:off x="658368" y="5623560"/>
-            <a:ext cx="7406640" cy="256032"/>
+            <a:off x="411480" y="5623560"/>
+            <a:ext cx="5852160" cy="256032"/>
           </a:xfrm>
           <a:prstGeom prst="rect">
             <a:avLst/>
@@ -5950,7 +5950,7 @@
         <p:spPr>
           <a:xfrm>
             <a:off x="0" y="0"/>
-            <a:ext cx="12188952" cy="6858000"/>
+            <a:ext cx="9144000" cy="6858000"/>
           </a:xfrm>
           <a:prstGeom prst="rect">
             <a:avLst/>
@@ -5993,7 +5993,7 @@
         <p:spPr>
           <a:xfrm>
             <a:off x="0" y="0"/>
-            <a:ext cx="12188952" cy="411480"/>
+            <a:ext cx="9144000" cy="411480"/>
           </a:xfrm>
           <a:prstGeom prst="rect">
             <a:avLst/>
@@ -6036,7 +6036,7 @@
         <p:spPr>
           <a:xfrm>
             <a:off x="0" y="6583680"/>
-            <a:ext cx="12188952" cy="274320"/>
+            <a:ext cx="9144000" cy="274320"/>
           </a:xfrm>
           <a:prstGeom prst="rect">
             <a:avLst/>
@@ -6078,8 +6078,8 @@
         </p:nvSpPr>
         <p:spPr>
           <a:xfrm>
-            <a:off x="320040" y="6601968"/>
-            <a:ext cx="11521440" cy="201168"/>
+            <a:off x="256032" y="6601968"/>
+            <a:ext cx="8595360" cy="201168"/>
           </a:xfrm>
           <a:prstGeom prst="rect">
             <a:avLst/>
@@ -6113,8 +6113,8 @@
         </p:nvSpPr>
         <p:spPr>
           <a:xfrm>
-            <a:off x="502920" y="475488"/>
-            <a:ext cx="11155680" cy="502920"/>
+            <a:off x="365760" y="475488"/>
+            <a:ext cx="8412480" cy="502920"/>
           </a:xfrm>
           <a:prstGeom prst="rect">
             <a:avLst/>
@@ -6128,7 +6128,7 @@
           <a:lstStyle/>
           <a:p>
             <a:pPr>
-              <a:defRPr sz="2800" b="1">
+              <a:defRPr sz="2400" b="1">
                 <a:solidFill>
                   <a:srgbClr val="512888"/>
                 </a:solidFill>
@@ -6148,8 +6148,8 @@
         </p:nvSpPr>
         <p:spPr>
           <a:xfrm>
-            <a:off x="731520" y="1325880"/>
-            <a:ext cx="10789920" cy="4480560"/>
+            <a:off x="548640" y="1325880"/>
+            <a:ext cx="8046720" cy="4480560"/>
           </a:xfrm>
           <a:prstGeom prst="roundRect">
             <a:avLst/>
@@ -6193,8 +6193,8 @@
         </p:nvSpPr>
         <p:spPr>
           <a:xfrm>
-            <a:off x="1051560" y="1600200"/>
-            <a:ext cx="10149840" cy="3840480"/>
+            <a:off x="822960" y="1600200"/>
+            <a:ext cx="7498079" cy="3840480"/>
           </a:xfrm>
           <a:prstGeom prst="rect">
             <a:avLst/>
@@ -6208,7 +6208,7 @@
           <a:lstStyle/>
           <a:p>
             <a:pPr>
-              <a:defRPr sz="2100">
+              <a:defRPr sz="1800">
                 <a:solidFill>
                   <a:srgbClr val="251F2D"/>
                 </a:solidFill>
@@ -6220,7 +6220,7 @@
           </a:p>
           <a:p>
             <a:pPr>
-              <a:defRPr sz="1800">
+              <a:defRPr sz="1500">
                 <a:solidFill>
                   <a:srgbClr val="251F2D"/>
                 </a:solidFill>
@@ -6232,7 +6232,7 @@
           </a:p>
           <a:p>
             <a:pPr>
-              <a:defRPr sz="1800">
+              <a:defRPr sz="1500">
                 <a:solidFill>
                   <a:srgbClr val="251F2D"/>
                 </a:solidFill>
@@ -6244,7 +6244,7 @@
           </a:p>
           <a:p>
             <a:pPr>
-              <a:defRPr sz="1800">
+              <a:defRPr sz="1500">
                 <a:solidFill>
                   <a:srgbClr val="251F2D"/>
                 </a:solidFill>
@@ -6256,7 +6256,7 @@
           </a:p>
           <a:p>
             <a:pPr>
-              <a:defRPr sz="1800">
+              <a:defRPr sz="1500">
                 <a:solidFill>
                   <a:srgbClr val="251F2D"/>
                 </a:solidFill>
@@ -6268,7 +6268,7 @@
           </a:p>
           <a:p>
             <a:pPr>
-              <a:defRPr sz="1800">
+              <a:defRPr sz="1500">
                 <a:solidFill>
                   <a:srgbClr val="251F2D"/>
                 </a:solidFill>
@@ -6307,7 +6307,7 @@
         <p:spPr>
           <a:xfrm>
             <a:off x="0" y="0"/>
-            <a:ext cx="12188952" cy="6858000"/>
+            <a:ext cx="9144000" cy="6858000"/>
           </a:xfrm>
           <a:prstGeom prst="rect">
             <a:avLst/>
@@ -6350,7 +6350,7 @@
         <p:spPr>
           <a:xfrm>
             <a:off x="0" y="0"/>
-            <a:ext cx="12188952" cy="411480"/>
+            <a:ext cx="9144000" cy="411480"/>
           </a:xfrm>
           <a:prstGeom prst="rect">
             <a:avLst/>
@@ -6393,7 +6393,7 @@
         <p:spPr>
           <a:xfrm>
             <a:off x="0" y="6583680"/>
-            <a:ext cx="12188952" cy="274320"/>
+            <a:ext cx="9144000" cy="274320"/>
           </a:xfrm>
           <a:prstGeom prst="rect">
             <a:avLst/>
@@ -6435,8 +6435,8 @@
         </p:nvSpPr>
         <p:spPr>
           <a:xfrm>
-            <a:off x="320040" y="6601968"/>
-            <a:ext cx="11521440" cy="201168"/>
+            <a:off x="256032" y="6601968"/>
+            <a:ext cx="8595360" cy="201168"/>
           </a:xfrm>
           <a:prstGeom prst="rect">
             <a:avLst/>
@@ -6470,8 +6470,8 @@
         </p:nvSpPr>
         <p:spPr>
           <a:xfrm>
-            <a:off x="502920" y="475488"/>
-            <a:ext cx="11155680" cy="502920"/>
+            <a:off x="365760" y="475488"/>
+            <a:ext cx="8412480" cy="502920"/>
           </a:xfrm>
           <a:prstGeom prst="rect">
             <a:avLst/>
@@ -6485,7 +6485,7 @@
           <a:lstStyle/>
           <a:p>
             <a:pPr>
-              <a:defRPr sz="2800" b="1">
+              <a:defRPr sz="2400" b="1">
                 <a:solidFill>
                   <a:srgbClr val="512888"/>
                 </a:solidFill>
@@ -6502,8 +6502,8 @@
         </p:nvSpPr>
         <p:spPr>
           <a:xfrm>
-            <a:off x="731520" y="1325880"/>
-            <a:ext cx="10789920" cy="4480560"/>
+            <a:off x="548640" y="1325880"/>
+            <a:ext cx="8046720" cy="4480560"/>
           </a:xfrm>
           <a:prstGeom prst="roundRect">
             <a:avLst/>
@@ -6547,8 +6547,8 @@
         </p:nvSpPr>
         <p:spPr>
           <a:xfrm>
-            <a:off x="1051560" y="1600200"/>
-            <a:ext cx="10149840" cy="3840480"/>
+            <a:off x="822960" y="1600200"/>
+            <a:ext cx="7498079" cy="3840480"/>
           </a:xfrm>
           <a:prstGeom prst="rect">
             <a:avLst/>
@@ -6562,7 +6562,7 @@
           <a:lstStyle/>
           <a:p>
             <a:pPr>
-              <a:defRPr sz="2100">
+              <a:defRPr sz="1800">
                 <a:solidFill>
                   <a:srgbClr val="251F2D"/>
                 </a:solidFill>
@@ -6574,7 +6574,7 @@
           </a:p>
           <a:p>
             <a:pPr>
-              <a:defRPr sz="1800">
+              <a:defRPr sz="1500">
                 <a:solidFill>
                   <a:srgbClr val="251F2D"/>
                 </a:solidFill>
@@ -6586,7 +6586,7 @@
           </a:p>
           <a:p>
             <a:pPr>
-              <a:defRPr sz="1800">
+              <a:defRPr sz="1500">
                 <a:solidFill>
                   <a:srgbClr val="251F2D"/>
                 </a:solidFill>
@@ -6598,7 +6598,7 @@
           </a:p>
           <a:p>
             <a:pPr>
-              <a:defRPr sz="1800">
+              <a:defRPr sz="1500">
                 <a:solidFill>
                   <a:srgbClr val="251F2D"/>
                 </a:solidFill>
@@ -6610,7 +6610,7 @@
           </a:p>
           <a:p>
             <a:pPr>
-              <a:defRPr sz="1800">
+              <a:defRPr sz="1500">
                 <a:solidFill>
                   <a:srgbClr val="251F2D"/>
                 </a:solidFill>
@@ -6622,7 +6622,7 @@
           </a:p>
           <a:p>
             <a:pPr>
-              <a:defRPr sz="1800">
+              <a:defRPr sz="1500">
                 <a:solidFill>
                   <a:srgbClr val="251F2D"/>
                 </a:solidFill>
@@ -6661,7 +6661,7 @@
         <p:spPr>
           <a:xfrm>
             <a:off x="0" y="0"/>
-            <a:ext cx="12188952" cy="6858000"/>
+            <a:ext cx="9144000" cy="6858000"/>
           </a:xfrm>
           <a:prstGeom prst="rect">
             <a:avLst/>
@@ -6704,7 +6704,7 @@
         <p:spPr>
           <a:xfrm>
             <a:off x="0" y="0"/>
-            <a:ext cx="12188952" cy="411480"/>
+            <a:ext cx="9144000" cy="411480"/>
           </a:xfrm>
           <a:prstGeom prst="rect">
             <a:avLst/>
@@ -6747,7 +6747,7 @@
         <p:spPr>
           <a:xfrm>
             <a:off x="0" y="6583680"/>
-            <a:ext cx="12188952" cy="274320"/>
+            <a:ext cx="9144000" cy="274320"/>
           </a:xfrm>
           <a:prstGeom prst="rect">
             <a:avLst/>
@@ -6789,8 +6789,8 @@
         </p:nvSpPr>
         <p:spPr>
           <a:xfrm>
-            <a:off x="320040" y="6601968"/>
-            <a:ext cx="11521440" cy="201168"/>
+            <a:off x="256032" y="6601968"/>
+            <a:ext cx="8595360" cy="201168"/>
           </a:xfrm>
           <a:prstGeom prst="rect">
             <a:avLst/>
@@ -6824,8 +6824,8 @@
         </p:nvSpPr>
         <p:spPr>
           <a:xfrm>
-            <a:off x="502920" y="475488"/>
-            <a:ext cx="11155680" cy="502920"/>
+            <a:off x="365760" y="475488"/>
+            <a:ext cx="8412480" cy="502920"/>
           </a:xfrm>
           <a:prstGeom prst="rect">
             <a:avLst/>
@@ -6839,7 +6839,7 @@
           <a:lstStyle/>
           <a:p>
             <a:pPr>
-              <a:defRPr sz="2800" b="1">
+              <a:defRPr sz="2400" b="1">
                 <a:solidFill>
                   <a:srgbClr val="512888"/>
                 </a:solidFill>
@@ -6859,8 +6859,8 @@
         </p:nvSpPr>
         <p:spPr>
           <a:xfrm>
-            <a:off x="411480" y="1051560"/>
-            <a:ext cx="8092440" cy="4892040"/>
+            <a:off x="320040" y="1051560"/>
+            <a:ext cx="5989320" cy="4892040"/>
           </a:xfrm>
           <a:prstGeom prst="roundRect">
             <a:avLst/>
@@ -6912,8 +6912,8 @@
         </p:blipFill>
         <p:spPr>
           <a:xfrm>
-            <a:off x="621792" y="1261872"/>
-            <a:ext cx="7680960" cy="4480560"/>
+            <a:off x="475488" y="1261872"/>
+            <a:ext cx="5669280" cy="4480560"/>
           </a:xfrm>
           <a:prstGeom prst="rect">
             <a:avLst/>
@@ -6928,8 +6928,8 @@
         </p:nvSpPr>
         <p:spPr>
           <a:xfrm>
-            <a:off x="8641080" y="1051560"/>
-            <a:ext cx="3063240" cy="4892040"/>
+            <a:off x="6446520" y="1051560"/>
+            <a:ext cx="2377440" cy="4892040"/>
           </a:xfrm>
           <a:prstGeom prst="roundRect">
             <a:avLst/>
@@ -6973,8 +6973,8 @@
         </p:nvSpPr>
         <p:spPr>
           <a:xfrm>
-            <a:off x="8887968" y="1234440"/>
-            <a:ext cx="2651760" cy="4526280"/>
+            <a:off x="6601968" y="1234440"/>
+            <a:ext cx="2084831" cy="4526280"/>
           </a:xfrm>
           <a:prstGeom prst="rect">
             <a:avLst/>
@@ -6988,7 +6988,7 @@
           <a:lstStyle/>
           <a:p>
             <a:pPr>
-              <a:defRPr sz="1500">
+              <a:defRPr sz="1300">
                 <a:solidFill>
                   <a:srgbClr val="251F2D"/>
                 </a:solidFill>
@@ -7000,7 +7000,7 @@
           </a:p>
           <a:p>
             <a:pPr>
-              <a:defRPr sz="1400">
+              <a:defRPr sz="1200">
                 <a:solidFill>
                   <a:srgbClr val="251F2D"/>
                 </a:solidFill>
@@ -7012,7 +7012,7 @@
           </a:p>
           <a:p>
             <a:pPr>
-              <a:defRPr sz="1400">
+              <a:defRPr sz="1200">
                 <a:solidFill>
                   <a:srgbClr val="251F2D"/>
                 </a:solidFill>
@@ -7032,8 +7032,8 @@
         </p:nvSpPr>
         <p:spPr>
           <a:xfrm>
-            <a:off x="658368" y="5623560"/>
-            <a:ext cx="7406640" cy="256032"/>
+            <a:off x="411480" y="5623560"/>
+            <a:ext cx="5852160" cy="256032"/>
           </a:xfrm>
           <a:prstGeom prst="rect">
             <a:avLst/>
@@ -7086,7 +7086,7 @@
         <p:spPr>
           <a:xfrm>
             <a:off x="0" y="0"/>
-            <a:ext cx="12188952" cy="6858000"/>
+            <a:ext cx="9144000" cy="6858000"/>
           </a:xfrm>
           <a:prstGeom prst="rect">
             <a:avLst/>
@@ -7129,7 +7129,7 @@
         <p:spPr>
           <a:xfrm>
             <a:off x="0" y="0"/>
-            <a:ext cx="12188952" cy="411480"/>
+            <a:ext cx="9144000" cy="411480"/>
           </a:xfrm>
           <a:prstGeom prst="rect">
             <a:avLst/>
@@ -7172,7 +7172,7 @@
         <p:spPr>
           <a:xfrm>
             <a:off x="0" y="6583680"/>
-            <a:ext cx="12188952" cy="274320"/>
+            <a:ext cx="9144000" cy="274320"/>
           </a:xfrm>
           <a:prstGeom prst="rect">
             <a:avLst/>
@@ -7214,8 +7214,8 @@
         </p:nvSpPr>
         <p:spPr>
           <a:xfrm>
-            <a:off x="320040" y="6601968"/>
-            <a:ext cx="11521440" cy="201168"/>
+            <a:off x="256032" y="6601968"/>
+            <a:ext cx="8595360" cy="201168"/>
           </a:xfrm>
           <a:prstGeom prst="rect">
             <a:avLst/>
@@ -7249,8 +7249,8 @@
         </p:nvSpPr>
         <p:spPr>
           <a:xfrm>
-            <a:off x="502920" y="475488"/>
-            <a:ext cx="11155680" cy="502920"/>
+            <a:off x="365760" y="475488"/>
+            <a:ext cx="8412480" cy="502920"/>
           </a:xfrm>
           <a:prstGeom prst="rect">
             <a:avLst/>
@@ -7264,7 +7264,7 @@
           <a:lstStyle/>
           <a:p>
             <a:pPr>
-              <a:defRPr sz="2800" b="1">
+              <a:defRPr sz="2400" b="1">
                 <a:solidFill>
                   <a:srgbClr val="512888"/>
                 </a:solidFill>
@@ -7284,8 +7284,8 @@
         </p:nvSpPr>
         <p:spPr>
           <a:xfrm>
-            <a:off x="411480" y="1051560"/>
-            <a:ext cx="8092440" cy="4892040"/>
+            <a:off x="320040" y="1051560"/>
+            <a:ext cx="5989320" cy="4892040"/>
           </a:xfrm>
           <a:prstGeom prst="roundRect">
             <a:avLst/>
@@ -7337,8 +7337,8 @@
         </p:blipFill>
         <p:spPr>
           <a:xfrm>
-            <a:off x="621792" y="1261872"/>
-            <a:ext cx="7680960" cy="4480560"/>
+            <a:off x="475488" y="1261872"/>
+            <a:ext cx="5669280" cy="4480560"/>
           </a:xfrm>
           <a:prstGeom prst="rect">
             <a:avLst/>
@@ -7353,8 +7353,8 @@
         </p:nvSpPr>
         <p:spPr>
           <a:xfrm>
-            <a:off x="8641080" y="1051560"/>
-            <a:ext cx="3063240" cy="4892040"/>
+            <a:off x="6446520" y="1051560"/>
+            <a:ext cx="2377440" cy="4892040"/>
           </a:xfrm>
           <a:prstGeom prst="roundRect">
             <a:avLst/>
@@ -7398,8 +7398,8 @@
         </p:nvSpPr>
         <p:spPr>
           <a:xfrm>
-            <a:off x="8887968" y="1234440"/>
-            <a:ext cx="2651760" cy="4526280"/>
+            <a:off x="6601968" y="1234440"/>
+            <a:ext cx="2084831" cy="4526280"/>
           </a:xfrm>
           <a:prstGeom prst="rect">
             <a:avLst/>
@@ -7413,7 +7413,7 @@
           <a:lstStyle/>
           <a:p>
             <a:pPr>
-              <a:defRPr sz="1500">
+              <a:defRPr sz="1300">
                 <a:solidFill>
                   <a:srgbClr val="251F2D"/>
                 </a:solidFill>
@@ -7425,7 +7425,7 @@
           </a:p>
           <a:p>
             <a:pPr>
-              <a:defRPr sz="1400">
+              <a:defRPr sz="1200">
                 <a:solidFill>
                   <a:srgbClr val="251F2D"/>
                 </a:solidFill>
@@ -7437,7 +7437,7 @@
           </a:p>
           <a:p>
             <a:pPr>
-              <a:defRPr sz="1400">
+              <a:defRPr sz="1200">
                 <a:solidFill>
                   <a:srgbClr val="251F2D"/>
                 </a:solidFill>
@@ -7457,8 +7457,8 @@
         </p:nvSpPr>
         <p:spPr>
           <a:xfrm>
-            <a:off x="658368" y="5623560"/>
-            <a:ext cx="7406640" cy="256032"/>
+            <a:off x="411480" y="5623560"/>
+            <a:ext cx="5852160" cy="256032"/>
           </a:xfrm>
           <a:prstGeom prst="rect">
             <a:avLst/>
@@ -7511,7 +7511,7 @@
         <p:spPr>
           <a:xfrm>
             <a:off x="0" y="0"/>
-            <a:ext cx="12188952" cy="6858000"/>
+            <a:ext cx="9144000" cy="6858000"/>
           </a:xfrm>
           <a:prstGeom prst="rect">
             <a:avLst/>
@@ -7554,7 +7554,7 @@
         <p:spPr>
           <a:xfrm>
             <a:off x="0" y="0"/>
-            <a:ext cx="12188952" cy="411480"/>
+            <a:ext cx="9144000" cy="411480"/>
           </a:xfrm>
           <a:prstGeom prst="rect">
             <a:avLst/>
@@ -7597,7 +7597,7 @@
         <p:spPr>
           <a:xfrm>
             <a:off x="0" y="6583680"/>
-            <a:ext cx="12188952" cy="274320"/>
+            <a:ext cx="9144000" cy="274320"/>
           </a:xfrm>
           <a:prstGeom prst="rect">
             <a:avLst/>
@@ -7639,8 +7639,8 @@
         </p:nvSpPr>
         <p:spPr>
           <a:xfrm>
-            <a:off x="320040" y="6601968"/>
-            <a:ext cx="11521440" cy="201168"/>
+            <a:off x="256032" y="6601968"/>
+            <a:ext cx="8595360" cy="201168"/>
           </a:xfrm>
           <a:prstGeom prst="rect">
             <a:avLst/>
@@ -7674,8 +7674,8 @@
         </p:nvSpPr>
         <p:spPr>
           <a:xfrm>
-            <a:off x="502920" y="475488"/>
-            <a:ext cx="11155680" cy="502920"/>
+            <a:off x="365760" y="475488"/>
+            <a:ext cx="8412480" cy="502920"/>
           </a:xfrm>
           <a:prstGeom prst="rect">
             <a:avLst/>
@@ -7689,7 +7689,7 @@
           <a:lstStyle/>
           <a:p>
             <a:pPr>
-              <a:defRPr sz="2800" b="1">
+              <a:defRPr sz="2400" b="1">
                 <a:solidFill>
                   <a:srgbClr val="512888"/>
                 </a:solidFill>
@@ -7709,8 +7709,8 @@
         </p:nvSpPr>
         <p:spPr>
           <a:xfrm>
-            <a:off x="411480" y="1051560"/>
-            <a:ext cx="8092440" cy="4892040"/>
+            <a:off x="320040" y="1051560"/>
+            <a:ext cx="5989320" cy="4892040"/>
           </a:xfrm>
           <a:prstGeom prst="roundRect">
             <a:avLst/>
@@ -7762,8 +7762,8 @@
         </p:blipFill>
         <p:spPr>
           <a:xfrm>
-            <a:off x="621792" y="1261872"/>
-            <a:ext cx="7680960" cy="4480560"/>
+            <a:off x="475488" y="1261872"/>
+            <a:ext cx="5669280" cy="4480560"/>
           </a:xfrm>
           <a:prstGeom prst="rect">
             <a:avLst/>
@@ -7778,8 +7778,8 @@
         </p:nvSpPr>
         <p:spPr>
           <a:xfrm>
-            <a:off x="8641080" y="1051560"/>
-            <a:ext cx="3063240" cy="4892040"/>
+            <a:off x="6446520" y="1051560"/>
+            <a:ext cx="2377440" cy="4892040"/>
           </a:xfrm>
           <a:prstGeom prst="roundRect">
             <a:avLst/>
@@ -7823,8 +7823,8 @@
         </p:nvSpPr>
         <p:spPr>
           <a:xfrm>
-            <a:off x="8887968" y="1234440"/>
-            <a:ext cx="2651760" cy="4526280"/>
+            <a:off x="6601968" y="1234440"/>
+            <a:ext cx="2084831" cy="4526280"/>
           </a:xfrm>
           <a:prstGeom prst="rect">
             <a:avLst/>
@@ -7838,7 +7838,7 @@
           <a:lstStyle/>
           <a:p>
             <a:pPr>
-              <a:defRPr sz="1500">
+              <a:defRPr sz="1300">
                 <a:solidFill>
                   <a:srgbClr val="251F2D"/>
                 </a:solidFill>
@@ -7850,7 +7850,7 @@
           </a:p>
           <a:p>
             <a:pPr>
-              <a:defRPr sz="1400">
+              <a:defRPr sz="1200">
                 <a:solidFill>
                   <a:srgbClr val="251F2D"/>
                 </a:solidFill>
@@ -7862,7 +7862,7 @@
           </a:p>
           <a:p>
             <a:pPr>
-              <a:defRPr sz="1400">
+              <a:defRPr sz="1200">
                 <a:solidFill>
                   <a:srgbClr val="251F2D"/>
                 </a:solidFill>
@@ -7882,8 +7882,8 @@
         </p:nvSpPr>
         <p:spPr>
           <a:xfrm>
-            <a:off x="658368" y="5623560"/>
-            <a:ext cx="7406640" cy="256032"/>
+            <a:off x="411480" y="5623560"/>
+            <a:ext cx="5852160" cy="256032"/>
           </a:xfrm>
           <a:prstGeom prst="rect">
             <a:avLst/>
@@ -7936,7 +7936,7 @@
         <p:spPr>
           <a:xfrm>
             <a:off x="0" y="0"/>
-            <a:ext cx="12188952" cy="6858000"/>
+            <a:ext cx="9144000" cy="6858000"/>
           </a:xfrm>
           <a:prstGeom prst="rect">
             <a:avLst/>
@@ -7979,7 +7979,7 @@
         <p:spPr>
           <a:xfrm>
             <a:off x="0" y="0"/>
-            <a:ext cx="12188952" cy="411480"/>
+            <a:ext cx="9144000" cy="411480"/>
           </a:xfrm>
           <a:prstGeom prst="rect">
             <a:avLst/>
@@ -8022,7 +8022,7 @@
         <p:spPr>
           <a:xfrm>
             <a:off x="0" y="6583680"/>
-            <a:ext cx="12188952" cy="274320"/>
+            <a:ext cx="9144000" cy="274320"/>
           </a:xfrm>
           <a:prstGeom prst="rect">
             <a:avLst/>
@@ -8064,8 +8064,8 @@
         </p:nvSpPr>
         <p:spPr>
           <a:xfrm>
-            <a:off x="320040" y="6601968"/>
-            <a:ext cx="11521440" cy="201168"/>
+            <a:off x="256032" y="6601968"/>
+            <a:ext cx="8595360" cy="201168"/>
           </a:xfrm>
           <a:prstGeom prst="rect">
             <a:avLst/>
@@ -8099,8 +8099,8 @@
         </p:nvSpPr>
         <p:spPr>
           <a:xfrm>
-            <a:off x="502920" y="475488"/>
-            <a:ext cx="11155680" cy="502920"/>
+            <a:off x="365760" y="475488"/>
+            <a:ext cx="8412480" cy="502920"/>
           </a:xfrm>
           <a:prstGeom prst="rect">
             <a:avLst/>
@@ -8114,7 +8114,7 @@
           <a:lstStyle/>
           <a:p>
             <a:pPr>
-              <a:defRPr sz="2800" b="1">
+              <a:defRPr sz="2400" b="1">
                 <a:solidFill>
                   <a:srgbClr val="512888"/>
                 </a:solidFill>
@@ -8134,8 +8134,8 @@
         </p:nvSpPr>
         <p:spPr>
           <a:xfrm>
-            <a:off x="411480" y="1051560"/>
-            <a:ext cx="8092440" cy="4892040"/>
+            <a:off x="320040" y="1051560"/>
+            <a:ext cx="5989320" cy="4892040"/>
           </a:xfrm>
           <a:prstGeom prst="roundRect">
             <a:avLst/>
@@ -8187,8 +8187,8 @@
         </p:blipFill>
         <p:spPr>
           <a:xfrm>
-            <a:off x="621792" y="1261872"/>
-            <a:ext cx="7680960" cy="4480560"/>
+            <a:off x="475488" y="1261872"/>
+            <a:ext cx="5669280" cy="4480560"/>
           </a:xfrm>
           <a:prstGeom prst="rect">
             <a:avLst/>
@@ -8203,8 +8203,8 @@
         </p:nvSpPr>
         <p:spPr>
           <a:xfrm>
-            <a:off x="8641080" y="1051560"/>
-            <a:ext cx="3063240" cy="4892040"/>
+            <a:off x="6446520" y="1051560"/>
+            <a:ext cx="2377440" cy="4892040"/>
           </a:xfrm>
           <a:prstGeom prst="roundRect">
             <a:avLst/>
@@ -8248,8 +8248,8 @@
         </p:nvSpPr>
         <p:spPr>
           <a:xfrm>
-            <a:off x="8887968" y="1234440"/>
-            <a:ext cx="2651760" cy="4526280"/>
+            <a:off x="6601968" y="1234440"/>
+            <a:ext cx="2084831" cy="4526280"/>
           </a:xfrm>
           <a:prstGeom prst="rect">
             <a:avLst/>
@@ -8263,7 +8263,7 @@
           <a:lstStyle/>
           <a:p>
             <a:pPr>
-              <a:defRPr sz="1500">
+              <a:defRPr sz="1300">
                 <a:solidFill>
                   <a:srgbClr val="251F2D"/>
                 </a:solidFill>
@@ -8275,7 +8275,7 @@
           </a:p>
           <a:p>
             <a:pPr>
-              <a:defRPr sz="1400">
+              <a:defRPr sz="1200">
                 <a:solidFill>
                   <a:srgbClr val="251F2D"/>
                 </a:solidFill>
@@ -8287,7 +8287,7 @@
           </a:p>
           <a:p>
             <a:pPr>
-              <a:defRPr sz="1400">
+              <a:defRPr sz="1200">
                 <a:solidFill>
                   <a:srgbClr val="251F2D"/>
                 </a:solidFill>
@@ -8307,8 +8307,8 @@
         </p:nvSpPr>
         <p:spPr>
           <a:xfrm>
-            <a:off x="658368" y="5623560"/>
-            <a:ext cx="7406640" cy="256032"/>
+            <a:off x="411480" y="5623560"/>
+            <a:ext cx="5852160" cy="256032"/>
           </a:xfrm>
           <a:prstGeom prst="rect">
             <a:avLst/>
@@ -8361,7 +8361,7 @@
         <p:spPr>
           <a:xfrm>
             <a:off x="0" y="0"/>
-            <a:ext cx="12188952" cy="6858000"/>
+            <a:ext cx="9144000" cy="6858000"/>
           </a:xfrm>
           <a:prstGeom prst="rect">
             <a:avLst/>
@@ -8404,7 +8404,7 @@
         <p:spPr>
           <a:xfrm>
             <a:off x="0" y="0"/>
-            <a:ext cx="12188952" cy="411480"/>
+            <a:ext cx="9144000" cy="411480"/>
           </a:xfrm>
           <a:prstGeom prst="rect">
             <a:avLst/>
@@ -8447,7 +8447,7 @@
         <p:spPr>
           <a:xfrm>
             <a:off x="0" y="6583680"/>
-            <a:ext cx="12188952" cy="274320"/>
+            <a:ext cx="9144000" cy="274320"/>
           </a:xfrm>
           <a:prstGeom prst="rect">
             <a:avLst/>
@@ -8489,8 +8489,8 @@
         </p:nvSpPr>
         <p:spPr>
           <a:xfrm>
-            <a:off x="320040" y="6601968"/>
-            <a:ext cx="11521440" cy="201168"/>
+            <a:off x="256032" y="6601968"/>
+            <a:ext cx="8595360" cy="201168"/>
           </a:xfrm>
           <a:prstGeom prst="rect">
             <a:avLst/>
@@ -8524,8 +8524,8 @@
         </p:nvSpPr>
         <p:spPr>
           <a:xfrm>
-            <a:off x="502920" y="475488"/>
-            <a:ext cx="11155680" cy="502920"/>
+            <a:off x="365760" y="475488"/>
+            <a:ext cx="8412480" cy="502920"/>
           </a:xfrm>
           <a:prstGeom prst="rect">
             <a:avLst/>
@@ -8539,7 +8539,7 @@
           <a:lstStyle/>
           <a:p>
             <a:pPr>
-              <a:defRPr sz="2800" b="1">
+              <a:defRPr sz="2400" b="1">
                 <a:solidFill>
                   <a:srgbClr val="512888"/>
                 </a:solidFill>
@@ -8559,8 +8559,8 @@
         </p:nvSpPr>
         <p:spPr>
           <a:xfrm>
-            <a:off x="411480" y="1051560"/>
-            <a:ext cx="8092440" cy="4892040"/>
+            <a:off x="320040" y="1051560"/>
+            <a:ext cx="5989320" cy="4892040"/>
           </a:xfrm>
           <a:prstGeom prst="roundRect">
             <a:avLst/>
@@ -8612,8 +8612,8 @@
         </p:blipFill>
         <p:spPr>
           <a:xfrm>
-            <a:off x="621792" y="1261872"/>
-            <a:ext cx="7680960" cy="4480560"/>
+            <a:off x="475488" y="1261872"/>
+            <a:ext cx="5669280" cy="4480560"/>
           </a:xfrm>
           <a:prstGeom prst="rect">
             <a:avLst/>
@@ -8628,8 +8628,8 @@
         </p:nvSpPr>
         <p:spPr>
           <a:xfrm>
-            <a:off x="8641080" y="1051560"/>
-            <a:ext cx="3063240" cy="4892040"/>
+            <a:off x="6446520" y="1051560"/>
+            <a:ext cx="2377440" cy="4892040"/>
           </a:xfrm>
           <a:prstGeom prst="roundRect">
             <a:avLst/>
@@ -8673,8 +8673,8 @@
         </p:nvSpPr>
         <p:spPr>
           <a:xfrm>
-            <a:off x="8887968" y="1234440"/>
-            <a:ext cx="2651760" cy="4526280"/>
+            <a:off x="6601968" y="1234440"/>
+            <a:ext cx="2084831" cy="4526280"/>
           </a:xfrm>
           <a:prstGeom prst="rect">
             <a:avLst/>
@@ -8688,7 +8688,7 @@
           <a:lstStyle/>
           <a:p>
             <a:pPr>
-              <a:defRPr sz="1500">
+              <a:defRPr sz="1300">
                 <a:solidFill>
                   <a:srgbClr val="251F2D"/>
                 </a:solidFill>
@@ -8700,7 +8700,7 @@
           </a:p>
           <a:p>
             <a:pPr>
-              <a:defRPr sz="1400">
+              <a:defRPr sz="1200">
                 <a:solidFill>
                   <a:srgbClr val="251F2D"/>
                 </a:solidFill>
@@ -8712,7 +8712,7 @@
           </a:p>
           <a:p>
             <a:pPr>
-              <a:defRPr sz="1400">
+              <a:defRPr sz="1200">
                 <a:solidFill>
                   <a:srgbClr val="251F2D"/>
                 </a:solidFill>
@@ -8732,8 +8732,8 @@
         </p:nvSpPr>
         <p:spPr>
           <a:xfrm>
-            <a:off x="658368" y="5623560"/>
-            <a:ext cx="7406640" cy="256032"/>
+            <a:off x="411480" y="5623560"/>
+            <a:ext cx="5852160" cy="256032"/>
           </a:xfrm>
           <a:prstGeom prst="rect">
             <a:avLst/>
@@ -8786,7 +8786,7 @@
         <p:spPr>
           <a:xfrm>
             <a:off x="0" y="0"/>
-            <a:ext cx="12188952" cy="6858000"/>
+            <a:ext cx="9144000" cy="6858000"/>
           </a:xfrm>
           <a:prstGeom prst="rect">
             <a:avLst/>
@@ -8829,7 +8829,7 @@
         <p:spPr>
           <a:xfrm>
             <a:off x="0" y="0"/>
-            <a:ext cx="12188952" cy="411480"/>
+            <a:ext cx="9144000" cy="411480"/>
           </a:xfrm>
           <a:prstGeom prst="rect">
             <a:avLst/>
@@ -8872,7 +8872,7 @@
         <p:spPr>
           <a:xfrm>
             <a:off x="0" y="6583680"/>
-            <a:ext cx="12188952" cy="274320"/>
+            <a:ext cx="9144000" cy="274320"/>
           </a:xfrm>
           <a:prstGeom prst="rect">
             <a:avLst/>
@@ -8914,8 +8914,8 @@
         </p:nvSpPr>
         <p:spPr>
           <a:xfrm>
-            <a:off x="320040" y="6601968"/>
-            <a:ext cx="11521440" cy="201168"/>
+            <a:off x="256032" y="6601968"/>
+            <a:ext cx="8595360" cy="201168"/>
           </a:xfrm>
           <a:prstGeom prst="rect">
             <a:avLst/>
@@ -8949,8 +8949,8 @@
         </p:nvSpPr>
         <p:spPr>
           <a:xfrm>
-            <a:off x="502920" y="475488"/>
-            <a:ext cx="11155680" cy="502920"/>
+            <a:off x="365760" y="475488"/>
+            <a:ext cx="8412480" cy="502920"/>
           </a:xfrm>
           <a:prstGeom prst="rect">
             <a:avLst/>
@@ -8964,7 +8964,7 @@
           <a:lstStyle/>
           <a:p>
             <a:pPr>
-              <a:defRPr sz="2800" b="1">
+              <a:defRPr sz="2400" b="1">
                 <a:solidFill>
                   <a:srgbClr val="512888"/>
                 </a:solidFill>
@@ -8984,8 +8984,8 @@
         </p:nvSpPr>
         <p:spPr>
           <a:xfrm>
-            <a:off x="411480" y="1051560"/>
-            <a:ext cx="8092440" cy="4892040"/>
+            <a:off x="320040" y="1051560"/>
+            <a:ext cx="5989320" cy="4892040"/>
           </a:xfrm>
           <a:prstGeom prst="roundRect">
             <a:avLst/>
@@ -9037,8 +9037,8 @@
         </p:blipFill>
         <p:spPr>
           <a:xfrm>
-            <a:off x="621792" y="1261872"/>
-            <a:ext cx="7680960" cy="4480560"/>
+            <a:off x="475488" y="1261872"/>
+            <a:ext cx="5669280" cy="4480560"/>
           </a:xfrm>
           <a:prstGeom prst="rect">
             <a:avLst/>
@@ -9053,8 +9053,8 @@
         </p:nvSpPr>
         <p:spPr>
           <a:xfrm>
-            <a:off x="8641080" y="1051560"/>
-            <a:ext cx="3063240" cy="4892040"/>
+            <a:off x="6446520" y="1051560"/>
+            <a:ext cx="2377440" cy="4892040"/>
           </a:xfrm>
           <a:prstGeom prst="roundRect">
             <a:avLst/>
@@ -9098,8 +9098,8 @@
         </p:nvSpPr>
         <p:spPr>
           <a:xfrm>
-            <a:off x="8887968" y="1234440"/>
-            <a:ext cx="2651760" cy="4526280"/>
+            <a:off x="6601968" y="1234440"/>
+            <a:ext cx="2084831" cy="4526280"/>
           </a:xfrm>
           <a:prstGeom prst="rect">
             <a:avLst/>
@@ -9113,7 +9113,7 @@
           <a:lstStyle/>
           <a:p>
             <a:pPr>
-              <a:defRPr sz="1500">
+              <a:defRPr sz="1300">
                 <a:solidFill>
                   <a:srgbClr val="251F2D"/>
                 </a:solidFill>
@@ -9125,7 +9125,7 @@
           </a:p>
           <a:p>
             <a:pPr>
-              <a:defRPr sz="1400">
+              <a:defRPr sz="1200">
                 <a:solidFill>
                   <a:srgbClr val="251F2D"/>
                 </a:solidFill>
@@ -9137,7 +9137,7 @@
           </a:p>
           <a:p>
             <a:pPr>
-              <a:defRPr sz="1400">
+              <a:defRPr sz="1200">
                 <a:solidFill>
                   <a:srgbClr val="251F2D"/>
                 </a:solidFill>
@@ -9157,8 +9157,8 @@
         </p:nvSpPr>
         <p:spPr>
           <a:xfrm>
-            <a:off x="658368" y="5623560"/>
-            <a:ext cx="7406640" cy="256032"/>
+            <a:off x="411480" y="5623560"/>
+            <a:ext cx="5852160" cy="256032"/>
           </a:xfrm>
           <a:prstGeom prst="rect">
             <a:avLst/>
@@ -9211,7 +9211,7 @@
         <p:spPr>
           <a:xfrm>
             <a:off x="0" y="0"/>
-            <a:ext cx="12188952" cy="6858000"/>
+            <a:ext cx="9144000" cy="6858000"/>
           </a:xfrm>
           <a:prstGeom prst="rect">
             <a:avLst/>
@@ -9254,7 +9254,7 @@
         <p:spPr>
           <a:xfrm>
             <a:off x="0" y="0"/>
-            <a:ext cx="12188952" cy="411480"/>
+            <a:ext cx="9144000" cy="411480"/>
           </a:xfrm>
           <a:prstGeom prst="rect">
             <a:avLst/>
@@ -9297,7 +9297,7 @@
         <p:spPr>
           <a:xfrm>
             <a:off x="0" y="6583680"/>
-            <a:ext cx="12188952" cy="274320"/>
+            <a:ext cx="9144000" cy="274320"/>
           </a:xfrm>
           <a:prstGeom prst="rect">
             <a:avLst/>
@@ -9339,8 +9339,8 @@
         </p:nvSpPr>
         <p:spPr>
           <a:xfrm>
-            <a:off x="320040" y="6601968"/>
-            <a:ext cx="11521440" cy="201168"/>
+            <a:off x="256032" y="6601968"/>
+            <a:ext cx="8595360" cy="201168"/>
           </a:xfrm>
           <a:prstGeom prst="rect">
             <a:avLst/>
@@ -9374,8 +9374,8 @@
         </p:nvSpPr>
         <p:spPr>
           <a:xfrm>
-            <a:off x="502920" y="475488"/>
-            <a:ext cx="11155680" cy="502920"/>
+            <a:off x="365760" y="475488"/>
+            <a:ext cx="8412480" cy="502920"/>
           </a:xfrm>
           <a:prstGeom prst="rect">
             <a:avLst/>
@@ -9389,7 +9389,7 @@
           <a:lstStyle/>
           <a:p>
             <a:pPr>
-              <a:defRPr sz="2800" b="1">
+              <a:defRPr sz="2400" b="1">
                 <a:solidFill>
                   <a:srgbClr val="512888"/>
                 </a:solidFill>
@@ -9409,8 +9409,8 @@
         </p:nvSpPr>
         <p:spPr>
           <a:xfrm>
-            <a:off x="411480" y="1051560"/>
-            <a:ext cx="8092440" cy="4892040"/>
+            <a:off x="320040" y="1051560"/>
+            <a:ext cx="5989320" cy="4892040"/>
           </a:xfrm>
           <a:prstGeom prst="roundRect">
             <a:avLst/>
@@ -9462,8 +9462,8 @@
         </p:blipFill>
         <p:spPr>
           <a:xfrm>
-            <a:off x="621792" y="1261872"/>
-            <a:ext cx="7680960" cy="4480560"/>
+            <a:off x="475488" y="1261872"/>
+            <a:ext cx="5669280" cy="4480560"/>
           </a:xfrm>
           <a:prstGeom prst="rect">
             <a:avLst/>
@@ -9478,8 +9478,8 @@
         </p:nvSpPr>
         <p:spPr>
           <a:xfrm>
-            <a:off x="8641080" y="1051560"/>
-            <a:ext cx="3063240" cy="4892040"/>
+            <a:off x="6446520" y="1051560"/>
+            <a:ext cx="2377440" cy="4892040"/>
           </a:xfrm>
           <a:prstGeom prst="roundRect">
             <a:avLst/>
@@ -9523,8 +9523,8 @@
         </p:nvSpPr>
         <p:spPr>
           <a:xfrm>
-            <a:off x="8887968" y="1234440"/>
-            <a:ext cx="2651760" cy="4526280"/>
+            <a:off x="6601968" y="1234440"/>
+            <a:ext cx="2084831" cy="4526280"/>
           </a:xfrm>
           <a:prstGeom prst="rect">
             <a:avLst/>
@@ -9538,7 +9538,7 @@
           <a:lstStyle/>
           <a:p>
             <a:pPr>
-              <a:defRPr sz="1500">
+              <a:defRPr sz="1300">
                 <a:solidFill>
                   <a:srgbClr val="251F2D"/>
                 </a:solidFill>
@@ -9550,7 +9550,7 @@
           </a:p>
           <a:p>
             <a:pPr>
-              <a:defRPr sz="1400">
+              <a:defRPr sz="1200">
                 <a:solidFill>
                   <a:srgbClr val="251F2D"/>
                 </a:solidFill>
@@ -9562,7 +9562,7 @@
           </a:p>
           <a:p>
             <a:pPr>
-              <a:defRPr sz="1400">
+              <a:defRPr sz="1200">
                 <a:solidFill>
                   <a:srgbClr val="251F2D"/>
                 </a:solidFill>
@@ -9582,8 +9582,8 @@
         </p:nvSpPr>
         <p:spPr>
           <a:xfrm>
-            <a:off x="658368" y="5623560"/>
-            <a:ext cx="7406640" cy="256032"/>
+            <a:off x="411480" y="5623560"/>
+            <a:ext cx="5852160" cy="256032"/>
           </a:xfrm>
           <a:prstGeom prst="rect">
             <a:avLst/>
